--- a/docs/academic/TeslimEdilecekler/Sunumlar/04_Sonuc_ve_Demo_Sunumu.pptx
+++ b/docs/academic/TeslimEdilecekler/Sunumlar/04_Sonuc_ve_Demo_Sunumu.pptx
@@ -3206,7 +3206,7 @@
                   <a:srgbClr val="B0C8D8"/>
                 </a:solidFill>
               </a:rPr>
-              <a:t>Elde edilen metrikler</a:t>
+              <a:t>Elde edilen metrikler (LightGBM)</a:t>
             </a:r>
           </a:p>
         </p:txBody>
@@ -3317,7 +3317,7 @@
                   <a:srgbClr val="E0A800"/>
                 </a:solidFill>
               </a:rPr>
-              <a:t>%95,48</a:t>
+              <a:t>0,9548</a:t>
             </a:r>
           </a:p>
         </p:txBody>
@@ -3351,7 +3351,7 @@
                   <a:srgbClr val="B0C8D8"/>
                 </a:solidFill>
               </a:rPr>
-              <a:t>±0,0023</a:t>
+              <a:t>5-katlı CV</a:t>
             </a:r>
           </a:p>
         </p:txBody>
@@ -3428,7 +3428,7 @@
                   <a:srgbClr val="FFFFFF"/>
                 </a:solidFill>
               </a:rPr>
-              <a:t>F1-Skoru</a:t>
+              <a:t>Doğruluk</a:t>
             </a:r>
           </a:p>
         </p:txBody>
@@ -3462,7 +3462,7 @@
                   <a:srgbClr val="E0A800"/>
                 </a:solidFill>
               </a:rPr>
-              <a:t>%92,7</a:t>
+              <a:t>0,8839</a:t>
             </a:r>
           </a:p>
         </p:txBody>
@@ -3496,7 +3496,7 @@
                   <a:srgbClr val="B0C8D8"/>
                 </a:solidFill>
               </a:rPr>
-              <a:t>5-fold ort.</a:t>
+              <a:t>θ*=0,4316</a:t>
             </a:r>
           </a:p>
         </p:txBody>
@@ -3573,7 +3573,7 @@
                   <a:srgbClr val="FFFFFF"/>
                 </a:solidFill>
               </a:rPr>
-              <a:t>Brier</a:t>
+              <a:t>F1-Skoru</a:t>
             </a:r>
           </a:p>
         </p:txBody>
@@ -3607,7 +3607,7 @@
                   <a:srgbClr val="E0A800"/>
                 </a:solidFill>
               </a:rPr>
-              <a:t>0,083</a:t>
+              <a:t>0,8575</a:t>
             </a:r>
           </a:p>
         </p:txBody>
@@ -3641,7 +3641,7 @@
                   <a:srgbClr val="B0C8D8"/>
                 </a:solidFill>
               </a:rPr>
-              <a:t>iyi kalibre</a:t>
+              <a:t>dengeli</a:t>
             </a:r>
           </a:p>
         </p:txBody>
@@ -3824,7 +3824,7 @@
                   <a:srgbClr val="333333"/>
                 </a:solidFill>
               </a:rPr>
-              <a:t>LightGBM 11 model içinde tüm metriklerde lider.</a:t>
+              <a:t>LightGBM 11 model içinde en yüksek ROC-AUC (0,9548) değerini sağladı.</a:t>
             </a:r>
           </a:p>
           <a:p>
@@ -3839,7 +3839,7 @@
                   <a:srgbClr val="333333"/>
                 </a:solidFill>
               </a:rPr>
-              <a:t>Spectral Flatness Std Dev en ayırt edici öznitelik (SHAP).</a:t>
+              <a:t>spectral_flatness_std en ayırt edici öznitelik olarak öne çıktı (SHAP).</a:t>
             </a:r>
           </a:p>
           <a:p>
@@ -3854,7 +3854,7 @@
                   <a:srgbClr val="333333"/>
                 </a:solidFill>
               </a:rPr>
-              <a:t>Youden J eşik optimizasyonu F1'i %89,4'ten %92,7'ye taşıdı (+3,3 puan).</a:t>
+              <a:t>Youden J eşik optimizasyonu (θ*=0,4316) dengeli sınıf kararı sağladı.</a:t>
             </a:r>
           </a:p>
         </p:txBody>
@@ -4273,7 +4273,7 @@
                   <a:srgbClr val="333333"/>
                 </a:solidFill>
               </a:rPr>
-              <a:t>2.  Ön işleme: 22 050 Hz, mono, 30 sn.</a:t>
+              <a:t>2.  Ön işleme: 22 050 Hz, mono.</a:t>
             </a:r>
           </a:p>
           <a:p>
@@ -4378,7 +4378,7 @@
                   <a:srgbClr val="333333"/>
                 </a:solidFill>
               </a:rPr>
-              <a:t>Demo videosu teslim paketi içindedir:</a:t>
+              <a:t>Demo videosu teslim paketindedir:</a:t>
             </a:r>
           </a:p>
           <a:p>
@@ -4882,7 +4882,7 @@
                   <a:srgbClr val="333333"/>
                 </a:solidFill>
               </a:rPr>
-              <a:t>11 model soft-voting — tek model yaklaşımlarının üstünde.</a:t>
+              <a:t>11 model — tek model yaklaşımlarının üstünde sonuç.</a:t>
             </a:r>
           </a:p>
         </p:txBody>
@@ -5029,7 +5029,7 @@
                   <a:srgbClr val="333333"/>
                 </a:solidFill>
               </a:rPr>
-              <a:t>Müzik deepfake tespitinde SHAP ilk kez uygulandı.</a:t>
+              <a:t>Müzik deepfake tespitinde TreeSHAP entegrasyonu.</a:t>
             </a:r>
           </a:p>
         </p:txBody>

--- a/docs/academic/TeslimEdilecekler/Sunumlar/04_Sonuc_ve_Demo_Sunumu.pptx
+++ b/docs/academic/TeslimEdilecekler/Sunumlar/04_Sonuc_ve_Demo_Sunumu.pptx
@@ -3109,7 +3109,7 @@
         <p:spPr>
           <a:xfrm>
             <a:off x="0" y="0"/>
-            <a:ext cx="12188952" cy="1417320"/>
+            <a:ext cx="12188952" cy="2468880"/>
           </a:xfrm>
           <a:prstGeom prst="rect">
             <a:avLst/>
@@ -3145,14 +3145,57 @@
       </p:sp>
       <p:sp>
         <p:nvSpPr>
-          <p:cNvPr id="3" name="TextBox 2"/>
+          <p:cNvPr id="3" name="Rectangle 2"/>
+          <p:cNvSpPr/>
+          <p:nvPr/>
+        </p:nvSpPr>
+        <p:spPr>
+          <a:xfrm>
+            <a:off x="0" y="2468880"/>
+            <a:ext cx="12188952" cy="64008"/>
+          </a:xfrm>
+          <a:prstGeom prst="rect">
+            <a:avLst/>
+          </a:prstGeom>
+          <a:solidFill>
+            <a:srgbClr val="E0A800"/>
+          </a:solidFill>
+          <a:ln>
+            <a:noFill/>
+          </a:ln>
+        </p:spPr>
+        <p:style>
+          <a:lnRef idx="1">
+            <a:schemeClr val="accent1"/>
+          </a:lnRef>
+          <a:fillRef idx="3">
+            <a:schemeClr val="accent1"/>
+          </a:fillRef>
+          <a:effectRef idx="2">
+            <a:schemeClr val="accent1"/>
+          </a:effectRef>
+          <a:fontRef idx="minor">
+            <a:schemeClr val="lt1"/>
+          </a:fontRef>
+        </p:style>
+        <p:txBody>
+          <a:bodyPr rtlCol="0" anchor="ctr"/>
+          <a:lstStyle/>
+          <a:p>
+            <a:pPr algn="ctr"/>
+          </a:p>
+        </p:txBody>
+      </p:sp>
+      <p:sp>
+        <p:nvSpPr>
+          <p:cNvPr id="4" name="TextBox 3"/>
           <p:cNvSpPr txBox="1"/>
           <p:nvPr/>
         </p:nvSpPr>
         <p:spPr>
           <a:xfrm>
-            <a:off x="320040" y="91440"/>
-            <a:ext cx="11521440" cy="822960"/>
+            <a:off x="548640" y="411480"/>
+            <a:ext cx="10972800" cy="365760"/>
           </a:xfrm>
           <a:prstGeom prst="rect">
             <a:avLst/>
@@ -3167,26 +3210,26 @@
           <a:p>
             <a:pPr algn="l"/>
             <a:r>
-              <a:rPr sz="2500" b="1">
-                <a:solidFill>
-                  <a:srgbClr val="FFFFFF"/>
-                </a:solidFill>
-              </a:rPr>
-              <a:t>04 — Sonuç ve Demo</a:t>
-            </a:r>
-          </a:p>
-        </p:txBody>
-      </p:sp>
-      <p:sp>
-        <p:nvSpPr>
-          <p:cNvPr id="4" name="TextBox 3"/>
+              <a:rPr sz="1300" b="1" i="0">
+                <a:solidFill>
+                  <a:srgbClr val="E0A800"/>
+                </a:solidFill>
+              </a:rPr>
+              <a:t>04 — SONUÇ VE DEMO</a:t>
+            </a:r>
+          </a:p>
+        </p:txBody>
+      </p:sp>
+      <p:sp>
+        <p:nvSpPr>
+          <p:cNvPr id="5" name="TextBox 4"/>
           <p:cNvSpPr txBox="1"/>
           <p:nvPr/>
         </p:nvSpPr>
         <p:spPr>
           <a:xfrm>
-            <a:off x="320040" y="841248"/>
-            <a:ext cx="11521440" cy="457200"/>
+            <a:off x="548640" y="868680"/>
+            <a:ext cx="10972800" cy="914400"/>
           </a:xfrm>
           <a:prstGeom prst="rect">
             <a:avLst/>
@@ -3201,26 +3244,60 @@
           <a:p>
             <a:pPr algn="l"/>
             <a:r>
-              <a:rPr sz="1200" b="0">
-                <a:solidFill>
-                  <a:srgbClr val="B0C8D8"/>
-                </a:solidFill>
-              </a:rPr>
-              <a:t>Elde edilen metrikler (LightGBM)</a:t>
-            </a:r>
-          </a:p>
-        </p:txBody>
-      </p:sp>
-      <p:sp>
-        <p:nvSpPr>
-          <p:cNvPr id="5" name="Rectangle 4"/>
+              <a:rPr sz="3400" b="1" i="0">
+                <a:solidFill>
+                  <a:srgbClr val="FFFFFF"/>
+                </a:solidFill>
+              </a:rPr>
+              <a:t>Bulgular ve Çalışan Sistem</a:t>
+            </a:r>
+          </a:p>
+        </p:txBody>
+      </p:sp>
+      <p:sp>
+        <p:nvSpPr>
+          <p:cNvPr id="6" name="TextBox 5"/>
+          <p:cNvSpPr txBox="1"/>
+          <p:nvPr/>
+        </p:nvSpPr>
+        <p:spPr>
+          <a:xfrm>
+            <a:off x="548640" y="1691640"/>
+            <a:ext cx="10972800" cy="548640"/>
+          </a:xfrm>
+          <a:prstGeom prst="rect">
+            <a:avLst/>
+          </a:prstGeom>
+          <a:noFill/>
+        </p:spPr>
+        <p:txBody>
+          <a:bodyPr wrap="square">
+            <a:spAutoFit/>
+          </a:bodyPr>
+          <a:lstStyle/>
+          <a:p>
+            <a:pPr algn="l"/>
+            <a:r>
+              <a:rPr sz="1600" b="0" i="0">
+                <a:solidFill>
+                  <a:srgbClr val="AEC6D6"/>
+                </a:solidFill>
+              </a:rPr>
+              <a:t>LightGBM lider model · gerçek çapraz doğrulama sonuçları</a:t>
+            </a:r>
+          </a:p>
+        </p:txBody>
+      </p:sp>
+      <p:sp>
+        <p:nvSpPr>
+          <p:cNvPr id="7" name="Rectangle 6"/>
           <p:cNvSpPr/>
           <p:nvPr/>
         </p:nvSpPr>
         <p:spPr>
           <a:xfrm>
-            <a:off x="365760" y="1600200"/>
-            <a:ext cx="2743200" cy="2011680"/>
+            <a:off x="640080" y="2971800"/>
+            <a:ext cx="2697480" cy="1371600"/>
           </a:xfrm>
           <a:prstGeom prst="rect">
             <a:avLst/>
@@ -3256,14 +3333,14 @@
       </p:sp>
       <p:sp>
         <p:nvSpPr>
-          <p:cNvPr id="6" name="TextBox 5"/>
+          <p:cNvPr id="8" name="TextBox 7"/>
           <p:cNvSpPr txBox="1"/>
           <p:nvPr/>
         </p:nvSpPr>
         <p:spPr>
           <a:xfrm>
-            <a:off x="457200" y="1691640"/>
-            <a:ext cx="2560320" cy="502920"/>
+            <a:off x="640080" y="3150108"/>
+            <a:ext cx="2697480" cy="685800"/>
           </a:xfrm>
           <a:prstGeom prst="rect">
             <a:avLst/>
@@ -3278,26 +3355,26 @@
           <a:p>
             <a:pPr algn="ctr"/>
             <a:r>
-              <a:rPr sz="1400" b="0">
-                <a:solidFill>
-                  <a:srgbClr val="FFFFFF"/>
-                </a:solidFill>
-              </a:rPr>
-              <a:t>ROC-AUC</a:t>
-            </a:r>
-          </a:p>
-        </p:txBody>
-      </p:sp>
-      <p:sp>
-        <p:nvSpPr>
-          <p:cNvPr id="7" name="TextBox 6"/>
+              <a:rPr sz="2800" b="1" i="0">
+                <a:solidFill>
+                  <a:srgbClr val="E0A800"/>
+                </a:solidFill>
+              </a:rPr>
+              <a:t>0,9548</a:t>
+            </a:r>
+          </a:p>
+        </p:txBody>
+      </p:sp>
+      <p:sp>
+        <p:nvSpPr>
+          <p:cNvPr id="9" name="TextBox 8"/>
           <p:cNvSpPr txBox="1"/>
           <p:nvPr/>
         </p:nvSpPr>
         <p:spPr>
           <a:xfrm>
-            <a:off x="457200" y="2148840"/>
-            <a:ext cx="2560320" cy="777240"/>
+            <a:off x="640080" y="3822191"/>
+            <a:ext cx="2697480" cy="438912"/>
           </a:xfrm>
           <a:prstGeom prst="rect">
             <a:avLst/>
@@ -3312,60 +3389,26 @@
           <a:p>
             <a:pPr algn="ctr"/>
             <a:r>
-              <a:rPr sz="3000" b="1">
-                <a:solidFill>
-                  <a:srgbClr val="E0A800"/>
-                </a:solidFill>
-              </a:rPr>
-              <a:t>0,9548</a:t>
-            </a:r>
-          </a:p>
-        </p:txBody>
-      </p:sp>
-      <p:sp>
-        <p:nvSpPr>
-          <p:cNvPr id="8" name="TextBox 7"/>
-          <p:cNvSpPr txBox="1"/>
-          <p:nvPr/>
-        </p:nvSpPr>
-        <p:spPr>
-          <a:xfrm>
-            <a:off x="457200" y="2880360"/>
-            <a:ext cx="2560320" cy="411480"/>
-          </a:xfrm>
-          <a:prstGeom prst="rect">
-            <a:avLst/>
-          </a:prstGeom>
-          <a:noFill/>
-        </p:spPr>
-        <p:txBody>
-          <a:bodyPr wrap="square">
-            <a:spAutoFit/>
-          </a:bodyPr>
-          <a:lstStyle/>
-          <a:p>
-            <a:pPr algn="ctr"/>
-            <a:r>
-              <a:rPr sz="1200" b="0">
-                <a:solidFill>
-                  <a:srgbClr val="B0C8D8"/>
-                </a:solidFill>
-              </a:rPr>
-              <a:t>5-katlı CV</a:t>
-            </a:r>
-          </a:p>
-        </p:txBody>
-      </p:sp>
-      <p:sp>
-        <p:nvSpPr>
-          <p:cNvPr id="9" name="Rectangle 8"/>
+              <a:rPr sz="1100" b="0" i="0">
+                <a:solidFill>
+                  <a:srgbClr val="FFFFFF"/>
+                </a:solidFill>
+              </a:rPr>
+              <a:t>ROC-AUC</a:t>
+            </a:r>
+          </a:p>
+        </p:txBody>
+      </p:sp>
+      <p:sp>
+        <p:nvSpPr>
+          <p:cNvPr id="10" name="Rectangle 9"/>
           <p:cNvSpPr/>
           <p:nvPr/>
         </p:nvSpPr>
         <p:spPr>
           <a:xfrm>
-            <a:off x="3291840" y="1600200"/>
-            <a:ext cx="2743200" cy="2011680"/>
+            <a:off x="3520440" y="2971800"/>
+            <a:ext cx="2697480" cy="1371600"/>
           </a:xfrm>
           <a:prstGeom prst="rect">
             <a:avLst/>
@@ -3401,14 +3444,14 @@
       </p:sp>
       <p:sp>
         <p:nvSpPr>
-          <p:cNvPr id="10" name="TextBox 9"/>
+          <p:cNvPr id="11" name="TextBox 10"/>
           <p:cNvSpPr txBox="1"/>
           <p:nvPr/>
         </p:nvSpPr>
         <p:spPr>
           <a:xfrm>
-            <a:off x="3383280" y="1691640"/>
-            <a:ext cx="2560320" cy="502920"/>
+            <a:off x="3520440" y="3150108"/>
+            <a:ext cx="2697480" cy="685800"/>
           </a:xfrm>
           <a:prstGeom prst="rect">
             <a:avLst/>
@@ -3423,26 +3466,26 @@
           <a:p>
             <a:pPr algn="ctr"/>
             <a:r>
-              <a:rPr sz="1400" b="0">
-                <a:solidFill>
-                  <a:srgbClr val="FFFFFF"/>
-                </a:solidFill>
-              </a:rPr>
-              <a:t>Doğruluk</a:t>
-            </a:r>
-          </a:p>
-        </p:txBody>
-      </p:sp>
-      <p:sp>
-        <p:nvSpPr>
-          <p:cNvPr id="11" name="TextBox 10"/>
+              <a:rPr sz="2800" b="1" i="0">
+                <a:solidFill>
+                  <a:srgbClr val="E0A800"/>
+                </a:solidFill>
+              </a:rPr>
+              <a:t>0,8839</a:t>
+            </a:r>
+          </a:p>
+        </p:txBody>
+      </p:sp>
+      <p:sp>
+        <p:nvSpPr>
+          <p:cNvPr id="12" name="TextBox 11"/>
           <p:cNvSpPr txBox="1"/>
           <p:nvPr/>
         </p:nvSpPr>
         <p:spPr>
           <a:xfrm>
-            <a:off x="3383280" y="2148840"/>
-            <a:ext cx="2560320" cy="777240"/>
+            <a:off x="3520440" y="3822191"/>
+            <a:ext cx="2697480" cy="438912"/>
           </a:xfrm>
           <a:prstGeom prst="rect">
             <a:avLst/>
@@ -3457,46 +3500,12 @@
           <a:p>
             <a:pPr algn="ctr"/>
             <a:r>
-              <a:rPr sz="3000" b="1">
-                <a:solidFill>
-                  <a:srgbClr val="E0A800"/>
-                </a:solidFill>
-              </a:rPr>
-              <a:t>0,8839</a:t>
-            </a:r>
-          </a:p>
-        </p:txBody>
-      </p:sp>
-      <p:sp>
-        <p:nvSpPr>
-          <p:cNvPr id="12" name="TextBox 11"/>
-          <p:cNvSpPr txBox="1"/>
-          <p:nvPr/>
-        </p:nvSpPr>
-        <p:spPr>
-          <a:xfrm>
-            <a:off x="3383280" y="2880360"/>
-            <a:ext cx="2560320" cy="411480"/>
-          </a:xfrm>
-          <a:prstGeom prst="rect">
-            <a:avLst/>
-          </a:prstGeom>
-          <a:noFill/>
-        </p:spPr>
-        <p:txBody>
-          <a:bodyPr wrap="square">
-            <a:spAutoFit/>
-          </a:bodyPr>
-          <a:lstStyle/>
-          <a:p>
-            <a:pPr algn="ctr"/>
-            <a:r>
-              <a:rPr sz="1200" b="0">
-                <a:solidFill>
-                  <a:srgbClr val="B0C8D8"/>
-                </a:solidFill>
-              </a:rPr>
-              <a:t>θ*=0,4316</a:t>
+              <a:rPr sz="1100" b="0" i="0">
+                <a:solidFill>
+                  <a:srgbClr val="FFFFFF"/>
+                </a:solidFill>
+              </a:rPr>
+              <a:t>Doğruluk</a:t>
             </a:r>
           </a:p>
         </p:txBody>
@@ -3509,8 +3518,8 @@
         </p:nvSpPr>
         <p:spPr>
           <a:xfrm>
-            <a:off x="6217920" y="1600200"/>
-            <a:ext cx="2743200" cy="2011680"/>
+            <a:off x="6400800" y="2971800"/>
+            <a:ext cx="2697480" cy="1371600"/>
           </a:xfrm>
           <a:prstGeom prst="rect">
             <a:avLst/>
@@ -3552,8 +3561,8 @@
         </p:nvSpPr>
         <p:spPr>
           <a:xfrm>
-            <a:off x="6309360" y="1691640"/>
-            <a:ext cx="2560320" cy="502920"/>
+            <a:off x="6400800" y="3150108"/>
+            <a:ext cx="2697480" cy="685800"/>
           </a:xfrm>
           <a:prstGeom prst="rect">
             <a:avLst/>
@@ -3568,12 +3577,12 @@
           <a:p>
             <a:pPr algn="ctr"/>
             <a:r>
-              <a:rPr sz="1400" b="0">
-                <a:solidFill>
-                  <a:srgbClr val="FFFFFF"/>
-                </a:solidFill>
-              </a:rPr>
-              <a:t>F1-Skoru</a:t>
+              <a:rPr sz="2800" b="1" i="0">
+                <a:solidFill>
+                  <a:srgbClr val="E0A800"/>
+                </a:solidFill>
+              </a:rPr>
+              <a:t>0,8575</a:t>
             </a:r>
           </a:p>
         </p:txBody>
@@ -3586,8 +3595,8 @@
         </p:nvSpPr>
         <p:spPr>
           <a:xfrm>
-            <a:off x="6309360" y="2148840"/>
-            <a:ext cx="2560320" cy="777240"/>
+            <a:off x="6400800" y="3822191"/>
+            <a:ext cx="2697480" cy="438912"/>
           </a:xfrm>
           <a:prstGeom prst="rect">
             <a:avLst/>
@@ -3602,60 +3611,26 @@
           <a:p>
             <a:pPr algn="ctr"/>
             <a:r>
-              <a:rPr sz="3000" b="1">
-                <a:solidFill>
-                  <a:srgbClr val="E0A800"/>
-                </a:solidFill>
-              </a:rPr>
-              <a:t>0,8575</a:t>
-            </a:r>
-          </a:p>
-        </p:txBody>
-      </p:sp>
-      <p:sp>
-        <p:nvSpPr>
-          <p:cNvPr id="16" name="TextBox 15"/>
-          <p:cNvSpPr txBox="1"/>
-          <p:nvPr/>
-        </p:nvSpPr>
-        <p:spPr>
-          <a:xfrm>
-            <a:off x="6309360" y="2880360"/>
-            <a:ext cx="2560320" cy="411480"/>
-          </a:xfrm>
-          <a:prstGeom prst="rect">
-            <a:avLst/>
-          </a:prstGeom>
-          <a:noFill/>
-        </p:spPr>
-        <p:txBody>
-          <a:bodyPr wrap="square">
-            <a:spAutoFit/>
-          </a:bodyPr>
-          <a:lstStyle/>
-          <a:p>
-            <a:pPr algn="ctr"/>
-            <a:r>
-              <a:rPr sz="1200" b="0">
-                <a:solidFill>
-                  <a:srgbClr val="B0C8D8"/>
-                </a:solidFill>
-              </a:rPr>
-              <a:t>dengeli</a:t>
-            </a:r>
-          </a:p>
-        </p:txBody>
-      </p:sp>
-      <p:sp>
-        <p:nvSpPr>
-          <p:cNvPr id="17" name="Rectangle 16"/>
+              <a:rPr sz="1100" b="0" i="0">
+                <a:solidFill>
+                  <a:srgbClr val="FFFFFF"/>
+                </a:solidFill>
+              </a:rPr>
+              <a:t>F1-Skoru</a:t>
+            </a:r>
+          </a:p>
+        </p:txBody>
+      </p:sp>
+      <p:sp>
+        <p:nvSpPr>
+          <p:cNvPr id="16" name="Rectangle 15"/>
           <p:cNvSpPr/>
           <p:nvPr/>
         </p:nvSpPr>
         <p:spPr>
           <a:xfrm>
-            <a:off x="9144000" y="1600200"/>
-            <a:ext cx="2743200" cy="2011680"/>
+            <a:off x="9281160" y="2971800"/>
+            <a:ext cx="2423160" cy="1371600"/>
           </a:xfrm>
           <a:prstGeom prst="rect">
             <a:avLst/>
@@ -3691,14 +3666,48 @@
       </p:sp>
       <p:sp>
         <p:nvSpPr>
+          <p:cNvPr id="17" name="TextBox 16"/>
+          <p:cNvSpPr txBox="1"/>
+          <p:nvPr/>
+        </p:nvSpPr>
+        <p:spPr>
+          <a:xfrm>
+            <a:off x="9281160" y="3150108"/>
+            <a:ext cx="2423160" cy="685800"/>
+          </a:xfrm>
+          <a:prstGeom prst="rect">
+            <a:avLst/>
+          </a:prstGeom>
+          <a:noFill/>
+        </p:spPr>
+        <p:txBody>
+          <a:bodyPr wrap="square">
+            <a:spAutoFit/>
+          </a:bodyPr>
+          <a:lstStyle/>
+          <a:p>
+            <a:pPr algn="ctr"/>
+            <a:r>
+              <a:rPr sz="2400" b="1" i="0">
+                <a:solidFill>
+                  <a:srgbClr val="E0A800"/>
+                </a:solidFill>
+              </a:rPr>
+              <a:t>0,4316</a:t>
+            </a:r>
+          </a:p>
+        </p:txBody>
+      </p:sp>
+      <p:sp>
+        <p:nvSpPr>
           <p:cNvPr id="18" name="TextBox 17"/>
           <p:cNvSpPr txBox="1"/>
           <p:nvPr/>
         </p:nvSpPr>
         <p:spPr>
           <a:xfrm>
-            <a:off x="9235440" y="1691640"/>
-            <a:ext cx="2560320" cy="502920"/>
+            <a:off x="9281160" y="3822191"/>
+            <a:ext cx="2423160" cy="438912"/>
           </a:xfrm>
           <a:prstGeom prst="rect">
             <a:avLst/>
@@ -3713,7 +3722,7 @@
           <a:p>
             <a:pPr algn="ctr"/>
             <a:r>
-              <a:rPr sz="1400" b="0">
+              <a:rPr sz="1100" b="0" i="0">
                 <a:solidFill>
                   <a:srgbClr val="FFFFFF"/>
                 </a:solidFill>
@@ -3731,8 +3740,8 @@
         </p:nvSpPr>
         <p:spPr>
           <a:xfrm>
-            <a:off x="9235440" y="2148840"/>
-            <a:ext cx="2560320" cy="777240"/>
+            <a:off x="640080" y="4663440"/>
+            <a:ext cx="11064240" cy="1737360"/>
           </a:xfrm>
           <a:prstGeom prst="rect">
             <a:avLst/>
@@ -3745,14 +3754,48 @@
           </a:bodyPr>
           <a:lstStyle/>
           <a:p>
-            <a:pPr algn="ctr"/>
-            <a:r>
-              <a:rPr sz="3000" b="1">
-                <a:solidFill>
-                  <a:srgbClr val="E0A800"/>
-                </a:solidFill>
-              </a:rPr>
-              <a:t>0,4316</a:t>
+            <a:pPr>
+              <a:spcAft>
+                <a:spcPts val="900"/>
+              </a:spcAft>
+            </a:pPr>
+            <a:r>
+              <a:rPr sz="1300">
+                <a:solidFill>
+                  <a:srgbClr val="2A2A2A"/>
+                </a:solidFill>
+              </a:rPr>
+              <a:t>✓  LightGBM, 11 model içinde en yüksek ROC-AUC ve en düşük varyansı (±0,0023) elde etti.</a:t>
+            </a:r>
+          </a:p>
+          <a:p>
+            <a:pPr>
+              <a:spcAft>
+                <a:spcPts val="900"/>
+              </a:spcAft>
+            </a:pPr>
+            <a:r>
+              <a:rPr sz="1300">
+                <a:solidFill>
+                  <a:srgbClr val="2A2A2A"/>
+                </a:solidFill>
+              </a:rPr>
+              <a:t>✓  spectral_flatness_std, YZ-insan ayrımındaki en belirleyici öznitelik olarak öne çıktı.</a:t>
+            </a:r>
+          </a:p>
+          <a:p>
+            <a:pPr>
+              <a:spcAft>
+                <a:spcPts val="900"/>
+              </a:spcAft>
+            </a:pPr>
+            <a:r>
+              <a:rPr sz="1300">
+                <a:solidFill>
+                  <a:srgbClr val="2A2A2A"/>
+                </a:solidFill>
+              </a:rPr>
+              <a:t>✓  Youden J eşik optimizasyonu, dengesiz sınıf altında dengeli karar sağladı (θ*=0,4316).</a:t>
             </a:r>
           </a:p>
         </p:txBody>
@@ -3765,8 +3808,8 @@
         </p:nvSpPr>
         <p:spPr>
           <a:xfrm>
-            <a:off x="9235440" y="2880360"/>
-            <a:ext cx="2560320" cy="411480"/>
+            <a:off x="365760" y="6510528"/>
+            <a:ext cx="8229600" cy="301752"/>
           </a:xfrm>
           <a:prstGeom prst="rect">
             <a:avLst/>
@@ -3779,14 +3822,14 @@
           </a:bodyPr>
           <a:lstStyle/>
           <a:p>
-            <a:pPr algn="ctr"/>
-            <a:r>
-              <a:rPr sz="1200" b="0">
-                <a:solidFill>
-                  <a:srgbClr val="B0C8D8"/>
-                </a:solidFill>
-              </a:rPr>
-              <a:t>optimum</a:t>
+            <a:pPr algn="l"/>
+            <a:r>
+              <a:rPr sz="900" b="0" i="0">
+                <a:solidFill>
+                  <a:srgbClr val="66707A"/>
+                </a:solidFill>
+              </a:rPr>
+              <a:t>AURIS  ·  Hasan Arthur Altuntaş  ·  BM498 Mezuniyet Tezi</a:t>
             </a:r>
           </a:p>
         </p:txBody>
@@ -3799,8 +3842,8 @@
         </p:nvSpPr>
         <p:spPr>
           <a:xfrm>
-            <a:off x="365760" y="3840480"/>
-            <a:ext cx="11430000" cy="2560320"/>
+            <a:off x="8595360" y="6510528"/>
+            <a:ext cx="3200400" cy="301752"/>
           </a:xfrm>
           <a:prstGeom prst="rect">
             <a:avLst/>
@@ -3813,82 +3856,14 @@
           </a:bodyPr>
           <a:lstStyle/>
           <a:p>
-            <a:pPr>
-              <a:spcAft>
-                <a:spcPts val="700"/>
-              </a:spcAft>
-            </a:pPr>
-            <a:r>
-              <a:rPr sz="1400">
-                <a:solidFill>
-                  <a:srgbClr val="333333"/>
-                </a:solidFill>
-              </a:rPr>
-              <a:t>LightGBM 11 model içinde en yüksek ROC-AUC (0,9548) değerini sağladı.</a:t>
-            </a:r>
-          </a:p>
-          <a:p>
-            <a:pPr>
-              <a:spcAft>
-                <a:spcPts val="700"/>
-              </a:spcAft>
-            </a:pPr>
-            <a:r>
-              <a:rPr sz="1400">
-                <a:solidFill>
-                  <a:srgbClr val="333333"/>
-                </a:solidFill>
-              </a:rPr>
-              <a:t>spectral_flatness_std en ayırt edici öznitelik olarak öne çıktı (SHAP).</a:t>
-            </a:r>
-          </a:p>
-          <a:p>
-            <a:pPr>
-              <a:spcAft>
-                <a:spcPts val="700"/>
-              </a:spcAft>
-            </a:pPr>
-            <a:r>
-              <a:rPr sz="1400">
-                <a:solidFill>
-                  <a:srgbClr val="333333"/>
-                </a:solidFill>
-              </a:rPr>
-              <a:t>Youden J eşik optimizasyonu (θ*=0,4316) dengeli sınıf kararı sağladı.</a:t>
-            </a:r>
-          </a:p>
-        </p:txBody>
-      </p:sp>
-      <p:sp>
-        <p:nvSpPr>
-          <p:cNvPr id="22" name="TextBox 21"/>
-          <p:cNvSpPr txBox="1"/>
-          <p:nvPr/>
-        </p:nvSpPr>
-        <p:spPr>
-          <a:xfrm>
-            <a:off x="0" y="6510528"/>
-            <a:ext cx="12188952" cy="301752"/>
-          </a:xfrm>
-          <a:prstGeom prst="rect">
-            <a:avLst/>
-          </a:prstGeom>
-          <a:noFill/>
-        </p:spPr>
-        <p:txBody>
-          <a:bodyPr wrap="square">
-            <a:spAutoFit/>
-          </a:bodyPr>
-          <a:lstStyle/>
-          <a:p>
-            <a:pPr algn="ctr"/>
-            <a:r>
-              <a:rPr sz="900" b="0">
-                <a:solidFill>
-                  <a:srgbClr val="8899AA"/>
-                </a:solidFill>
-              </a:rPr>
-              <a:t>Hasan Arthur Altuntaş  |  BM498  |  Düzce Üniversitesi  |  2025-2026</a:t>
+            <a:pPr algn="r"/>
+            <a:r>
+              <a:rPr sz="900" b="0" i="0">
+                <a:solidFill>
+                  <a:srgbClr val="66707A"/>
+                </a:solidFill>
+              </a:rPr>
+              <a:t>Düzce Üniversitesi · 2025-2026</a:t>
             </a:r>
           </a:p>
         </p:txBody>
@@ -3928,7 +3903,7 @@
         <p:spPr>
           <a:xfrm>
             <a:off x="0" y="0"/>
-            <a:ext cx="12188952" cy="1417320"/>
+            <a:ext cx="12188952" cy="1371600"/>
           </a:xfrm>
           <a:prstGeom prst="rect">
             <a:avLst/>
@@ -3964,14 +3939,57 @@
       </p:sp>
       <p:sp>
         <p:nvSpPr>
-          <p:cNvPr id="3" name="TextBox 2"/>
+          <p:cNvPr id="3" name="Rectangle 2"/>
+          <p:cNvSpPr/>
+          <p:nvPr/>
+        </p:nvSpPr>
+        <p:spPr>
+          <a:xfrm>
+            <a:off x="0" y="1371600"/>
+            <a:ext cx="12188952" cy="54864"/>
+          </a:xfrm>
+          <a:prstGeom prst="rect">
+            <a:avLst/>
+          </a:prstGeom>
+          <a:solidFill>
+            <a:srgbClr val="E0A800"/>
+          </a:solidFill>
+          <a:ln>
+            <a:noFill/>
+          </a:ln>
+        </p:spPr>
+        <p:style>
+          <a:lnRef idx="1">
+            <a:schemeClr val="accent1"/>
+          </a:lnRef>
+          <a:fillRef idx="3">
+            <a:schemeClr val="accent1"/>
+          </a:fillRef>
+          <a:effectRef idx="2">
+            <a:schemeClr val="accent1"/>
+          </a:effectRef>
+          <a:fontRef idx="minor">
+            <a:schemeClr val="lt1"/>
+          </a:fontRef>
+        </p:style>
+        <p:txBody>
+          <a:bodyPr rtlCol="0" anchor="ctr"/>
+          <a:lstStyle/>
+          <a:p>
+            <a:pPr algn="ctr"/>
+          </a:p>
+        </p:txBody>
+      </p:sp>
+      <p:sp>
+        <p:nvSpPr>
+          <p:cNvPr id="4" name="TextBox 3"/>
           <p:cNvSpPr txBox="1"/>
           <p:nvPr/>
         </p:nvSpPr>
         <p:spPr>
           <a:xfrm>
-            <a:off x="320040" y="91440"/>
-            <a:ext cx="11521440" cy="822960"/>
+            <a:off x="365760" y="109728"/>
+            <a:ext cx="11430000" cy="320040"/>
           </a:xfrm>
           <a:prstGeom prst="rect">
             <a:avLst/>
@@ -3986,26 +4004,26 @@
           <a:p>
             <a:pPr algn="l"/>
             <a:r>
-              <a:rPr sz="2500" b="1">
-                <a:solidFill>
-                  <a:srgbClr val="FFFFFF"/>
-                </a:solidFill>
-              </a:rPr>
-              <a:t>Model Karşılaştırması</a:t>
-            </a:r>
-          </a:p>
-        </p:txBody>
-      </p:sp>
-      <p:sp>
-        <p:nvSpPr>
-          <p:cNvPr id="4" name="TextBox 3"/>
+              <a:rPr sz="1100" b="1" i="0">
+                <a:solidFill>
+                  <a:srgbClr val="E0A800"/>
+                </a:solidFill>
+              </a:rPr>
+              <a:t>SONUÇLAR</a:t>
+            </a:r>
+          </a:p>
+        </p:txBody>
+      </p:sp>
+      <p:sp>
+        <p:nvSpPr>
+          <p:cNvPr id="5" name="TextBox 4"/>
           <p:cNvSpPr txBox="1"/>
           <p:nvPr/>
         </p:nvSpPr>
         <p:spPr>
           <a:xfrm>
-            <a:off x="320040" y="841248"/>
-            <a:ext cx="11521440" cy="457200"/>
+            <a:off x="365760" y="402336"/>
+            <a:ext cx="11430000" cy="640080"/>
           </a:xfrm>
           <a:prstGeom prst="rect">
             <a:avLst/>
@@ -4020,19 +4038,19 @@
           <a:p>
             <a:pPr algn="l"/>
             <a:r>
-              <a:rPr sz="1200" b="0">
-                <a:solidFill>
-                  <a:srgbClr val="B0C8D8"/>
-                </a:solidFill>
-              </a:rPr>
-              <a:t>Tüm modellerin ROC-AUC değerleri</a:t>
+              <a:rPr sz="2400" b="1" i="0">
+                <a:solidFill>
+                  <a:srgbClr val="FFFFFF"/>
+                </a:solidFill>
+              </a:rPr>
+              <a:t>Tüm Modellerin Performans Karşılaştırması</a:t>
             </a:r>
           </a:p>
         </p:txBody>
       </p:sp>
       <p:pic>
         <p:nvPicPr>
-          <p:cNvPr id="5" name="Picture 4" descr="paper_model_comparison.png"/>
+          <p:cNvPr id="6" name="Picture 5" descr="paper_model_comparison.png"/>
           <p:cNvPicPr>
             <a:picLocks noChangeAspect="1"/>
           </p:cNvPicPr>
@@ -4046,8 +4064,8 @@
         </p:blipFill>
         <p:spPr>
           <a:xfrm>
-            <a:off x="365760" y="1508760"/>
-            <a:ext cx="11430000" cy="4663440"/>
+            <a:off x="365760" y="1600200"/>
+            <a:ext cx="7589520" cy="4434840"/>
           </a:xfrm>
           <a:prstGeom prst="rect">
             <a:avLst/>
@@ -4056,14 +4074,14 @@
       </p:pic>
       <p:sp>
         <p:nvSpPr>
-          <p:cNvPr id="6" name="TextBox 5"/>
+          <p:cNvPr id="7" name="TextBox 6"/>
           <p:cNvSpPr txBox="1"/>
           <p:nvPr/>
         </p:nvSpPr>
         <p:spPr>
           <a:xfrm>
-            <a:off x="365760" y="6236208"/>
-            <a:ext cx="11430000" cy="320040"/>
+            <a:off x="365760" y="6071616"/>
+            <a:ext cx="7589520" cy="292608"/>
           </a:xfrm>
           <a:prstGeom prst="rect">
             <a:avLst/>
@@ -4078,26 +4096,112 @@
           <a:p>
             <a:pPr algn="ctr"/>
             <a:r>
-              <a:rPr sz="1100" b="0">
-                <a:solidFill>
-                  <a:srgbClr val="777777"/>
-                </a:solidFill>
-              </a:rPr>
-              <a:t>Şekil 3: Tüm modellerin performans karşılaştırması</a:t>
-            </a:r>
-          </a:p>
-        </p:txBody>
-      </p:sp>
-      <p:sp>
-        <p:nvSpPr>
-          <p:cNvPr id="7" name="TextBox 6"/>
+              <a:rPr sz="1000" b="0" i="1">
+                <a:solidFill>
+                  <a:srgbClr val="66707A"/>
+                </a:solidFill>
+              </a:rPr>
+              <a:t>Şekil 3: Doğruluk, F1 ve ROC-AUC karşılaştırması</a:t>
+            </a:r>
+          </a:p>
+        </p:txBody>
+      </p:sp>
+      <p:sp>
+        <p:nvSpPr>
+          <p:cNvPr id="8" name="Rectangle 7"/>
+          <p:cNvSpPr/>
+          <p:nvPr/>
+        </p:nvSpPr>
+        <p:spPr>
+          <a:xfrm>
+            <a:off x="8138160" y="1600200"/>
+            <a:ext cx="3703320" cy="4434840"/>
+          </a:xfrm>
+          <a:prstGeom prst="rect">
+            <a:avLst/>
+          </a:prstGeom>
+          <a:solidFill>
+            <a:srgbClr val="E0F0F2"/>
+          </a:solidFill>
+          <a:ln>
+            <a:noFill/>
+          </a:ln>
+        </p:spPr>
+        <p:style>
+          <a:lnRef idx="1">
+            <a:schemeClr val="accent1"/>
+          </a:lnRef>
+          <a:fillRef idx="3">
+            <a:schemeClr val="accent1"/>
+          </a:fillRef>
+          <a:effectRef idx="2">
+            <a:schemeClr val="accent1"/>
+          </a:effectRef>
+          <a:fontRef idx="minor">
+            <a:schemeClr val="lt1"/>
+          </a:fontRef>
+        </p:style>
+        <p:txBody>
+          <a:bodyPr rtlCol="0" anchor="ctr"/>
+          <a:lstStyle/>
+          <a:p>
+            <a:pPr algn="ctr"/>
+          </a:p>
+        </p:txBody>
+      </p:sp>
+      <p:sp>
+        <p:nvSpPr>
+          <p:cNvPr id="9" name="Rectangle 8"/>
+          <p:cNvSpPr/>
+          <p:nvPr/>
+        </p:nvSpPr>
+        <p:spPr>
+          <a:xfrm>
+            <a:off x="8138160" y="1600200"/>
+            <a:ext cx="82296" cy="4434840"/>
+          </a:xfrm>
+          <a:prstGeom prst="rect">
+            <a:avLst/>
+          </a:prstGeom>
+          <a:solidFill>
+            <a:srgbClr val="007A87"/>
+          </a:solidFill>
+          <a:ln>
+            <a:noFill/>
+          </a:ln>
+        </p:spPr>
+        <p:style>
+          <a:lnRef idx="1">
+            <a:schemeClr val="accent1"/>
+          </a:lnRef>
+          <a:fillRef idx="3">
+            <a:schemeClr val="accent1"/>
+          </a:fillRef>
+          <a:effectRef idx="2">
+            <a:schemeClr val="accent1"/>
+          </a:effectRef>
+          <a:fontRef idx="minor">
+            <a:schemeClr val="lt1"/>
+          </a:fontRef>
+        </p:style>
+        <p:txBody>
+          <a:bodyPr rtlCol="0" anchor="ctr"/>
+          <a:lstStyle/>
+          <a:p>
+            <a:pPr algn="ctr"/>
+          </a:p>
+        </p:txBody>
+      </p:sp>
+      <p:sp>
+        <p:nvSpPr>
+          <p:cNvPr id="10" name="TextBox 9"/>
           <p:cNvSpPr txBox="1"/>
           <p:nvPr/>
         </p:nvSpPr>
         <p:spPr>
           <a:xfrm>
-            <a:off x="0" y="6510528"/>
-            <a:ext cx="12188952" cy="301752"/>
+            <a:off x="8339328" y="1709928"/>
+            <a:ext cx="3383279" cy="365760"/>
           </a:xfrm>
           <a:prstGeom prst="rect">
             <a:avLst/>
@@ -4110,14 +4214,119 @@
           </a:bodyPr>
           <a:lstStyle/>
           <a:p>
-            <a:pPr algn="ctr"/>
-            <a:r>
-              <a:rPr sz="900" b="0">
-                <a:solidFill>
-                  <a:srgbClr val="8899AA"/>
-                </a:solidFill>
-              </a:rPr>
-              <a:t>Hasan Arthur Altuntaş  |  BM498  |  Düzce Üniversitesi  |  2025-2026</a:t>
+            <a:pPr algn="l"/>
+            <a:r>
+              <a:rPr sz="1300" b="1" i="0">
+                <a:solidFill>
+                  <a:srgbClr val="0D2B55"/>
+                </a:solidFill>
+              </a:rPr>
+              <a:t>Öne çıkanlar</a:t>
+            </a:r>
+          </a:p>
+        </p:txBody>
+      </p:sp>
+      <p:sp>
+        <p:nvSpPr>
+          <p:cNvPr id="11" name="TextBox 10"/>
+          <p:cNvSpPr txBox="1"/>
+          <p:nvPr/>
+        </p:nvSpPr>
+        <p:spPr>
+          <a:xfrm>
+            <a:off x="8339328" y="2103120"/>
+            <a:ext cx="3383279" cy="3840479"/>
+          </a:xfrm>
+          <a:prstGeom prst="rect">
+            <a:avLst/>
+          </a:prstGeom>
+          <a:noFill/>
+        </p:spPr>
+        <p:txBody>
+          <a:bodyPr wrap="square">
+            <a:spAutoFit/>
+          </a:bodyPr>
+          <a:lstStyle/>
+          <a:p>
+            <a:pPr algn="l"/>
+            <a:r>
+              <a:rPr sz="1200" b="0" i="0">
+                <a:solidFill>
+                  <a:srgbClr val="2A2A2A"/>
+                </a:solidFill>
+              </a:rPr>
+              <a:t>•  LightGBM (0,9548) ve Derin ÇKA (0,9542) başa baş.
+•  7 ML modeli ort. %92,75 ROC-AUC; 4 DL modeli ort. %92,32.
+•  1B-ESA hariç tutulduğunda DL ort. %94,62'ye yükseliyor.
+•  Sonuç: 47 boyutlu öznitelik vektörü ayırt edici bilginin büyük bölümünü kodluyor; öznitelik mühendisliği model kapasitesinin önüne geçiyor.</a:t>
+            </a:r>
+          </a:p>
+        </p:txBody>
+      </p:sp>
+      <p:sp>
+        <p:nvSpPr>
+          <p:cNvPr id="12" name="TextBox 11"/>
+          <p:cNvSpPr txBox="1"/>
+          <p:nvPr/>
+        </p:nvSpPr>
+        <p:spPr>
+          <a:xfrm>
+            <a:off x="365760" y="6510528"/>
+            <a:ext cx="8229600" cy="301752"/>
+          </a:xfrm>
+          <a:prstGeom prst="rect">
+            <a:avLst/>
+          </a:prstGeom>
+          <a:noFill/>
+        </p:spPr>
+        <p:txBody>
+          <a:bodyPr wrap="square">
+            <a:spAutoFit/>
+          </a:bodyPr>
+          <a:lstStyle/>
+          <a:p>
+            <a:pPr algn="l"/>
+            <a:r>
+              <a:rPr sz="900" b="0" i="0">
+                <a:solidFill>
+                  <a:srgbClr val="66707A"/>
+                </a:solidFill>
+              </a:rPr>
+              <a:t>AURIS  ·  Hasan Arthur Altuntaş  ·  BM498 Mezuniyet Tezi</a:t>
+            </a:r>
+          </a:p>
+        </p:txBody>
+      </p:sp>
+      <p:sp>
+        <p:nvSpPr>
+          <p:cNvPr id="13" name="TextBox 12"/>
+          <p:cNvSpPr txBox="1"/>
+          <p:nvPr/>
+        </p:nvSpPr>
+        <p:spPr>
+          <a:xfrm>
+            <a:off x="8595360" y="6510528"/>
+            <a:ext cx="3200400" cy="301752"/>
+          </a:xfrm>
+          <a:prstGeom prst="rect">
+            <a:avLst/>
+          </a:prstGeom>
+          <a:noFill/>
+        </p:spPr>
+        <p:txBody>
+          <a:bodyPr wrap="square">
+            <a:spAutoFit/>
+          </a:bodyPr>
+          <a:lstStyle/>
+          <a:p>
+            <a:pPr algn="r"/>
+            <a:r>
+              <a:rPr sz="900" b="0" i="0">
+                <a:solidFill>
+                  <a:srgbClr val="66707A"/>
+                </a:solidFill>
+              </a:rPr>
+              <a:t>Düzce Üniversitesi · 2025-2026</a:t>
             </a:r>
           </a:p>
         </p:txBody>
@@ -4157,7 +4366,7 @@
         <p:spPr>
           <a:xfrm>
             <a:off x="0" y="0"/>
-            <a:ext cx="12188952" cy="1417320"/>
+            <a:ext cx="12188952" cy="1371600"/>
           </a:xfrm>
           <a:prstGeom prst="rect">
             <a:avLst/>
@@ -4193,14 +4402,57 @@
       </p:sp>
       <p:sp>
         <p:nvSpPr>
-          <p:cNvPr id="3" name="TextBox 2"/>
+          <p:cNvPr id="3" name="Rectangle 2"/>
+          <p:cNvSpPr/>
+          <p:nvPr/>
+        </p:nvSpPr>
+        <p:spPr>
+          <a:xfrm>
+            <a:off x="0" y="1371600"/>
+            <a:ext cx="12188952" cy="54864"/>
+          </a:xfrm>
+          <a:prstGeom prst="rect">
+            <a:avLst/>
+          </a:prstGeom>
+          <a:solidFill>
+            <a:srgbClr val="E0A800"/>
+          </a:solidFill>
+          <a:ln>
+            <a:noFill/>
+          </a:ln>
+        </p:spPr>
+        <p:style>
+          <a:lnRef idx="1">
+            <a:schemeClr val="accent1"/>
+          </a:lnRef>
+          <a:fillRef idx="3">
+            <a:schemeClr val="accent1"/>
+          </a:fillRef>
+          <a:effectRef idx="2">
+            <a:schemeClr val="accent1"/>
+          </a:effectRef>
+          <a:fontRef idx="minor">
+            <a:schemeClr val="lt1"/>
+          </a:fontRef>
+        </p:style>
+        <p:txBody>
+          <a:bodyPr rtlCol="0" anchor="ctr"/>
+          <a:lstStyle/>
+          <a:p>
+            <a:pPr algn="ctr"/>
+          </a:p>
+        </p:txBody>
+      </p:sp>
+      <p:sp>
+        <p:nvSpPr>
+          <p:cNvPr id="4" name="TextBox 3"/>
           <p:cNvSpPr txBox="1"/>
           <p:nvPr/>
         </p:nvSpPr>
         <p:spPr>
           <a:xfrm>
-            <a:off x="320040" y="91440"/>
-            <a:ext cx="11521440" cy="822960"/>
+            <a:off x="365760" y="109728"/>
+            <a:ext cx="11430000" cy="320040"/>
           </a:xfrm>
           <a:prstGeom prst="rect">
             <a:avLst/>
@@ -4215,26 +4467,26 @@
           <a:p>
             <a:pPr algn="l"/>
             <a:r>
-              <a:rPr sz="2500" b="1">
-                <a:solidFill>
-                  <a:srgbClr val="FFFFFF"/>
-                </a:solidFill>
-              </a:rPr>
-              <a:t>Demo — Sistem Çalışma Akışı</a:t>
-            </a:r>
-          </a:p>
-        </p:txBody>
-      </p:sp>
-      <p:sp>
-        <p:nvSpPr>
-          <p:cNvPr id="4" name="TextBox 3"/>
+              <a:rPr sz="1100" b="1" i="0">
+                <a:solidFill>
+                  <a:srgbClr val="E0A800"/>
+                </a:solidFill>
+              </a:rPr>
+              <a:t>DEMO</a:t>
+            </a:r>
+          </a:p>
+        </p:txBody>
+      </p:sp>
+      <p:sp>
+        <p:nvSpPr>
+          <p:cNvPr id="5" name="TextBox 4"/>
           <p:cNvSpPr txBox="1"/>
           <p:nvPr/>
         </p:nvSpPr>
         <p:spPr>
           <a:xfrm>
-            <a:off x="457200" y="1554480"/>
-            <a:ext cx="5943600" cy="4754880"/>
+            <a:off x="365760" y="402336"/>
+            <a:ext cx="11430000" cy="640080"/>
           </a:xfrm>
           <a:prstGeom prst="rect">
             <a:avLst/>
@@ -4247,160 +4499,1161 @@
           </a:bodyPr>
           <a:lstStyle/>
           <a:p>
-            <a:pPr>
-              <a:spcAft>
-                <a:spcPts val="400"/>
-              </a:spcAft>
-            </a:pPr>
-            <a:r>
-              <a:rPr sz="1400">
-                <a:solidFill>
-                  <a:srgbClr val="333333"/>
-                </a:solidFill>
-              </a:rPr>
-              <a:t>1.  Müzik dosyası yüklenir (WAV / MP3).</a:t>
-            </a:r>
-          </a:p>
-          <a:p>
-            <a:pPr>
-              <a:spcAft>
-                <a:spcPts val="400"/>
-              </a:spcAft>
-            </a:pPr>
-            <a:r>
-              <a:rPr sz="1400">
-                <a:solidFill>
-                  <a:srgbClr val="333333"/>
-                </a:solidFill>
-              </a:rPr>
-              <a:t>2.  Ön işleme: 22 050 Hz, mono.</a:t>
-            </a:r>
-          </a:p>
-          <a:p>
-            <a:pPr>
-              <a:spcAft>
-                <a:spcPts val="400"/>
-              </a:spcAft>
-            </a:pPr>
-            <a:r>
-              <a:rPr sz="1400">
-                <a:solidFill>
-                  <a:srgbClr val="333333"/>
-                </a:solidFill>
-              </a:rPr>
-              <a:t>3.  47 öznitelik çıkarılır (librosa).</a:t>
-            </a:r>
-          </a:p>
-          <a:p>
-            <a:pPr>
-              <a:spcAft>
-                <a:spcPts val="400"/>
-              </a:spcAft>
-            </a:pPr>
-            <a:r>
-              <a:rPr sz="1400">
-                <a:solidFill>
-                  <a:srgbClr val="333333"/>
-                </a:solidFill>
-              </a:rPr>
-              <a:t>4.  LightGBM olasılık üretir.</a:t>
-            </a:r>
-          </a:p>
-          <a:p>
-            <a:pPr>
-              <a:spcAft>
-                <a:spcPts val="400"/>
-              </a:spcAft>
-            </a:pPr>
-            <a:r>
-              <a:rPr sz="1400">
-                <a:solidFill>
-                  <a:srgbClr val="333333"/>
-                </a:solidFill>
-              </a:rPr>
-              <a:t>5.  θ* = 0,4316 eşiği uygulanır.</a:t>
-            </a:r>
-          </a:p>
-          <a:p>
-            <a:pPr>
-              <a:spcAft>
-                <a:spcPts val="400"/>
-              </a:spcAft>
-            </a:pPr>
-            <a:r>
-              <a:rPr sz="1400">
-                <a:solidFill>
-                  <a:srgbClr val="333333"/>
-                </a:solidFill>
-              </a:rPr>
-              <a:t>6.  Çıktı: 'YZ' / 'İnsan' + olasılık skoru.</a:t>
-            </a:r>
-          </a:p>
-          <a:p>
-            <a:pPr>
-              <a:spcAft>
-                <a:spcPts val="400"/>
-              </a:spcAft>
-            </a:pPr>
-            <a:r>
-              <a:rPr sz="1400">
-                <a:solidFill>
-                  <a:srgbClr val="333333"/>
-                </a:solidFill>
-              </a:rPr>
-              <a:t>7.  SHAP ile karar yorumlanır.</a:t>
-            </a:r>
-          </a:p>
-          <a:p>
-            <a:pPr>
-              <a:spcAft>
-                <a:spcPts val="400"/>
-              </a:spcAft>
-            </a:pPr>
-            <a:r>
-              <a:rPr sz="1400">
-                <a:solidFill>
-                  <a:srgbClr val="333333"/>
-                </a:solidFill>
-              </a:rPr>
-              <a:t/>
-            </a:r>
-          </a:p>
-          <a:p>
-            <a:pPr>
-              <a:spcAft>
-                <a:spcPts val="400"/>
-              </a:spcAft>
-            </a:pPr>
-            <a:r>
-              <a:rPr sz="1400">
-                <a:solidFill>
-                  <a:srgbClr val="333333"/>
-                </a:solidFill>
-              </a:rPr>
-              <a:t>Demo videosu teslim paketindedir:</a:t>
-            </a:r>
-          </a:p>
-          <a:p>
-            <a:pPr>
-              <a:spcAft>
-                <a:spcPts val="400"/>
-              </a:spcAft>
-            </a:pPr>
-            <a:r>
-              <a:rPr sz="1400">
-                <a:solidFill>
-                  <a:srgbClr val="333333"/>
-                </a:solidFill>
-              </a:rPr>
-              <a:t>  Uygulama/demo_video.mp4</a:t>
+            <a:pPr algn="l"/>
+            <a:r>
+              <a:rPr sz="2400" b="1" i="0">
+                <a:solidFill>
+                  <a:srgbClr val="FFFFFF"/>
+                </a:solidFill>
+              </a:rPr>
+              <a:t>Sistem Çalışma Akışı</a:t>
+            </a:r>
+          </a:p>
+        </p:txBody>
+      </p:sp>
+      <p:sp>
+        <p:nvSpPr>
+          <p:cNvPr id="6" name="Rectangle 5"/>
+          <p:cNvSpPr/>
+          <p:nvPr/>
+        </p:nvSpPr>
+        <p:spPr>
+          <a:xfrm>
+            <a:off x="365760" y="1600200"/>
+            <a:ext cx="6766560" cy="658368"/>
+          </a:xfrm>
+          <a:prstGeom prst="rect">
+            <a:avLst/>
+          </a:prstGeom>
+          <a:solidFill>
+            <a:srgbClr val="FFFFFF"/>
+          </a:solidFill>
+          <a:ln w="12700">
+            <a:solidFill>
+              <a:srgbClr val="007A87"/>
+            </a:solidFill>
+          </a:ln>
+        </p:spPr>
+        <p:style>
+          <a:lnRef idx="1">
+            <a:schemeClr val="accent1"/>
+          </a:lnRef>
+          <a:fillRef idx="3">
+            <a:schemeClr val="accent1"/>
+          </a:fillRef>
+          <a:effectRef idx="2">
+            <a:schemeClr val="accent1"/>
+          </a:effectRef>
+          <a:fontRef idx="minor">
+            <a:schemeClr val="lt1"/>
+          </a:fontRef>
+        </p:style>
+        <p:txBody>
+          <a:bodyPr rtlCol="0" anchor="ctr"/>
+          <a:lstStyle/>
+          <a:p>
+            <a:pPr algn="ctr"/>
+          </a:p>
+        </p:txBody>
+      </p:sp>
+      <p:sp>
+        <p:nvSpPr>
+          <p:cNvPr id="7" name="Rectangle 6"/>
+          <p:cNvSpPr/>
+          <p:nvPr/>
+        </p:nvSpPr>
+        <p:spPr>
+          <a:xfrm>
+            <a:off x="365760" y="1600200"/>
+            <a:ext cx="566928" cy="658368"/>
+          </a:xfrm>
+          <a:prstGeom prst="rect">
+            <a:avLst/>
+          </a:prstGeom>
+          <a:solidFill>
+            <a:srgbClr val="0D2B55"/>
+          </a:solidFill>
+          <a:ln>
+            <a:noFill/>
+          </a:ln>
+        </p:spPr>
+        <p:style>
+          <a:lnRef idx="1">
+            <a:schemeClr val="accent1"/>
+          </a:lnRef>
+          <a:fillRef idx="3">
+            <a:schemeClr val="accent1"/>
+          </a:fillRef>
+          <a:effectRef idx="2">
+            <a:schemeClr val="accent1"/>
+          </a:effectRef>
+          <a:fontRef idx="minor">
+            <a:schemeClr val="lt1"/>
+          </a:fontRef>
+        </p:style>
+        <p:txBody>
+          <a:bodyPr rtlCol="0" anchor="ctr"/>
+          <a:lstStyle/>
+          <a:p>
+            <a:pPr algn="ctr"/>
+          </a:p>
+        </p:txBody>
+      </p:sp>
+      <p:sp>
+        <p:nvSpPr>
+          <p:cNvPr id="8" name="TextBox 7"/>
+          <p:cNvSpPr txBox="1"/>
+          <p:nvPr/>
+        </p:nvSpPr>
+        <p:spPr>
+          <a:xfrm>
+            <a:off x="365760" y="1636776"/>
+            <a:ext cx="566928" cy="585216"/>
+          </a:xfrm>
+          <a:prstGeom prst="rect">
+            <a:avLst/>
+          </a:prstGeom>
+          <a:noFill/>
+        </p:spPr>
+        <p:txBody>
+          <a:bodyPr wrap="square" anchor="ctr">
+            <a:spAutoFit/>
+          </a:bodyPr>
+          <a:lstStyle/>
+          <a:p>
+            <a:pPr algn="ctr"/>
+            <a:r>
+              <a:rPr sz="2000" b="1" i="0">
+                <a:solidFill>
+                  <a:srgbClr val="E0A800"/>
+                </a:solidFill>
+              </a:rPr>
+              <a:t>1</a:t>
+            </a:r>
+          </a:p>
+        </p:txBody>
+      </p:sp>
+      <p:sp>
+        <p:nvSpPr>
+          <p:cNvPr id="9" name="TextBox 8"/>
+          <p:cNvSpPr txBox="1"/>
+          <p:nvPr/>
+        </p:nvSpPr>
+        <p:spPr>
+          <a:xfrm>
+            <a:off x="1097280" y="1673352"/>
+            <a:ext cx="5943600" cy="292608"/>
+          </a:xfrm>
+          <a:prstGeom prst="rect">
+            <a:avLst/>
+          </a:prstGeom>
+          <a:noFill/>
+        </p:spPr>
+        <p:txBody>
+          <a:bodyPr wrap="square">
+            <a:spAutoFit/>
+          </a:bodyPr>
+          <a:lstStyle/>
+          <a:p>
+            <a:pPr algn="l"/>
+            <a:r>
+              <a:rPr sz="1250" b="1" i="0">
+                <a:solidFill>
+                  <a:srgbClr val="0D2B55"/>
+                </a:solidFill>
+              </a:rPr>
+              <a:t>Müzik dosyası yüklenir</a:t>
+            </a:r>
+          </a:p>
+        </p:txBody>
+      </p:sp>
+      <p:sp>
+        <p:nvSpPr>
+          <p:cNvPr id="10" name="TextBox 9"/>
+          <p:cNvSpPr txBox="1"/>
+          <p:nvPr/>
+        </p:nvSpPr>
+        <p:spPr>
+          <a:xfrm>
+            <a:off x="1097280" y="1965960"/>
+            <a:ext cx="5943600" cy="274320"/>
+          </a:xfrm>
+          <a:prstGeom prst="rect">
+            <a:avLst/>
+          </a:prstGeom>
+          <a:noFill/>
+        </p:spPr>
+        <p:txBody>
+          <a:bodyPr wrap="square">
+            <a:spAutoFit/>
+          </a:bodyPr>
+          <a:lstStyle/>
+          <a:p>
+            <a:pPr algn="l"/>
+            <a:r>
+              <a:rPr sz="1050" b="0" i="0">
+                <a:solidFill>
+                  <a:srgbClr val="2A2A2A"/>
+                </a:solidFill>
+              </a:rPr>
+              <a:t>WAV / MP3 formatı kabul edilir</a:t>
+            </a:r>
+          </a:p>
+        </p:txBody>
+      </p:sp>
+      <p:sp>
+        <p:nvSpPr>
+          <p:cNvPr id="11" name="Rectangle 10"/>
+          <p:cNvSpPr/>
+          <p:nvPr/>
+        </p:nvSpPr>
+        <p:spPr>
+          <a:xfrm>
+            <a:off x="365760" y="2350008"/>
+            <a:ext cx="6766560" cy="658368"/>
+          </a:xfrm>
+          <a:prstGeom prst="rect">
+            <a:avLst/>
+          </a:prstGeom>
+          <a:solidFill>
+            <a:srgbClr val="FFFFFF"/>
+          </a:solidFill>
+          <a:ln w="12700">
+            <a:solidFill>
+              <a:srgbClr val="007A87"/>
+            </a:solidFill>
+          </a:ln>
+        </p:spPr>
+        <p:style>
+          <a:lnRef idx="1">
+            <a:schemeClr val="accent1"/>
+          </a:lnRef>
+          <a:fillRef idx="3">
+            <a:schemeClr val="accent1"/>
+          </a:fillRef>
+          <a:effectRef idx="2">
+            <a:schemeClr val="accent1"/>
+          </a:effectRef>
+          <a:fontRef idx="minor">
+            <a:schemeClr val="lt1"/>
+          </a:fontRef>
+        </p:style>
+        <p:txBody>
+          <a:bodyPr rtlCol="0" anchor="ctr"/>
+          <a:lstStyle/>
+          <a:p>
+            <a:pPr algn="ctr"/>
+          </a:p>
+        </p:txBody>
+      </p:sp>
+      <p:sp>
+        <p:nvSpPr>
+          <p:cNvPr id="12" name="Rectangle 11"/>
+          <p:cNvSpPr/>
+          <p:nvPr/>
+        </p:nvSpPr>
+        <p:spPr>
+          <a:xfrm>
+            <a:off x="365760" y="2350008"/>
+            <a:ext cx="566928" cy="658368"/>
+          </a:xfrm>
+          <a:prstGeom prst="rect">
+            <a:avLst/>
+          </a:prstGeom>
+          <a:solidFill>
+            <a:srgbClr val="0D2B55"/>
+          </a:solidFill>
+          <a:ln>
+            <a:noFill/>
+          </a:ln>
+        </p:spPr>
+        <p:style>
+          <a:lnRef idx="1">
+            <a:schemeClr val="accent1"/>
+          </a:lnRef>
+          <a:fillRef idx="3">
+            <a:schemeClr val="accent1"/>
+          </a:fillRef>
+          <a:effectRef idx="2">
+            <a:schemeClr val="accent1"/>
+          </a:effectRef>
+          <a:fontRef idx="minor">
+            <a:schemeClr val="lt1"/>
+          </a:fontRef>
+        </p:style>
+        <p:txBody>
+          <a:bodyPr rtlCol="0" anchor="ctr"/>
+          <a:lstStyle/>
+          <a:p>
+            <a:pPr algn="ctr"/>
+          </a:p>
+        </p:txBody>
+      </p:sp>
+      <p:sp>
+        <p:nvSpPr>
+          <p:cNvPr id="13" name="TextBox 12"/>
+          <p:cNvSpPr txBox="1"/>
+          <p:nvPr/>
+        </p:nvSpPr>
+        <p:spPr>
+          <a:xfrm>
+            <a:off x="365760" y="2386584"/>
+            <a:ext cx="566928" cy="585216"/>
+          </a:xfrm>
+          <a:prstGeom prst="rect">
+            <a:avLst/>
+          </a:prstGeom>
+          <a:noFill/>
+        </p:spPr>
+        <p:txBody>
+          <a:bodyPr wrap="square" anchor="ctr">
+            <a:spAutoFit/>
+          </a:bodyPr>
+          <a:lstStyle/>
+          <a:p>
+            <a:pPr algn="ctr"/>
+            <a:r>
+              <a:rPr sz="2000" b="1" i="0">
+                <a:solidFill>
+                  <a:srgbClr val="E0A800"/>
+                </a:solidFill>
+              </a:rPr>
+              <a:t>2</a:t>
+            </a:r>
+          </a:p>
+        </p:txBody>
+      </p:sp>
+      <p:sp>
+        <p:nvSpPr>
+          <p:cNvPr id="14" name="TextBox 13"/>
+          <p:cNvSpPr txBox="1"/>
+          <p:nvPr/>
+        </p:nvSpPr>
+        <p:spPr>
+          <a:xfrm>
+            <a:off x="1097280" y="2423160"/>
+            <a:ext cx="5943600" cy="292608"/>
+          </a:xfrm>
+          <a:prstGeom prst="rect">
+            <a:avLst/>
+          </a:prstGeom>
+          <a:noFill/>
+        </p:spPr>
+        <p:txBody>
+          <a:bodyPr wrap="square">
+            <a:spAutoFit/>
+          </a:bodyPr>
+          <a:lstStyle/>
+          <a:p>
+            <a:pPr algn="l"/>
+            <a:r>
+              <a:rPr sz="1250" b="1" i="0">
+                <a:solidFill>
+                  <a:srgbClr val="0D2B55"/>
+                </a:solidFill>
+              </a:rPr>
+              <a:t>Ön işleme</a:t>
+            </a:r>
+          </a:p>
+        </p:txBody>
+      </p:sp>
+      <p:sp>
+        <p:nvSpPr>
+          <p:cNvPr id="15" name="TextBox 14"/>
+          <p:cNvSpPr txBox="1"/>
+          <p:nvPr/>
+        </p:nvSpPr>
+        <p:spPr>
+          <a:xfrm>
+            <a:off x="1097280" y="2715768"/>
+            <a:ext cx="5943600" cy="274320"/>
+          </a:xfrm>
+          <a:prstGeom prst="rect">
+            <a:avLst/>
+          </a:prstGeom>
+          <a:noFill/>
+        </p:spPr>
+        <p:txBody>
+          <a:bodyPr wrap="square">
+            <a:spAutoFit/>
+          </a:bodyPr>
+          <a:lstStyle/>
+          <a:p>
+            <a:pPr algn="l"/>
+            <a:r>
+              <a:rPr sz="1050" b="0" i="0">
+                <a:solidFill>
+                  <a:srgbClr val="2A2A2A"/>
+                </a:solidFill>
+              </a:rPr>
+              <a:t>22.050 Hz'e indirgenir, mono'ya çevrilir</a:t>
+            </a:r>
+          </a:p>
+        </p:txBody>
+      </p:sp>
+      <p:sp>
+        <p:nvSpPr>
+          <p:cNvPr id="16" name="Rectangle 15"/>
+          <p:cNvSpPr/>
+          <p:nvPr/>
+        </p:nvSpPr>
+        <p:spPr>
+          <a:xfrm>
+            <a:off x="365760" y="3099815"/>
+            <a:ext cx="6766560" cy="658368"/>
+          </a:xfrm>
+          <a:prstGeom prst="rect">
+            <a:avLst/>
+          </a:prstGeom>
+          <a:solidFill>
+            <a:srgbClr val="FFFFFF"/>
+          </a:solidFill>
+          <a:ln w="12700">
+            <a:solidFill>
+              <a:srgbClr val="007A87"/>
+            </a:solidFill>
+          </a:ln>
+        </p:spPr>
+        <p:style>
+          <a:lnRef idx="1">
+            <a:schemeClr val="accent1"/>
+          </a:lnRef>
+          <a:fillRef idx="3">
+            <a:schemeClr val="accent1"/>
+          </a:fillRef>
+          <a:effectRef idx="2">
+            <a:schemeClr val="accent1"/>
+          </a:effectRef>
+          <a:fontRef idx="minor">
+            <a:schemeClr val="lt1"/>
+          </a:fontRef>
+        </p:style>
+        <p:txBody>
+          <a:bodyPr rtlCol="0" anchor="ctr"/>
+          <a:lstStyle/>
+          <a:p>
+            <a:pPr algn="ctr"/>
+          </a:p>
+        </p:txBody>
+      </p:sp>
+      <p:sp>
+        <p:nvSpPr>
+          <p:cNvPr id="17" name="Rectangle 16"/>
+          <p:cNvSpPr/>
+          <p:nvPr/>
+        </p:nvSpPr>
+        <p:spPr>
+          <a:xfrm>
+            <a:off x="365760" y="3099815"/>
+            <a:ext cx="566928" cy="658368"/>
+          </a:xfrm>
+          <a:prstGeom prst="rect">
+            <a:avLst/>
+          </a:prstGeom>
+          <a:solidFill>
+            <a:srgbClr val="0D2B55"/>
+          </a:solidFill>
+          <a:ln>
+            <a:noFill/>
+          </a:ln>
+        </p:spPr>
+        <p:style>
+          <a:lnRef idx="1">
+            <a:schemeClr val="accent1"/>
+          </a:lnRef>
+          <a:fillRef idx="3">
+            <a:schemeClr val="accent1"/>
+          </a:fillRef>
+          <a:effectRef idx="2">
+            <a:schemeClr val="accent1"/>
+          </a:effectRef>
+          <a:fontRef idx="minor">
+            <a:schemeClr val="lt1"/>
+          </a:fontRef>
+        </p:style>
+        <p:txBody>
+          <a:bodyPr rtlCol="0" anchor="ctr"/>
+          <a:lstStyle/>
+          <a:p>
+            <a:pPr algn="ctr"/>
+          </a:p>
+        </p:txBody>
+      </p:sp>
+      <p:sp>
+        <p:nvSpPr>
+          <p:cNvPr id="18" name="TextBox 17"/>
+          <p:cNvSpPr txBox="1"/>
+          <p:nvPr/>
+        </p:nvSpPr>
+        <p:spPr>
+          <a:xfrm>
+            <a:off x="365760" y="3136391"/>
+            <a:ext cx="566928" cy="585216"/>
+          </a:xfrm>
+          <a:prstGeom prst="rect">
+            <a:avLst/>
+          </a:prstGeom>
+          <a:noFill/>
+        </p:spPr>
+        <p:txBody>
+          <a:bodyPr wrap="square" anchor="ctr">
+            <a:spAutoFit/>
+          </a:bodyPr>
+          <a:lstStyle/>
+          <a:p>
+            <a:pPr algn="ctr"/>
+            <a:r>
+              <a:rPr sz="2000" b="1" i="0">
+                <a:solidFill>
+                  <a:srgbClr val="E0A800"/>
+                </a:solidFill>
+              </a:rPr>
+              <a:t>3</a:t>
+            </a:r>
+          </a:p>
+        </p:txBody>
+      </p:sp>
+      <p:sp>
+        <p:nvSpPr>
+          <p:cNvPr id="19" name="TextBox 18"/>
+          <p:cNvSpPr txBox="1"/>
+          <p:nvPr/>
+        </p:nvSpPr>
+        <p:spPr>
+          <a:xfrm>
+            <a:off x="1097280" y="3172968"/>
+            <a:ext cx="5943600" cy="292608"/>
+          </a:xfrm>
+          <a:prstGeom prst="rect">
+            <a:avLst/>
+          </a:prstGeom>
+          <a:noFill/>
+        </p:spPr>
+        <p:txBody>
+          <a:bodyPr wrap="square">
+            <a:spAutoFit/>
+          </a:bodyPr>
+          <a:lstStyle/>
+          <a:p>
+            <a:pPr algn="l"/>
+            <a:r>
+              <a:rPr sz="1250" b="1" i="0">
+                <a:solidFill>
+                  <a:srgbClr val="0D2B55"/>
+                </a:solidFill>
+              </a:rPr>
+              <a:t>Öznitelik çıkarma</a:t>
+            </a:r>
+          </a:p>
+        </p:txBody>
+      </p:sp>
+      <p:sp>
+        <p:nvSpPr>
+          <p:cNvPr id="20" name="TextBox 19"/>
+          <p:cNvSpPr txBox="1"/>
+          <p:nvPr/>
+        </p:nvSpPr>
+        <p:spPr>
+          <a:xfrm>
+            <a:off x="1097280" y="3465575"/>
+            <a:ext cx="5943600" cy="274320"/>
+          </a:xfrm>
+          <a:prstGeom prst="rect">
+            <a:avLst/>
+          </a:prstGeom>
+          <a:noFill/>
+        </p:spPr>
+        <p:txBody>
+          <a:bodyPr wrap="square">
+            <a:spAutoFit/>
+          </a:bodyPr>
+          <a:lstStyle/>
+          <a:p>
+            <a:pPr algn="l"/>
+            <a:r>
+              <a:rPr sz="1050" b="0" i="0">
+                <a:solidFill>
+                  <a:srgbClr val="2A2A2A"/>
+                </a:solidFill>
+              </a:rPr>
+              <a:t>librosa ile 47 boyutlu vektör hesaplanır</a:t>
+            </a:r>
+          </a:p>
+        </p:txBody>
+      </p:sp>
+      <p:sp>
+        <p:nvSpPr>
+          <p:cNvPr id="21" name="Rectangle 20"/>
+          <p:cNvSpPr/>
+          <p:nvPr/>
+        </p:nvSpPr>
+        <p:spPr>
+          <a:xfrm>
+            <a:off x="365760" y="3849624"/>
+            <a:ext cx="6766560" cy="658368"/>
+          </a:xfrm>
+          <a:prstGeom prst="rect">
+            <a:avLst/>
+          </a:prstGeom>
+          <a:solidFill>
+            <a:srgbClr val="FFFFFF"/>
+          </a:solidFill>
+          <a:ln w="12700">
+            <a:solidFill>
+              <a:srgbClr val="007A87"/>
+            </a:solidFill>
+          </a:ln>
+        </p:spPr>
+        <p:style>
+          <a:lnRef idx="1">
+            <a:schemeClr val="accent1"/>
+          </a:lnRef>
+          <a:fillRef idx="3">
+            <a:schemeClr val="accent1"/>
+          </a:fillRef>
+          <a:effectRef idx="2">
+            <a:schemeClr val="accent1"/>
+          </a:effectRef>
+          <a:fontRef idx="minor">
+            <a:schemeClr val="lt1"/>
+          </a:fontRef>
+        </p:style>
+        <p:txBody>
+          <a:bodyPr rtlCol="0" anchor="ctr"/>
+          <a:lstStyle/>
+          <a:p>
+            <a:pPr algn="ctr"/>
+          </a:p>
+        </p:txBody>
+      </p:sp>
+      <p:sp>
+        <p:nvSpPr>
+          <p:cNvPr id="22" name="Rectangle 21"/>
+          <p:cNvSpPr/>
+          <p:nvPr/>
+        </p:nvSpPr>
+        <p:spPr>
+          <a:xfrm>
+            <a:off x="365760" y="3849624"/>
+            <a:ext cx="566928" cy="658368"/>
+          </a:xfrm>
+          <a:prstGeom prst="rect">
+            <a:avLst/>
+          </a:prstGeom>
+          <a:solidFill>
+            <a:srgbClr val="0D2B55"/>
+          </a:solidFill>
+          <a:ln>
+            <a:noFill/>
+          </a:ln>
+        </p:spPr>
+        <p:style>
+          <a:lnRef idx="1">
+            <a:schemeClr val="accent1"/>
+          </a:lnRef>
+          <a:fillRef idx="3">
+            <a:schemeClr val="accent1"/>
+          </a:fillRef>
+          <a:effectRef idx="2">
+            <a:schemeClr val="accent1"/>
+          </a:effectRef>
+          <a:fontRef idx="minor">
+            <a:schemeClr val="lt1"/>
+          </a:fontRef>
+        </p:style>
+        <p:txBody>
+          <a:bodyPr rtlCol="0" anchor="ctr"/>
+          <a:lstStyle/>
+          <a:p>
+            <a:pPr algn="ctr"/>
+          </a:p>
+        </p:txBody>
+      </p:sp>
+      <p:sp>
+        <p:nvSpPr>
+          <p:cNvPr id="23" name="TextBox 22"/>
+          <p:cNvSpPr txBox="1"/>
+          <p:nvPr/>
+        </p:nvSpPr>
+        <p:spPr>
+          <a:xfrm>
+            <a:off x="365760" y="3886200"/>
+            <a:ext cx="566928" cy="585216"/>
+          </a:xfrm>
+          <a:prstGeom prst="rect">
+            <a:avLst/>
+          </a:prstGeom>
+          <a:noFill/>
+        </p:spPr>
+        <p:txBody>
+          <a:bodyPr wrap="square" anchor="ctr">
+            <a:spAutoFit/>
+          </a:bodyPr>
+          <a:lstStyle/>
+          <a:p>
+            <a:pPr algn="ctr"/>
+            <a:r>
+              <a:rPr sz="2000" b="1" i="0">
+                <a:solidFill>
+                  <a:srgbClr val="E0A800"/>
+                </a:solidFill>
+              </a:rPr>
+              <a:t>4</a:t>
+            </a:r>
+          </a:p>
+        </p:txBody>
+      </p:sp>
+      <p:sp>
+        <p:nvSpPr>
+          <p:cNvPr id="24" name="TextBox 23"/>
+          <p:cNvSpPr txBox="1"/>
+          <p:nvPr/>
+        </p:nvSpPr>
+        <p:spPr>
+          <a:xfrm>
+            <a:off x="1097280" y="3922776"/>
+            <a:ext cx="5943600" cy="292608"/>
+          </a:xfrm>
+          <a:prstGeom prst="rect">
+            <a:avLst/>
+          </a:prstGeom>
+          <a:noFill/>
+        </p:spPr>
+        <p:txBody>
+          <a:bodyPr wrap="square">
+            <a:spAutoFit/>
+          </a:bodyPr>
+          <a:lstStyle/>
+          <a:p>
+            <a:pPr algn="l"/>
+            <a:r>
+              <a:rPr sz="1250" b="1" i="0">
+                <a:solidFill>
+                  <a:srgbClr val="0D2B55"/>
+                </a:solidFill>
+              </a:rPr>
+              <a:t>Model tahmini</a:t>
+            </a:r>
+          </a:p>
+        </p:txBody>
+      </p:sp>
+      <p:sp>
+        <p:nvSpPr>
+          <p:cNvPr id="25" name="TextBox 24"/>
+          <p:cNvSpPr txBox="1"/>
+          <p:nvPr/>
+        </p:nvSpPr>
+        <p:spPr>
+          <a:xfrm>
+            <a:off x="1097280" y="4215384"/>
+            <a:ext cx="5943600" cy="274320"/>
+          </a:xfrm>
+          <a:prstGeom prst="rect">
+            <a:avLst/>
+          </a:prstGeom>
+          <a:noFill/>
+        </p:spPr>
+        <p:txBody>
+          <a:bodyPr wrap="square">
+            <a:spAutoFit/>
+          </a:bodyPr>
+          <a:lstStyle/>
+          <a:p>
+            <a:pPr algn="l"/>
+            <a:r>
+              <a:rPr sz="1050" b="0" i="0">
+                <a:solidFill>
+                  <a:srgbClr val="2A2A2A"/>
+                </a:solidFill>
+              </a:rPr>
+              <a:t>LightGBM yapay zekâ olasılığı üretir</a:t>
+            </a:r>
+          </a:p>
+        </p:txBody>
+      </p:sp>
+      <p:sp>
+        <p:nvSpPr>
+          <p:cNvPr id="26" name="Rectangle 25"/>
+          <p:cNvSpPr/>
+          <p:nvPr/>
+        </p:nvSpPr>
+        <p:spPr>
+          <a:xfrm>
+            <a:off x="365760" y="4599431"/>
+            <a:ext cx="6766560" cy="658368"/>
+          </a:xfrm>
+          <a:prstGeom prst="rect">
+            <a:avLst/>
+          </a:prstGeom>
+          <a:solidFill>
+            <a:srgbClr val="FFFFFF"/>
+          </a:solidFill>
+          <a:ln w="12700">
+            <a:solidFill>
+              <a:srgbClr val="007A87"/>
+            </a:solidFill>
+          </a:ln>
+        </p:spPr>
+        <p:style>
+          <a:lnRef idx="1">
+            <a:schemeClr val="accent1"/>
+          </a:lnRef>
+          <a:fillRef idx="3">
+            <a:schemeClr val="accent1"/>
+          </a:fillRef>
+          <a:effectRef idx="2">
+            <a:schemeClr val="accent1"/>
+          </a:effectRef>
+          <a:fontRef idx="minor">
+            <a:schemeClr val="lt1"/>
+          </a:fontRef>
+        </p:style>
+        <p:txBody>
+          <a:bodyPr rtlCol="0" anchor="ctr"/>
+          <a:lstStyle/>
+          <a:p>
+            <a:pPr algn="ctr"/>
+          </a:p>
+        </p:txBody>
+      </p:sp>
+      <p:sp>
+        <p:nvSpPr>
+          <p:cNvPr id="27" name="Rectangle 26"/>
+          <p:cNvSpPr/>
+          <p:nvPr/>
+        </p:nvSpPr>
+        <p:spPr>
+          <a:xfrm>
+            <a:off x="365760" y="4599431"/>
+            <a:ext cx="566928" cy="658368"/>
+          </a:xfrm>
+          <a:prstGeom prst="rect">
+            <a:avLst/>
+          </a:prstGeom>
+          <a:solidFill>
+            <a:srgbClr val="0D2B55"/>
+          </a:solidFill>
+          <a:ln>
+            <a:noFill/>
+          </a:ln>
+        </p:spPr>
+        <p:style>
+          <a:lnRef idx="1">
+            <a:schemeClr val="accent1"/>
+          </a:lnRef>
+          <a:fillRef idx="3">
+            <a:schemeClr val="accent1"/>
+          </a:fillRef>
+          <a:effectRef idx="2">
+            <a:schemeClr val="accent1"/>
+          </a:effectRef>
+          <a:fontRef idx="minor">
+            <a:schemeClr val="lt1"/>
+          </a:fontRef>
+        </p:style>
+        <p:txBody>
+          <a:bodyPr rtlCol="0" anchor="ctr"/>
+          <a:lstStyle/>
+          <a:p>
+            <a:pPr algn="ctr"/>
+          </a:p>
+        </p:txBody>
+      </p:sp>
+      <p:sp>
+        <p:nvSpPr>
+          <p:cNvPr id="28" name="TextBox 27"/>
+          <p:cNvSpPr txBox="1"/>
+          <p:nvPr/>
+        </p:nvSpPr>
+        <p:spPr>
+          <a:xfrm>
+            <a:off x="365760" y="4636007"/>
+            <a:ext cx="566928" cy="585216"/>
+          </a:xfrm>
+          <a:prstGeom prst="rect">
+            <a:avLst/>
+          </a:prstGeom>
+          <a:noFill/>
+        </p:spPr>
+        <p:txBody>
+          <a:bodyPr wrap="square" anchor="ctr">
+            <a:spAutoFit/>
+          </a:bodyPr>
+          <a:lstStyle/>
+          <a:p>
+            <a:pPr algn="ctr"/>
+            <a:r>
+              <a:rPr sz="2000" b="1" i="0">
+                <a:solidFill>
+                  <a:srgbClr val="E0A800"/>
+                </a:solidFill>
+              </a:rPr>
+              <a:t>5</a:t>
+            </a:r>
+          </a:p>
+        </p:txBody>
+      </p:sp>
+      <p:sp>
+        <p:nvSpPr>
+          <p:cNvPr id="29" name="TextBox 28"/>
+          <p:cNvSpPr txBox="1"/>
+          <p:nvPr/>
+        </p:nvSpPr>
+        <p:spPr>
+          <a:xfrm>
+            <a:off x="1097280" y="4672583"/>
+            <a:ext cx="5943600" cy="292608"/>
+          </a:xfrm>
+          <a:prstGeom prst="rect">
+            <a:avLst/>
+          </a:prstGeom>
+          <a:noFill/>
+        </p:spPr>
+        <p:txBody>
+          <a:bodyPr wrap="square">
+            <a:spAutoFit/>
+          </a:bodyPr>
+          <a:lstStyle/>
+          <a:p>
+            <a:pPr algn="l"/>
+            <a:r>
+              <a:rPr sz="1250" b="1" i="0">
+                <a:solidFill>
+                  <a:srgbClr val="0D2B55"/>
+                </a:solidFill>
+              </a:rPr>
+              <a:t>Eşik uygulama</a:t>
+            </a:r>
+          </a:p>
+        </p:txBody>
+      </p:sp>
+      <p:sp>
+        <p:nvSpPr>
+          <p:cNvPr id="30" name="TextBox 29"/>
+          <p:cNvSpPr txBox="1"/>
+          <p:nvPr/>
+        </p:nvSpPr>
+        <p:spPr>
+          <a:xfrm>
+            <a:off x="1097280" y="4965192"/>
+            <a:ext cx="5943600" cy="274320"/>
+          </a:xfrm>
+          <a:prstGeom prst="rect">
+            <a:avLst/>
+          </a:prstGeom>
+          <a:noFill/>
+        </p:spPr>
+        <p:txBody>
+          <a:bodyPr wrap="square">
+            <a:spAutoFit/>
+          </a:bodyPr>
+          <a:lstStyle/>
+          <a:p>
+            <a:pPr algn="l"/>
+            <a:r>
+              <a:rPr sz="1050" b="0" i="0">
+                <a:solidFill>
+                  <a:srgbClr val="2A2A2A"/>
+                </a:solidFill>
+              </a:rPr>
+              <a:t>θ*=0,4316 ile sınıf kararı verilir</a:t>
+            </a:r>
+          </a:p>
+        </p:txBody>
+      </p:sp>
+      <p:sp>
+        <p:nvSpPr>
+          <p:cNvPr id="31" name="Rectangle 30"/>
+          <p:cNvSpPr/>
+          <p:nvPr/>
+        </p:nvSpPr>
+        <p:spPr>
+          <a:xfrm>
+            <a:off x="365760" y="5349240"/>
+            <a:ext cx="6766560" cy="658368"/>
+          </a:xfrm>
+          <a:prstGeom prst="rect">
+            <a:avLst/>
+          </a:prstGeom>
+          <a:solidFill>
+            <a:srgbClr val="FFFFFF"/>
+          </a:solidFill>
+          <a:ln w="12700">
+            <a:solidFill>
+              <a:srgbClr val="007A87"/>
+            </a:solidFill>
+          </a:ln>
+        </p:spPr>
+        <p:style>
+          <a:lnRef idx="1">
+            <a:schemeClr val="accent1"/>
+          </a:lnRef>
+          <a:fillRef idx="3">
+            <a:schemeClr val="accent1"/>
+          </a:fillRef>
+          <a:effectRef idx="2">
+            <a:schemeClr val="accent1"/>
+          </a:effectRef>
+          <a:fontRef idx="minor">
+            <a:schemeClr val="lt1"/>
+          </a:fontRef>
+        </p:style>
+        <p:txBody>
+          <a:bodyPr rtlCol="0" anchor="ctr"/>
+          <a:lstStyle/>
+          <a:p>
+            <a:pPr algn="ctr"/>
+          </a:p>
+        </p:txBody>
+      </p:sp>
+      <p:sp>
+        <p:nvSpPr>
+          <p:cNvPr id="32" name="Rectangle 31"/>
+          <p:cNvSpPr/>
+          <p:nvPr/>
+        </p:nvSpPr>
+        <p:spPr>
+          <a:xfrm>
+            <a:off x="365760" y="5349240"/>
+            <a:ext cx="566928" cy="658368"/>
+          </a:xfrm>
+          <a:prstGeom prst="rect">
+            <a:avLst/>
+          </a:prstGeom>
+          <a:solidFill>
+            <a:srgbClr val="0D2B55"/>
+          </a:solidFill>
+          <a:ln>
+            <a:noFill/>
+          </a:ln>
+        </p:spPr>
+        <p:style>
+          <a:lnRef idx="1">
+            <a:schemeClr val="accent1"/>
+          </a:lnRef>
+          <a:fillRef idx="3">
+            <a:schemeClr val="accent1"/>
+          </a:fillRef>
+          <a:effectRef idx="2">
+            <a:schemeClr val="accent1"/>
+          </a:effectRef>
+          <a:fontRef idx="minor">
+            <a:schemeClr val="lt1"/>
+          </a:fontRef>
+        </p:style>
+        <p:txBody>
+          <a:bodyPr rtlCol="0" anchor="ctr"/>
+          <a:lstStyle/>
+          <a:p>
+            <a:pPr algn="ctr"/>
+          </a:p>
+        </p:txBody>
+      </p:sp>
+      <p:sp>
+        <p:nvSpPr>
+          <p:cNvPr id="33" name="TextBox 32"/>
+          <p:cNvSpPr txBox="1"/>
+          <p:nvPr/>
+        </p:nvSpPr>
+        <p:spPr>
+          <a:xfrm>
+            <a:off x="365760" y="5385816"/>
+            <a:ext cx="566928" cy="585216"/>
+          </a:xfrm>
+          <a:prstGeom prst="rect">
+            <a:avLst/>
+          </a:prstGeom>
+          <a:noFill/>
+        </p:spPr>
+        <p:txBody>
+          <a:bodyPr wrap="square" anchor="ctr">
+            <a:spAutoFit/>
+          </a:bodyPr>
+          <a:lstStyle/>
+          <a:p>
+            <a:pPr algn="ctr"/>
+            <a:r>
+              <a:rPr sz="2000" b="1" i="0">
+                <a:solidFill>
+                  <a:srgbClr val="E0A800"/>
+                </a:solidFill>
+              </a:rPr>
+              <a:t>6</a:t>
+            </a:r>
+          </a:p>
+        </p:txBody>
+      </p:sp>
+      <p:sp>
+        <p:nvSpPr>
+          <p:cNvPr id="34" name="TextBox 33"/>
+          <p:cNvSpPr txBox="1"/>
+          <p:nvPr/>
+        </p:nvSpPr>
+        <p:spPr>
+          <a:xfrm>
+            <a:off x="1097280" y="5422392"/>
+            <a:ext cx="5943600" cy="292608"/>
+          </a:xfrm>
+          <a:prstGeom prst="rect">
+            <a:avLst/>
+          </a:prstGeom>
+          <a:noFill/>
+        </p:spPr>
+        <p:txBody>
+          <a:bodyPr wrap="square">
+            <a:spAutoFit/>
+          </a:bodyPr>
+          <a:lstStyle/>
+          <a:p>
+            <a:pPr algn="l"/>
+            <a:r>
+              <a:rPr sz="1250" b="1" i="0">
+                <a:solidFill>
+                  <a:srgbClr val="0D2B55"/>
+                </a:solidFill>
+              </a:rPr>
+              <a:t>Açıklama</a:t>
+            </a:r>
+          </a:p>
+        </p:txBody>
+      </p:sp>
+      <p:sp>
+        <p:nvSpPr>
+          <p:cNvPr id="35" name="TextBox 34"/>
+          <p:cNvSpPr txBox="1"/>
+          <p:nvPr/>
+        </p:nvSpPr>
+        <p:spPr>
+          <a:xfrm>
+            <a:off x="1097280" y="5715000"/>
+            <a:ext cx="5943600" cy="274320"/>
+          </a:xfrm>
+          <a:prstGeom prst="rect">
+            <a:avLst/>
+          </a:prstGeom>
+          <a:noFill/>
+        </p:spPr>
+        <p:txBody>
+          <a:bodyPr wrap="square">
+            <a:spAutoFit/>
+          </a:bodyPr>
+          <a:lstStyle/>
+          <a:p>
+            <a:pPr algn="l"/>
+            <a:r>
+              <a:rPr sz="1050" b="0" i="0">
+                <a:solidFill>
+                  <a:srgbClr val="2A2A2A"/>
+                </a:solidFill>
+              </a:rPr>
+              <a:t>SHAP ile kararın gerekçesi gösterilir</a:t>
             </a:r>
           </a:p>
         </p:txBody>
       </p:sp>
       <p:pic>
         <p:nvPicPr>
-          <p:cNvPr id="5" name="Picture 4" descr="paper_score_distribution.png"/>
+          <p:cNvPr id="36" name="Picture 35" descr="paper_score_distribution.png"/>
           <p:cNvPicPr>
             <a:picLocks noChangeAspect="1"/>
           </p:cNvPicPr>
@@ -4414,8 +5667,8 @@
         </p:blipFill>
         <p:spPr>
           <a:xfrm>
-            <a:off x="6400800" y="1508760"/>
-            <a:ext cx="5486400" cy="4480560"/>
+            <a:off x="7406640" y="1783080"/>
+            <a:ext cx="4389120" cy="3566160"/>
           </a:xfrm>
           <a:prstGeom prst="rect">
             <a:avLst/>
@@ -4424,14 +5677,14 @@
       </p:pic>
       <p:sp>
         <p:nvSpPr>
-          <p:cNvPr id="6" name="TextBox 5"/>
+          <p:cNvPr id="37" name="TextBox 36"/>
           <p:cNvSpPr txBox="1"/>
           <p:nvPr/>
         </p:nvSpPr>
         <p:spPr>
           <a:xfrm>
-            <a:off x="6400800" y="6035040"/>
-            <a:ext cx="5486400" cy="365760"/>
+            <a:off x="7406640" y="5385816"/>
+            <a:ext cx="4389120" cy="292608"/>
           </a:xfrm>
           <a:prstGeom prst="rect">
             <a:avLst/>
@@ -4446,26 +5699,112 @@
           <a:p>
             <a:pPr algn="ctr"/>
             <a:r>
-              <a:rPr sz="1100" b="0">
-                <a:solidFill>
-                  <a:srgbClr val="777777"/>
-                </a:solidFill>
-              </a:rPr>
-              <a:t>Şekil 9: P(YZ) tahmin olasılık dağılımı</a:t>
-            </a:r>
-          </a:p>
-        </p:txBody>
-      </p:sp>
-      <p:sp>
-        <p:nvSpPr>
-          <p:cNvPr id="7" name="TextBox 6"/>
+              <a:rPr sz="1000" b="0" i="1">
+                <a:solidFill>
+                  <a:srgbClr val="66707A"/>
+                </a:solidFill>
+              </a:rPr>
+              <a:t>Şekil 9: P(YZ) olasılık dağılımı</a:t>
+            </a:r>
+          </a:p>
+        </p:txBody>
+      </p:sp>
+      <p:sp>
+        <p:nvSpPr>
+          <p:cNvPr id="38" name="Rectangle 37"/>
+          <p:cNvSpPr/>
+          <p:nvPr/>
+        </p:nvSpPr>
+        <p:spPr>
+          <a:xfrm>
+            <a:off x="7406640" y="5486400"/>
+            <a:ext cx="4389120" cy="868680"/>
+          </a:xfrm>
+          <a:prstGeom prst="rect">
+            <a:avLst/>
+          </a:prstGeom>
+          <a:solidFill>
+            <a:srgbClr val="E8ECF0"/>
+          </a:solidFill>
+          <a:ln>
+            <a:noFill/>
+          </a:ln>
+        </p:spPr>
+        <p:style>
+          <a:lnRef idx="1">
+            <a:schemeClr val="accent1"/>
+          </a:lnRef>
+          <a:fillRef idx="3">
+            <a:schemeClr val="accent1"/>
+          </a:fillRef>
+          <a:effectRef idx="2">
+            <a:schemeClr val="accent1"/>
+          </a:effectRef>
+          <a:fontRef idx="minor">
+            <a:schemeClr val="lt1"/>
+          </a:fontRef>
+        </p:style>
+        <p:txBody>
+          <a:bodyPr rtlCol="0" anchor="ctr"/>
+          <a:lstStyle/>
+          <a:p>
+            <a:pPr algn="ctr"/>
+          </a:p>
+        </p:txBody>
+      </p:sp>
+      <p:sp>
+        <p:nvSpPr>
+          <p:cNvPr id="39" name="Rectangle 38"/>
+          <p:cNvSpPr/>
+          <p:nvPr/>
+        </p:nvSpPr>
+        <p:spPr>
+          <a:xfrm>
+            <a:off x="7406640" y="5486400"/>
+            <a:ext cx="82296" cy="868680"/>
+          </a:xfrm>
+          <a:prstGeom prst="rect">
+            <a:avLst/>
+          </a:prstGeom>
+          <a:solidFill>
+            <a:srgbClr val="E0A800"/>
+          </a:solidFill>
+          <a:ln>
+            <a:noFill/>
+          </a:ln>
+        </p:spPr>
+        <p:style>
+          <a:lnRef idx="1">
+            <a:schemeClr val="accent1"/>
+          </a:lnRef>
+          <a:fillRef idx="3">
+            <a:schemeClr val="accent1"/>
+          </a:fillRef>
+          <a:effectRef idx="2">
+            <a:schemeClr val="accent1"/>
+          </a:effectRef>
+          <a:fontRef idx="minor">
+            <a:schemeClr val="lt1"/>
+          </a:fontRef>
+        </p:style>
+        <p:txBody>
+          <a:bodyPr rtlCol="0" anchor="ctr"/>
+          <a:lstStyle/>
+          <a:p>
+            <a:pPr algn="ctr"/>
+          </a:p>
+        </p:txBody>
+      </p:sp>
+      <p:sp>
+        <p:nvSpPr>
+          <p:cNvPr id="40" name="TextBox 39"/>
           <p:cNvSpPr txBox="1"/>
           <p:nvPr/>
         </p:nvSpPr>
         <p:spPr>
           <a:xfrm>
-            <a:off x="0" y="6510528"/>
-            <a:ext cx="12188952" cy="301752"/>
+            <a:off x="7607808" y="5596128"/>
+            <a:ext cx="4069080" cy="365760"/>
           </a:xfrm>
           <a:prstGeom prst="rect">
             <a:avLst/>
@@ -4478,14 +5817,116 @@
           </a:bodyPr>
           <a:lstStyle/>
           <a:p>
-            <a:pPr algn="ctr"/>
-            <a:r>
-              <a:rPr sz="900" b="0">
-                <a:solidFill>
-                  <a:srgbClr val="8899AA"/>
-                </a:solidFill>
-              </a:rPr>
-              <a:t>Hasan Arthur Altuntaş  |  BM498  |  Düzce Üniversitesi  |  2025-2026</a:t>
+            <a:pPr algn="l"/>
+            <a:r>
+              <a:rPr sz="1300" b="1" i="0">
+                <a:solidFill>
+                  <a:srgbClr val="0D2B55"/>
+                </a:solidFill>
+              </a:rPr>
+              <a:t>Çıktı</a:t>
+            </a:r>
+          </a:p>
+        </p:txBody>
+      </p:sp>
+      <p:sp>
+        <p:nvSpPr>
+          <p:cNvPr id="41" name="TextBox 40"/>
+          <p:cNvSpPr txBox="1"/>
+          <p:nvPr/>
+        </p:nvSpPr>
+        <p:spPr>
+          <a:xfrm>
+            <a:off x="7607808" y="5989320"/>
+            <a:ext cx="4069080" cy="274319"/>
+          </a:xfrm>
+          <a:prstGeom prst="rect">
+            <a:avLst/>
+          </a:prstGeom>
+          <a:noFill/>
+        </p:spPr>
+        <p:txBody>
+          <a:bodyPr wrap="square">
+            <a:spAutoFit/>
+          </a:bodyPr>
+          <a:lstStyle/>
+          <a:p>
+            <a:pPr algn="l"/>
+            <a:r>
+              <a:rPr sz="1200" b="0" i="0">
+                <a:solidFill>
+                  <a:srgbClr val="2A2A2A"/>
+                </a:solidFill>
+              </a:rPr>
+              <a:t>Sınıf etiketi (YZ / İnsan) + güven skoru + SHAP gerekçesi. Demo videosu teslim paketinde (Uygulama/).</a:t>
+            </a:r>
+          </a:p>
+        </p:txBody>
+      </p:sp>
+      <p:sp>
+        <p:nvSpPr>
+          <p:cNvPr id="42" name="TextBox 41"/>
+          <p:cNvSpPr txBox="1"/>
+          <p:nvPr/>
+        </p:nvSpPr>
+        <p:spPr>
+          <a:xfrm>
+            <a:off x="365760" y="6510528"/>
+            <a:ext cx="8229600" cy="301752"/>
+          </a:xfrm>
+          <a:prstGeom prst="rect">
+            <a:avLst/>
+          </a:prstGeom>
+          <a:noFill/>
+        </p:spPr>
+        <p:txBody>
+          <a:bodyPr wrap="square">
+            <a:spAutoFit/>
+          </a:bodyPr>
+          <a:lstStyle/>
+          <a:p>
+            <a:pPr algn="l"/>
+            <a:r>
+              <a:rPr sz="900" b="0" i="0">
+                <a:solidFill>
+                  <a:srgbClr val="66707A"/>
+                </a:solidFill>
+              </a:rPr>
+              <a:t>AURIS  ·  Hasan Arthur Altuntaş  ·  BM498 Mezuniyet Tezi</a:t>
+            </a:r>
+          </a:p>
+        </p:txBody>
+      </p:sp>
+      <p:sp>
+        <p:nvSpPr>
+          <p:cNvPr id="43" name="TextBox 42"/>
+          <p:cNvSpPr txBox="1"/>
+          <p:nvPr/>
+        </p:nvSpPr>
+        <p:spPr>
+          <a:xfrm>
+            <a:off x="8595360" y="6510528"/>
+            <a:ext cx="3200400" cy="301752"/>
+          </a:xfrm>
+          <a:prstGeom prst="rect">
+            <a:avLst/>
+          </a:prstGeom>
+          <a:noFill/>
+        </p:spPr>
+        <p:txBody>
+          <a:bodyPr wrap="square">
+            <a:spAutoFit/>
+          </a:bodyPr>
+          <a:lstStyle/>
+          <a:p>
+            <a:pPr algn="r"/>
+            <a:r>
+              <a:rPr sz="900" b="0" i="0">
+                <a:solidFill>
+                  <a:srgbClr val="66707A"/>
+                </a:solidFill>
+              </a:rPr>
+              <a:t>Düzce Üniversitesi · 2025-2026</a:t>
             </a:r>
           </a:p>
         </p:txBody>
@@ -4525,7 +5966,7 @@
         <p:spPr>
           <a:xfrm>
             <a:off x="0" y="0"/>
-            <a:ext cx="12188952" cy="1417320"/>
+            <a:ext cx="12188952" cy="1371600"/>
           </a:xfrm>
           <a:prstGeom prst="rect">
             <a:avLst/>
@@ -4561,59 +6002,23 @@
       </p:sp>
       <p:sp>
         <p:nvSpPr>
-          <p:cNvPr id="3" name="TextBox 2"/>
-          <p:cNvSpPr txBox="1"/>
-          <p:nvPr/>
-        </p:nvSpPr>
-        <p:spPr>
-          <a:xfrm>
-            <a:off x="320040" y="91440"/>
-            <a:ext cx="11521440" cy="822960"/>
-          </a:xfrm>
-          <a:prstGeom prst="rect">
-            <a:avLst/>
-          </a:prstGeom>
-          <a:noFill/>
-        </p:spPr>
-        <p:txBody>
-          <a:bodyPr wrap="square">
-            <a:spAutoFit/>
-          </a:bodyPr>
-          <a:lstStyle/>
-          <a:p>
-            <a:pPr algn="l"/>
-            <a:r>
-              <a:rPr sz="2500" b="1">
-                <a:solidFill>
-                  <a:srgbClr val="FFFFFF"/>
-                </a:solidFill>
-              </a:rPr>
-              <a:t>Akademik Katkı ve Özgün Değer</a:t>
-            </a:r>
-          </a:p>
-        </p:txBody>
-      </p:sp>
-      <p:sp>
-        <p:nvSpPr>
-          <p:cNvPr id="4" name="Rectangle 3"/>
+          <p:cNvPr id="3" name="Rectangle 2"/>
           <p:cNvSpPr/>
           <p:nvPr/>
         </p:nvSpPr>
         <p:spPr>
           <a:xfrm>
-            <a:off x="365760" y="1600200"/>
-            <a:ext cx="11430000" cy="841248"/>
+            <a:off x="0" y="1371600"/>
+            <a:ext cx="12188952" cy="54864"/>
           </a:xfrm>
           <a:prstGeom prst="rect">
             <a:avLst/>
           </a:prstGeom>
           <a:solidFill>
-            <a:srgbClr val="FFFFFF"/>
+            <a:srgbClr val="E0A800"/>
           </a:solidFill>
           <a:ln>
-            <a:solidFill>
-              <a:srgbClr val="007A87"/>
-            </a:solidFill>
+            <a:noFill/>
           </a:ln>
         </p:spPr>
         <p:style>
@@ -4640,14 +6045,48 @@
       </p:sp>
       <p:sp>
         <p:nvSpPr>
+          <p:cNvPr id="4" name="TextBox 3"/>
+          <p:cNvSpPr txBox="1"/>
+          <p:nvPr/>
+        </p:nvSpPr>
+        <p:spPr>
+          <a:xfrm>
+            <a:off x="365760" y="109728"/>
+            <a:ext cx="11430000" cy="320040"/>
+          </a:xfrm>
+          <a:prstGeom prst="rect">
+            <a:avLst/>
+          </a:prstGeom>
+          <a:noFill/>
+        </p:spPr>
+        <p:txBody>
+          <a:bodyPr wrap="square">
+            <a:spAutoFit/>
+          </a:bodyPr>
+          <a:lstStyle/>
+          <a:p>
+            <a:pPr algn="l"/>
+            <a:r>
+              <a:rPr sz="1100" b="1" i="0">
+                <a:solidFill>
+                  <a:srgbClr val="E0A800"/>
+                </a:solidFill>
+              </a:rPr>
+              <a:t>DEĞERLENDIRME</a:t>
+            </a:r>
+          </a:p>
+        </p:txBody>
+      </p:sp>
+      <p:sp>
+        <p:nvSpPr>
           <p:cNvPr id="5" name="TextBox 4"/>
           <p:cNvSpPr txBox="1"/>
           <p:nvPr/>
         </p:nvSpPr>
         <p:spPr>
           <a:xfrm>
-            <a:off x="502920" y="1664208"/>
-            <a:ext cx="457200" cy="658368"/>
+            <a:off x="365760" y="402336"/>
+            <a:ext cx="11430000" cy="640080"/>
           </a:xfrm>
           <a:prstGeom prst="rect">
             <a:avLst/>
@@ -4660,104 +6099,36 @@
           </a:bodyPr>
           <a:lstStyle/>
           <a:p>
-            <a:pPr algn="ctr"/>
-            <a:r>
-              <a:rPr sz="1600" b="1">
-                <a:solidFill>
-                  <a:srgbClr val="007A87"/>
-                </a:solidFill>
-              </a:rPr>
-              <a:t>1.</a:t>
-            </a:r>
-          </a:p>
-        </p:txBody>
-      </p:sp>
-      <p:sp>
-        <p:nvSpPr>
-          <p:cNvPr id="6" name="TextBox 5"/>
-          <p:cNvSpPr txBox="1"/>
-          <p:nvPr/>
-        </p:nvSpPr>
-        <p:spPr>
-          <a:xfrm>
-            <a:off x="1005840" y="1645920"/>
-            <a:ext cx="3840480" cy="347472"/>
-          </a:xfrm>
-          <a:prstGeom prst="rect">
-            <a:avLst/>
-          </a:prstGeom>
-          <a:noFill/>
-        </p:spPr>
-        <p:txBody>
-          <a:bodyPr wrap="square">
-            <a:spAutoFit/>
-          </a:bodyPr>
-          <a:lstStyle/>
-          <a:p>
             <a:pPr algn="l"/>
             <a:r>
-              <a:rPr sz="1300" b="1">
-                <a:solidFill>
-                  <a:srgbClr val="0D2B55"/>
-                </a:solidFill>
-              </a:rPr>
-              <a:t>47 boyutlu heterojen öznitelik</a:t>
-            </a:r>
-          </a:p>
-        </p:txBody>
-      </p:sp>
-      <p:sp>
-        <p:nvSpPr>
-          <p:cNvPr id="7" name="TextBox 6"/>
-          <p:cNvSpPr txBox="1"/>
-          <p:nvPr/>
-        </p:nvSpPr>
-        <p:spPr>
-          <a:xfrm>
-            <a:off x="1005840" y="2020824"/>
-            <a:ext cx="10607040" cy="347472"/>
-          </a:xfrm>
-          <a:prstGeom prst="rect">
-            <a:avLst/>
-          </a:prstGeom>
-          <a:noFill/>
-        </p:spPr>
-        <p:txBody>
-          <a:bodyPr wrap="square">
-            <a:spAutoFit/>
-          </a:bodyPr>
-          <a:lstStyle/>
-          <a:p>
-            <a:pPr algn="l"/>
-            <a:r>
-              <a:rPr sz="1200" b="0">
-                <a:solidFill>
-                  <a:srgbClr val="333333"/>
-                </a:solidFill>
-              </a:rPr>
-              <a:t>5 akustik aileden derlenen müzik-spesifik kapsamlı set.</a:t>
-            </a:r>
-          </a:p>
-        </p:txBody>
-      </p:sp>
-      <p:sp>
-        <p:nvSpPr>
-          <p:cNvPr id="8" name="Rectangle 7"/>
+              <a:rPr sz="2400" b="1" i="0">
+                <a:solidFill>
+                  <a:srgbClr val="FFFFFF"/>
+                </a:solidFill>
+              </a:rPr>
+              <a:t>Akademik Katkı ve Özgün Değer</a:t>
+            </a:r>
+          </a:p>
+        </p:txBody>
+      </p:sp>
+      <p:sp>
+        <p:nvSpPr>
+          <p:cNvPr id="6" name="Rectangle 5"/>
           <p:cNvSpPr/>
           <p:nvPr/>
         </p:nvSpPr>
         <p:spPr>
           <a:xfrm>
-            <a:off x="365760" y="2560320"/>
-            <a:ext cx="11430000" cy="841248"/>
+            <a:off x="365760" y="1600200"/>
+            <a:ext cx="5577840" cy="1417320"/>
           </a:xfrm>
           <a:prstGeom prst="rect">
             <a:avLst/>
           </a:prstGeom>
           <a:solidFill>
-            <a:srgbClr val="F4F6F8"/>
+            <a:srgbClr val="FFFFFF"/>
           </a:solidFill>
-          <a:ln>
+          <a:ln w="12700">
             <a:solidFill>
               <a:srgbClr val="007A87"/>
             </a:solidFill>
@@ -4787,14 +6158,82 @@
       </p:sp>
       <p:sp>
         <p:nvSpPr>
+          <p:cNvPr id="7" name="TextBox 6"/>
+          <p:cNvSpPr txBox="1"/>
+          <p:nvPr/>
+        </p:nvSpPr>
+        <p:spPr>
+          <a:xfrm>
+            <a:off x="502920" y="1709928"/>
+            <a:ext cx="548640" cy="548640"/>
+          </a:xfrm>
+          <a:prstGeom prst="rect">
+            <a:avLst/>
+          </a:prstGeom>
+          <a:noFill/>
+        </p:spPr>
+        <p:txBody>
+          <a:bodyPr wrap="square">
+            <a:spAutoFit/>
+          </a:bodyPr>
+          <a:lstStyle/>
+          <a:p>
+            <a:pPr algn="l"/>
+            <a:r>
+              <a:rPr sz="2200" b="1" i="0">
+                <a:solidFill>
+                  <a:srgbClr val="007A87"/>
+                </a:solidFill>
+              </a:rPr>
+              <a:t>1</a:t>
+            </a:r>
+          </a:p>
+        </p:txBody>
+      </p:sp>
+      <p:sp>
+        <p:nvSpPr>
+          <p:cNvPr id="8" name="TextBox 7"/>
+          <p:cNvSpPr txBox="1"/>
+          <p:nvPr/>
+        </p:nvSpPr>
+        <p:spPr>
+          <a:xfrm>
+            <a:off x="1143000" y="1737360"/>
+            <a:ext cx="4663440" cy="411480"/>
+          </a:xfrm>
+          <a:prstGeom prst="rect">
+            <a:avLst/>
+          </a:prstGeom>
+          <a:noFill/>
+        </p:spPr>
+        <p:txBody>
+          <a:bodyPr wrap="square">
+            <a:spAutoFit/>
+          </a:bodyPr>
+          <a:lstStyle/>
+          <a:p>
+            <a:pPr algn="l"/>
+            <a:r>
+              <a:rPr sz="1300" b="1" i="0">
+                <a:solidFill>
+                  <a:srgbClr val="0D2B55"/>
+                </a:solidFill>
+              </a:rPr>
+              <a:t>47 boyutlu heterojen öznitelik</a:t>
+            </a:r>
+          </a:p>
+        </p:txBody>
+      </p:sp>
+      <p:sp>
+        <p:nvSpPr>
           <p:cNvPr id="9" name="TextBox 8"/>
           <p:cNvSpPr txBox="1"/>
           <p:nvPr/>
         </p:nvSpPr>
         <p:spPr>
           <a:xfrm>
-            <a:off x="502920" y="2624327"/>
-            <a:ext cx="457200" cy="658368"/>
+            <a:off x="1143000" y="2167128"/>
+            <a:ext cx="4663440" cy="777240"/>
           </a:xfrm>
           <a:prstGeom prst="rect">
             <a:avLst/>
@@ -4807,96 +6246,28 @@
           </a:bodyPr>
           <a:lstStyle/>
           <a:p>
-            <a:pPr algn="ctr"/>
-            <a:r>
-              <a:rPr sz="1600" b="1">
-                <a:solidFill>
-                  <a:srgbClr val="007A87"/>
-                </a:solidFill>
-              </a:rPr>
-              <a:t>2.</a:t>
-            </a:r>
-          </a:p>
-        </p:txBody>
-      </p:sp>
-      <p:sp>
-        <p:nvSpPr>
-          <p:cNvPr id="10" name="TextBox 9"/>
-          <p:cNvSpPr txBox="1"/>
-          <p:nvPr/>
-        </p:nvSpPr>
-        <p:spPr>
-          <a:xfrm>
-            <a:off x="1005840" y="2606039"/>
-            <a:ext cx="3840480" cy="347472"/>
-          </a:xfrm>
-          <a:prstGeom prst="rect">
-            <a:avLst/>
-          </a:prstGeom>
-          <a:noFill/>
-        </p:spPr>
-        <p:txBody>
-          <a:bodyPr wrap="square">
-            <a:spAutoFit/>
-          </a:bodyPr>
-          <a:lstStyle/>
-          <a:p>
             <a:pPr algn="l"/>
             <a:r>
-              <a:rPr sz="1300" b="1">
-                <a:solidFill>
-                  <a:srgbClr val="0D2B55"/>
-                </a:solidFill>
-              </a:rPr>
-              <a:t>Topluluk öğrenmesi</a:t>
-            </a:r>
-          </a:p>
-        </p:txBody>
-      </p:sp>
-      <p:sp>
-        <p:nvSpPr>
-          <p:cNvPr id="11" name="TextBox 10"/>
-          <p:cNvSpPr txBox="1"/>
-          <p:nvPr/>
-        </p:nvSpPr>
-        <p:spPr>
-          <a:xfrm>
-            <a:off x="1005840" y="2980944"/>
-            <a:ext cx="10607040" cy="347472"/>
-          </a:xfrm>
-          <a:prstGeom prst="rect">
-            <a:avLst/>
-          </a:prstGeom>
-          <a:noFill/>
-        </p:spPr>
-        <p:txBody>
-          <a:bodyPr wrap="square">
-            <a:spAutoFit/>
-          </a:bodyPr>
-          <a:lstStyle/>
-          <a:p>
-            <a:pPr algn="l"/>
-            <a:r>
-              <a:rPr sz="1200" b="0">
-                <a:solidFill>
-                  <a:srgbClr val="333333"/>
-                </a:solidFill>
-              </a:rPr>
-              <a:t>11 model — tek model yaklaşımlarının üstünde sonuç.</a:t>
-            </a:r>
-          </a:p>
-        </p:txBody>
-      </p:sp>
-      <p:sp>
-        <p:nvSpPr>
-          <p:cNvPr id="12" name="Rectangle 11"/>
+              <a:rPr sz="1100" b="0" i="0">
+                <a:solidFill>
+                  <a:srgbClr val="2A2A2A"/>
+                </a:solidFill>
+              </a:rPr>
+              <a:t>Beş akustik aileyi tek vektörde birleştiren, müzik-spesifik kapsamlı temsil.</a:t>
+            </a:r>
+          </a:p>
+        </p:txBody>
+      </p:sp>
+      <p:sp>
+        <p:nvSpPr>
+          <p:cNvPr id="10" name="Rectangle 9"/>
           <p:cNvSpPr/>
           <p:nvPr/>
         </p:nvSpPr>
         <p:spPr>
           <a:xfrm>
-            <a:off x="365760" y="3520440"/>
-            <a:ext cx="11430000" cy="841248"/>
+            <a:off x="6172200" y="1600200"/>
+            <a:ext cx="5577840" cy="1417320"/>
           </a:xfrm>
           <a:prstGeom prst="rect">
             <a:avLst/>
@@ -4904,7 +6275,7 @@
           <a:solidFill>
             <a:srgbClr val="FFFFFF"/>
           </a:solidFill>
-          <a:ln>
+          <a:ln w="12700">
             <a:solidFill>
               <a:srgbClr val="007A87"/>
             </a:solidFill>
@@ -4934,14 +6305,82 @@
       </p:sp>
       <p:sp>
         <p:nvSpPr>
+          <p:cNvPr id="11" name="TextBox 10"/>
+          <p:cNvSpPr txBox="1"/>
+          <p:nvPr/>
+        </p:nvSpPr>
+        <p:spPr>
+          <a:xfrm>
+            <a:off x="6309360" y="1709928"/>
+            <a:ext cx="548640" cy="548640"/>
+          </a:xfrm>
+          <a:prstGeom prst="rect">
+            <a:avLst/>
+          </a:prstGeom>
+          <a:noFill/>
+        </p:spPr>
+        <p:txBody>
+          <a:bodyPr wrap="square">
+            <a:spAutoFit/>
+          </a:bodyPr>
+          <a:lstStyle/>
+          <a:p>
+            <a:pPr algn="l"/>
+            <a:r>
+              <a:rPr sz="2200" b="1" i="0">
+                <a:solidFill>
+                  <a:srgbClr val="007A87"/>
+                </a:solidFill>
+              </a:rPr>
+              <a:t>2</a:t>
+            </a:r>
+          </a:p>
+        </p:txBody>
+      </p:sp>
+      <p:sp>
+        <p:nvSpPr>
+          <p:cNvPr id="12" name="TextBox 11"/>
+          <p:cNvSpPr txBox="1"/>
+          <p:nvPr/>
+        </p:nvSpPr>
+        <p:spPr>
+          <a:xfrm>
+            <a:off x="6949440" y="1737360"/>
+            <a:ext cx="4663440" cy="411480"/>
+          </a:xfrm>
+          <a:prstGeom prst="rect">
+            <a:avLst/>
+          </a:prstGeom>
+          <a:noFill/>
+        </p:spPr>
+        <p:txBody>
+          <a:bodyPr wrap="square">
+            <a:spAutoFit/>
+          </a:bodyPr>
+          <a:lstStyle/>
+          <a:p>
+            <a:pPr algn="l"/>
+            <a:r>
+              <a:rPr sz="1300" b="1" i="0">
+                <a:solidFill>
+                  <a:srgbClr val="0D2B55"/>
+                </a:solidFill>
+              </a:rPr>
+              <a:t>11 modelli topluluk öğrenmesi</a:t>
+            </a:r>
+          </a:p>
+        </p:txBody>
+      </p:sp>
+      <p:sp>
+        <p:nvSpPr>
           <p:cNvPr id="13" name="TextBox 12"/>
           <p:cNvSpPr txBox="1"/>
           <p:nvPr/>
         </p:nvSpPr>
         <p:spPr>
           <a:xfrm>
-            <a:off x="502920" y="3584448"/>
-            <a:ext cx="457200" cy="658368"/>
+            <a:off x="6949440" y="2167128"/>
+            <a:ext cx="4663440" cy="777240"/>
           </a:xfrm>
           <a:prstGeom prst="rect">
             <a:avLst/>
@@ -4954,104 +6393,36 @@
           </a:bodyPr>
           <a:lstStyle/>
           <a:p>
-            <a:pPr algn="ctr"/>
-            <a:r>
-              <a:rPr sz="1600" b="1">
-                <a:solidFill>
-                  <a:srgbClr val="007A87"/>
-                </a:solidFill>
-              </a:rPr>
-              <a:t>3.</a:t>
-            </a:r>
-          </a:p>
-        </p:txBody>
-      </p:sp>
-      <p:sp>
-        <p:nvSpPr>
-          <p:cNvPr id="14" name="TextBox 13"/>
-          <p:cNvSpPr txBox="1"/>
-          <p:nvPr/>
-        </p:nvSpPr>
-        <p:spPr>
-          <a:xfrm>
-            <a:off x="1005840" y="3566160"/>
-            <a:ext cx="3840480" cy="347472"/>
-          </a:xfrm>
-          <a:prstGeom prst="rect">
-            <a:avLst/>
-          </a:prstGeom>
-          <a:noFill/>
-        </p:spPr>
-        <p:txBody>
-          <a:bodyPr wrap="square">
-            <a:spAutoFit/>
-          </a:bodyPr>
-          <a:lstStyle/>
-          <a:p>
             <a:pPr algn="l"/>
             <a:r>
-              <a:rPr sz="1300" b="1">
-                <a:solidFill>
-                  <a:srgbClr val="0D2B55"/>
-                </a:solidFill>
-              </a:rPr>
-              <a:t>SHAP açıklanabilirlik</a:t>
-            </a:r>
-          </a:p>
-        </p:txBody>
-      </p:sp>
-      <p:sp>
-        <p:nvSpPr>
-          <p:cNvPr id="15" name="TextBox 14"/>
-          <p:cNvSpPr txBox="1"/>
-          <p:nvPr/>
-        </p:nvSpPr>
-        <p:spPr>
-          <a:xfrm>
-            <a:off x="1005840" y="3941064"/>
-            <a:ext cx="10607040" cy="347472"/>
-          </a:xfrm>
-          <a:prstGeom prst="rect">
-            <a:avLst/>
-          </a:prstGeom>
-          <a:noFill/>
-        </p:spPr>
-        <p:txBody>
-          <a:bodyPr wrap="square">
-            <a:spAutoFit/>
-          </a:bodyPr>
-          <a:lstStyle/>
-          <a:p>
-            <a:pPr algn="l"/>
-            <a:r>
-              <a:rPr sz="1200" b="0">
-                <a:solidFill>
-                  <a:srgbClr val="333333"/>
-                </a:solidFill>
-              </a:rPr>
-              <a:t>Müzik deepfake tespitinde TreeSHAP entegrasyonu.</a:t>
-            </a:r>
-          </a:p>
-        </p:txBody>
-      </p:sp>
-      <p:sp>
-        <p:nvSpPr>
-          <p:cNvPr id="16" name="Rectangle 15"/>
+              <a:rPr sz="1100" b="0" i="0">
+                <a:solidFill>
+                  <a:srgbClr val="2A2A2A"/>
+                </a:solidFill>
+              </a:rPr>
+              <a:t>ML ve DL ailelerinin ortak protokolde sistematik karşılaştırması.</a:t>
+            </a:r>
+          </a:p>
+        </p:txBody>
+      </p:sp>
+      <p:sp>
+        <p:nvSpPr>
+          <p:cNvPr id="14" name="Rectangle 13"/>
           <p:cNvSpPr/>
           <p:nvPr/>
         </p:nvSpPr>
         <p:spPr>
           <a:xfrm>
-            <a:off x="365760" y="4480560"/>
-            <a:ext cx="11430000" cy="841248"/>
+            <a:off x="365760" y="3172968"/>
+            <a:ext cx="5577840" cy="1417320"/>
           </a:xfrm>
           <a:prstGeom prst="rect">
             <a:avLst/>
           </a:prstGeom>
           <a:solidFill>
-            <a:srgbClr val="F4F6F8"/>
+            <a:srgbClr val="FFFFFF"/>
           </a:solidFill>
-          <a:ln>
+          <a:ln w="12700">
             <a:solidFill>
               <a:srgbClr val="007A87"/>
             </a:solidFill>
@@ -5081,14 +6452,82 @@
       </p:sp>
       <p:sp>
         <p:nvSpPr>
+          <p:cNvPr id="15" name="TextBox 14"/>
+          <p:cNvSpPr txBox="1"/>
+          <p:nvPr/>
+        </p:nvSpPr>
+        <p:spPr>
+          <a:xfrm>
+            <a:off x="502920" y="3282696"/>
+            <a:ext cx="548640" cy="548640"/>
+          </a:xfrm>
+          <a:prstGeom prst="rect">
+            <a:avLst/>
+          </a:prstGeom>
+          <a:noFill/>
+        </p:spPr>
+        <p:txBody>
+          <a:bodyPr wrap="square">
+            <a:spAutoFit/>
+          </a:bodyPr>
+          <a:lstStyle/>
+          <a:p>
+            <a:pPr algn="l"/>
+            <a:r>
+              <a:rPr sz="2200" b="1" i="0">
+                <a:solidFill>
+                  <a:srgbClr val="007A87"/>
+                </a:solidFill>
+              </a:rPr>
+              <a:t>3</a:t>
+            </a:r>
+          </a:p>
+        </p:txBody>
+      </p:sp>
+      <p:sp>
+        <p:nvSpPr>
+          <p:cNvPr id="16" name="TextBox 15"/>
+          <p:cNvSpPr txBox="1"/>
+          <p:nvPr/>
+        </p:nvSpPr>
+        <p:spPr>
+          <a:xfrm>
+            <a:off x="1143000" y="3310127"/>
+            <a:ext cx="4663440" cy="411480"/>
+          </a:xfrm>
+          <a:prstGeom prst="rect">
+            <a:avLst/>
+          </a:prstGeom>
+          <a:noFill/>
+        </p:spPr>
+        <p:txBody>
+          <a:bodyPr wrap="square">
+            <a:spAutoFit/>
+          </a:bodyPr>
+          <a:lstStyle/>
+          <a:p>
+            <a:pPr algn="l"/>
+            <a:r>
+              <a:rPr sz="1300" b="1" i="0">
+                <a:solidFill>
+                  <a:srgbClr val="0D2B55"/>
+                </a:solidFill>
+              </a:rPr>
+              <a:t>TreeSHAP açıklanabilirlik</a:t>
+            </a:r>
+          </a:p>
+        </p:txBody>
+      </p:sp>
+      <p:sp>
+        <p:nvSpPr>
           <p:cNvPr id="17" name="TextBox 16"/>
           <p:cNvSpPr txBox="1"/>
           <p:nvPr/>
         </p:nvSpPr>
         <p:spPr>
           <a:xfrm>
-            <a:off x="502920" y="4544568"/>
-            <a:ext cx="457200" cy="658368"/>
+            <a:off x="1143000" y="3739896"/>
+            <a:ext cx="4663440" cy="777240"/>
           </a:xfrm>
           <a:prstGeom prst="rect">
             <a:avLst/>
@@ -5101,96 +6540,28 @@
           </a:bodyPr>
           <a:lstStyle/>
           <a:p>
-            <a:pPr algn="ctr"/>
-            <a:r>
-              <a:rPr sz="1600" b="1">
-                <a:solidFill>
-                  <a:srgbClr val="007A87"/>
-                </a:solidFill>
-              </a:rPr>
-              <a:t>4.</a:t>
-            </a:r>
-          </a:p>
-        </p:txBody>
-      </p:sp>
-      <p:sp>
-        <p:nvSpPr>
-          <p:cNvPr id="18" name="TextBox 17"/>
-          <p:cNvSpPr txBox="1"/>
-          <p:nvPr/>
-        </p:nvSpPr>
-        <p:spPr>
-          <a:xfrm>
-            <a:off x="1005840" y="4526280"/>
-            <a:ext cx="3840480" cy="347472"/>
-          </a:xfrm>
-          <a:prstGeom prst="rect">
-            <a:avLst/>
-          </a:prstGeom>
-          <a:noFill/>
-        </p:spPr>
-        <p:txBody>
-          <a:bodyPr wrap="square">
-            <a:spAutoFit/>
-          </a:bodyPr>
-          <a:lstStyle/>
-          <a:p>
             <a:pPr algn="l"/>
             <a:r>
-              <a:rPr sz="1300" b="1">
-                <a:solidFill>
-                  <a:srgbClr val="0D2B55"/>
-                </a:solidFill>
-              </a:rPr>
-              <a:t>Youden J optimizasyonu</a:t>
-            </a:r>
-          </a:p>
-        </p:txBody>
-      </p:sp>
-      <p:sp>
-        <p:nvSpPr>
-          <p:cNvPr id="19" name="TextBox 18"/>
-          <p:cNvSpPr txBox="1"/>
-          <p:nvPr/>
-        </p:nvSpPr>
-        <p:spPr>
-          <a:xfrm>
-            <a:off x="1005840" y="4901184"/>
-            <a:ext cx="10607040" cy="347472"/>
-          </a:xfrm>
-          <a:prstGeom prst="rect">
-            <a:avLst/>
-          </a:prstGeom>
-          <a:noFill/>
-        </p:spPr>
-        <p:txBody>
-          <a:bodyPr wrap="square">
-            <a:spAutoFit/>
-          </a:bodyPr>
-          <a:lstStyle/>
-          <a:p>
-            <a:pPr algn="l"/>
-            <a:r>
-              <a:rPr sz="1200" b="0">
-                <a:solidFill>
-                  <a:srgbClr val="333333"/>
-                </a:solidFill>
-              </a:rPr>
-              <a:t>Dengesiz sınıf için θ*=0,4316 — varsayılan 0,5'ten üstün.</a:t>
-            </a:r>
-          </a:p>
-        </p:txBody>
-      </p:sp>
-      <p:sp>
-        <p:nvSpPr>
-          <p:cNvPr id="20" name="Rectangle 19"/>
+              <a:rPr sz="1100" b="0" i="0">
+                <a:solidFill>
+                  <a:srgbClr val="2A2A2A"/>
+                </a:solidFill>
+              </a:rPr>
+              <a:t>Müzik deepfake tespitinde global + yerel öznitelik etkisinin yorumlanması.</a:t>
+            </a:r>
+          </a:p>
+        </p:txBody>
+      </p:sp>
+      <p:sp>
+        <p:nvSpPr>
+          <p:cNvPr id="18" name="Rectangle 17"/>
           <p:cNvSpPr/>
           <p:nvPr/>
         </p:nvSpPr>
         <p:spPr>
           <a:xfrm>
-            <a:off x="365760" y="5440680"/>
-            <a:ext cx="11430000" cy="841248"/>
+            <a:off x="6172200" y="3172968"/>
+            <a:ext cx="5577840" cy="1417320"/>
           </a:xfrm>
           <a:prstGeom prst="rect">
             <a:avLst/>
@@ -5198,7 +6569,7 @@
           <a:solidFill>
             <a:srgbClr val="FFFFFF"/>
           </a:solidFill>
-          <a:ln>
+          <a:ln w="12700">
             <a:solidFill>
               <a:srgbClr val="007A87"/>
             </a:solidFill>
@@ -5228,14 +6599,82 @@
       </p:sp>
       <p:sp>
         <p:nvSpPr>
+          <p:cNvPr id="19" name="TextBox 18"/>
+          <p:cNvSpPr txBox="1"/>
+          <p:nvPr/>
+        </p:nvSpPr>
+        <p:spPr>
+          <a:xfrm>
+            <a:off x="6309360" y="3282696"/>
+            <a:ext cx="548640" cy="548640"/>
+          </a:xfrm>
+          <a:prstGeom prst="rect">
+            <a:avLst/>
+          </a:prstGeom>
+          <a:noFill/>
+        </p:spPr>
+        <p:txBody>
+          <a:bodyPr wrap="square">
+            <a:spAutoFit/>
+          </a:bodyPr>
+          <a:lstStyle/>
+          <a:p>
+            <a:pPr algn="l"/>
+            <a:r>
+              <a:rPr sz="2200" b="1" i="0">
+                <a:solidFill>
+                  <a:srgbClr val="007A87"/>
+                </a:solidFill>
+              </a:rPr>
+              <a:t>4</a:t>
+            </a:r>
+          </a:p>
+        </p:txBody>
+      </p:sp>
+      <p:sp>
+        <p:nvSpPr>
+          <p:cNvPr id="20" name="TextBox 19"/>
+          <p:cNvSpPr txBox="1"/>
+          <p:nvPr/>
+        </p:nvSpPr>
+        <p:spPr>
+          <a:xfrm>
+            <a:off x="6949440" y="3310127"/>
+            <a:ext cx="4663440" cy="411480"/>
+          </a:xfrm>
+          <a:prstGeom prst="rect">
+            <a:avLst/>
+          </a:prstGeom>
+          <a:noFill/>
+        </p:spPr>
+        <p:txBody>
+          <a:bodyPr wrap="square">
+            <a:spAutoFit/>
+          </a:bodyPr>
+          <a:lstStyle/>
+          <a:p>
+            <a:pPr algn="l"/>
+            <a:r>
+              <a:rPr sz="1300" b="1" i="0">
+                <a:solidFill>
+                  <a:srgbClr val="0D2B55"/>
+                </a:solidFill>
+              </a:rPr>
+              <a:t>Youden J eşik optimizasyonu</a:t>
+            </a:r>
+          </a:p>
+        </p:txBody>
+      </p:sp>
+      <p:sp>
+        <p:nvSpPr>
           <p:cNvPr id="21" name="TextBox 20"/>
           <p:cNvSpPr txBox="1"/>
           <p:nvPr/>
         </p:nvSpPr>
         <p:spPr>
           <a:xfrm>
-            <a:off x="502920" y="5504688"/>
-            <a:ext cx="457200" cy="658368"/>
+            <a:off x="6949440" y="3739896"/>
+            <a:ext cx="4663440" cy="777240"/>
           </a:xfrm>
           <a:prstGeom prst="rect">
             <a:avLst/>
@@ -5248,28 +6687,73 @@
           </a:bodyPr>
           <a:lstStyle/>
           <a:p>
+            <a:pPr algn="l"/>
+            <a:r>
+              <a:rPr sz="1100" b="0" i="0">
+                <a:solidFill>
+                  <a:srgbClr val="2A2A2A"/>
+                </a:solidFill>
+              </a:rPr>
+              <a:t>Dengesiz sınıf için θ*=0,4316; varsayılan 0,5 eşiğinden üstün denge.</a:t>
+            </a:r>
+          </a:p>
+        </p:txBody>
+      </p:sp>
+      <p:sp>
+        <p:nvSpPr>
+          <p:cNvPr id="22" name="Rectangle 21"/>
+          <p:cNvSpPr/>
+          <p:nvPr/>
+        </p:nvSpPr>
+        <p:spPr>
+          <a:xfrm>
+            <a:off x="365760" y="4745736"/>
+            <a:ext cx="5577840" cy="1417320"/>
+          </a:xfrm>
+          <a:prstGeom prst="rect">
+            <a:avLst/>
+          </a:prstGeom>
+          <a:solidFill>
+            <a:srgbClr val="FFFFFF"/>
+          </a:solidFill>
+          <a:ln w="12700">
+            <a:solidFill>
+              <a:srgbClr val="007A87"/>
+            </a:solidFill>
+          </a:ln>
+        </p:spPr>
+        <p:style>
+          <a:lnRef idx="1">
+            <a:schemeClr val="accent1"/>
+          </a:lnRef>
+          <a:fillRef idx="3">
+            <a:schemeClr val="accent1"/>
+          </a:fillRef>
+          <a:effectRef idx="2">
+            <a:schemeClr val="accent1"/>
+          </a:effectRef>
+          <a:fontRef idx="minor">
+            <a:schemeClr val="lt1"/>
+          </a:fontRef>
+        </p:style>
+        <p:txBody>
+          <a:bodyPr rtlCol="0" anchor="ctr"/>
+          <a:lstStyle/>
+          <a:p>
             <a:pPr algn="ctr"/>
-            <a:r>
-              <a:rPr sz="1600" b="1">
-                <a:solidFill>
-                  <a:srgbClr val="007A87"/>
-                </a:solidFill>
-              </a:rPr>
-              <a:t>5.</a:t>
-            </a:r>
-          </a:p>
-        </p:txBody>
-      </p:sp>
-      <p:sp>
-        <p:nvSpPr>
-          <p:cNvPr id="22" name="TextBox 21"/>
+          </a:p>
+        </p:txBody>
+      </p:sp>
+      <p:sp>
+        <p:nvSpPr>
+          <p:cNvPr id="23" name="TextBox 22"/>
           <p:cNvSpPr txBox="1"/>
           <p:nvPr/>
         </p:nvSpPr>
         <p:spPr>
           <a:xfrm>
-            <a:off x="1005840" y="5486400"/>
-            <a:ext cx="3840480" cy="347472"/>
+            <a:off x="502920" y="4855464"/>
+            <a:ext cx="548640" cy="548640"/>
           </a:xfrm>
           <a:prstGeom prst="rect">
             <a:avLst/>
@@ -5284,26 +6768,26 @@
           <a:p>
             <a:pPr algn="l"/>
             <a:r>
-              <a:rPr sz="1300" b="1">
-                <a:solidFill>
-                  <a:srgbClr val="0D2B55"/>
-                </a:solidFill>
-              </a:rPr>
-              <a:t>GUJSA yayını</a:t>
-            </a:r>
-          </a:p>
-        </p:txBody>
-      </p:sp>
-      <p:sp>
-        <p:nvSpPr>
-          <p:cNvPr id="23" name="TextBox 22"/>
+              <a:rPr sz="2200" b="1" i="0">
+                <a:solidFill>
+                  <a:srgbClr val="007A87"/>
+                </a:solidFill>
+              </a:rPr>
+              <a:t>5</a:t>
+            </a:r>
+          </a:p>
+        </p:txBody>
+      </p:sp>
+      <p:sp>
+        <p:nvSpPr>
+          <p:cNvPr id="24" name="TextBox 23"/>
           <p:cNvSpPr txBox="1"/>
           <p:nvPr/>
         </p:nvSpPr>
         <p:spPr>
           <a:xfrm>
-            <a:off x="1005840" y="5861304"/>
-            <a:ext cx="10607040" cy="347472"/>
+            <a:off x="1143000" y="4882896"/>
+            <a:ext cx="4663440" cy="411480"/>
           </a:xfrm>
           <a:prstGeom prst="rect">
             <a:avLst/>
@@ -5318,26 +6802,26 @@
           <a:p>
             <a:pPr algn="l"/>
             <a:r>
-              <a:rPr sz="1200" b="0">
-                <a:solidFill>
-                  <a:srgbClr val="333333"/>
-                </a:solidFill>
-              </a:rPr>
-              <a:t>Ulusal hakemli dergiye gönderilmek üzere hazırlandı.</a:t>
-            </a:r>
-          </a:p>
-        </p:txBody>
-      </p:sp>
-      <p:sp>
-        <p:nvSpPr>
-          <p:cNvPr id="24" name="TextBox 23"/>
+              <a:rPr sz="1300" b="1" i="0">
+                <a:solidFill>
+                  <a:srgbClr val="0D2B55"/>
+                </a:solidFill>
+              </a:rPr>
+              <a:t>Hafif ve rekabetçi</a:t>
+            </a:r>
+          </a:p>
+        </p:txBody>
+      </p:sp>
+      <p:sp>
+        <p:nvSpPr>
+          <p:cNvPr id="25" name="TextBox 24"/>
           <p:cNvSpPr txBox="1"/>
           <p:nvPr/>
         </p:nvSpPr>
         <p:spPr>
           <a:xfrm>
-            <a:off x="0" y="6510528"/>
-            <a:ext cx="12188952" cy="301752"/>
+            <a:off x="1143000" y="5312664"/>
+            <a:ext cx="4663440" cy="777240"/>
           </a:xfrm>
           <a:prstGeom prst="rect">
             <a:avLst/>
@@ -5350,14 +6834,229 @@
           </a:bodyPr>
           <a:lstStyle/>
           <a:p>
+            <a:pPr algn="l"/>
+            <a:r>
+              <a:rPr sz="1100" b="0" i="0">
+                <a:solidFill>
+                  <a:srgbClr val="2A2A2A"/>
+                </a:solidFill>
+              </a:rPr>
+              <a:t>Derin öğrenme altyapısı olmadan SONICS'e yakın ROC-AUC (0,9548).</a:t>
+            </a:r>
+          </a:p>
+        </p:txBody>
+      </p:sp>
+      <p:sp>
+        <p:nvSpPr>
+          <p:cNvPr id="26" name="Rectangle 25"/>
+          <p:cNvSpPr/>
+          <p:nvPr/>
+        </p:nvSpPr>
+        <p:spPr>
+          <a:xfrm>
+            <a:off x="6172200" y="4745736"/>
+            <a:ext cx="5577840" cy="1417320"/>
+          </a:xfrm>
+          <a:prstGeom prst="rect">
+            <a:avLst/>
+          </a:prstGeom>
+          <a:solidFill>
+            <a:srgbClr val="FFFFFF"/>
+          </a:solidFill>
+          <a:ln w="12700">
+            <a:solidFill>
+              <a:srgbClr val="007A87"/>
+            </a:solidFill>
+          </a:ln>
+        </p:spPr>
+        <p:style>
+          <a:lnRef idx="1">
+            <a:schemeClr val="accent1"/>
+          </a:lnRef>
+          <a:fillRef idx="3">
+            <a:schemeClr val="accent1"/>
+          </a:fillRef>
+          <a:effectRef idx="2">
+            <a:schemeClr val="accent1"/>
+          </a:effectRef>
+          <a:fontRef idx="minor">
+            <a:schemeClr val="lt1"/>
+          </a:fontRef>
+        </p:style>
+        <p:txBody>
+          <a:bodyPr rtlCol="0" anchor="ctr"/>
+          <a:lstStyle/>
+          <a:p>
             <a:pPr algn="ctr"/>
-            <a:r>
-              <a:rPr sz="900" b="0">
-                <a:solidFill>
-                  <a:srgbClr val="8899AA"/>
-                </a:solidFill>
-              </a:rPr>
-              <a:t>Hasan Arthur Altuntaş  |  BM498  |  Düzce Üniversitesi  |  2025-2026</a:t>
+          </a:p>
+        </p:txBody>
+      </p:sp>
+      <p:sp>
+        <p:nvSpPr>
+          <p:cNvPr id="27" name="TextBox 26"/>
+          <p:cNvSpPr txBox="1"/>
+          <p:nvPr/>
+        </p:nvSpPr>
+        <p:spPr>
+          <a:xfrm>
+            <a:off x="6309360" y="4855464"/>
+            <a:ext cx="548640" cy="548640"/>
+          </a:xfrm>
+          <a:prstGeom prst="rect">
+            <a:avLst/>
+          </a:prstGeom>
+          <a:noFill/>
+        </p:spPr>
+        <p:txBody>
+          <a:bodyPr wrap="square">
+            <a:spAutoFit/>
+          </a:bodyPr>
+          <a:lstStyle/>
+          <a:p>
+            <a:pPr algn="l"/>
+            <a:r>
+              <a:rPr sz="2200" b="1" i="0">
+                <a:solidFill>
+                  <a:srgbClr val="007A87"/>
+                </a:solidFill>
+              </a:rPr>
+              <a:t>6</a:t>
+            </a:r>
+          </a:p>
+        </p:txBody>
+      </p:sp>
+      <p:sp>
+        <p:nvSpPr>
+          <p:cNvPr id="28" name="TextBox 27"/>
+          <p:cNvSpPr txBox="1"/>
+          <p:nvPr/>
+        </p:nvSpPr>
+        <p:spPr>
+          <a:xfrm>
+            <a:off x="6949440" y="4882896"/>
+            <a:ext cx="4663440" cy="411480"/>
+          </a:xfrm>
+          <a:prstGeom prst="rect">
+            <a:avLst/>
+          </a:prstGeom>
+          <a:noFill/>
+        </p:spPr>
+        <p:txBody>
+          <a:bodyPr wrap="square">
+            <a:spAutoFit/>
+          </a:bodyPr>
+          <a:lstStyle/>
+          <a:p>
+            <a:pPr algn="l"/>
+            <a:r>
+              <a:rPr sz="1300" b="1" i="0">
+                <a:solidFill>
+                  <a:srgbClr val="0D2B55"/>
+                </a:solidFill>
+              </a:rPr>
+              <a:t>GUJSA akademik yayını</a:t>
+            </a:r>
+          </a:p>
+        </p:txBody>
+      </p:sp>
+      <p:sp>
+        <p:nvSpPr>
+          <p:cNvPr id="29" name="TextBox 28"/>
+          <p:cNvSpPr txBox="1"/>
+          <p:nvPr/>
+        </p:nvSpPr>
+        <p:spPr>
+          <a:xfrm>
+            <a:off x="6949440" y="5312664"/>
+            <a:ext cx="4663440" cy="777240"/>
+          </a:xfrm>
+          <a:prstGeom prst="rect">
+            <a:avLst/>
+          </a:prstGeom>
+          <a:noFill/>
+        </p:spPr>
+        <p:txBody>
+          <a:bodyPr wrap="square">
+            <a:spAutoFit/>
+          </a:bodyPr>
+          <a:lstStyle/>
+          <a:p>
+            <a:pPr algn="l"/>
+            <a:r>
+              <a:rPr sz="1100" b="0" i="0">
+                <a:solidFill>
+                  <a:srgbClr val="2A2A2A"/>
+                </a:solidFill>
+              </a:rPr>
+              <a:t>39 güncel referansla ulusal hakemli dergi formatında hazırlandı.</a:t>
+            </a:r>
+          </a:p>
+        </p:txBody>
+      </p:sp>
+      <p:sp>
+        <p:nvSpPr>
+          <p:cNvPr id="30" name="TextBox 29"/>
+          <p:cNvSpPr txBox="1"/>
+          <p:nvPr/>
+        </p:nvSpPr>
+        <p:spPr>
+          <a:xfrm>
+            <a:off x="365760" y="6510528"/>
+            <a:ext cx="8229600" cy="301752"/>
+          </a:xfrm>
+          <a:prstGeom prst="rect">
+            <a:avLst/>
+          </a:prstGeom>
+          <a:noFill/>
+        </p:spPr>
+        <p:txBody>
+          <a:bodyPr wrap="square">
+            <a:spAutoFit/>
+          </a:bodyPr>
+          <a:lstStyle/>
+          <a:p>
+            <a:pPr algn="l"/>
+            <a:r>
+              <a:rPr sz="900" b="0" i="0">
+                <a:solidFill>
+                  <a:srgbClr val="66707A"/>
+                </a:solidFill>
+              </a:rPr>
+              <a:t>AURIS  ·  Hasan Arthur Altuntaş  ·  BM498 Mezuniyet Tezi</a:t>
+            </a:r>
+          </a:p>
+        </p:txBody>
+      </p:sp>
+      <p:sp>
+        <p:nvSpPr>
+          <p:cNvPr id="31" name="TextBox 30"/>
+          <p:cNvSpPr txBox="1"/>
+          <p:nvPr/>
+        </p:nvSpPr>
+        <p:spPr>
+          <a:xfrm>
+            <a:off x="8595360" y="6510528"/>
+            <a:ext cx="3200400" cy="301752"/>
+          </a:xfrm>
+          <a:prstGeom prst="rect">
+            <a:avLst/>
+          </a:prstGeom>
+          <a:noFill/>
+        </p:spPr>
+        <p:txBody>
+          <a:bodyPr wrap="square">
+            <a:spAutoFit/>
+          </a:bodyPr>
+          <a:lstStyle/>
+          <a:p>
+            <a:pPr algn="r"/>
+            <a:r>
+              <a:rPr sz="900" b="0" i="0">
+                <a:solidFill>
+                  <a:srgbClr val="66707A"/>
+                </a:solidFill>
+              </a:rPr>
+              <a:t>Düzce Üniversitesi · 2025-2026</a:t>
             </a:r>
           </a:p>
         </p:txBody>
@@ -5455,7 +7154,7 @@
           <a:p>
             <a:pPr algn="l"/>
             <a:r>
-              <a:rPr sz="1100" b="0">
+              <a:rPr sz="1100" b="0" i="0">
                 <a:solidFill>
                   <a:srgbClr val="FFFFFF"/>
                 </a:solidFill>
@@ -5473,8 +7172,8 @@
         </p:nvSpPr>
         <p:spPr>
           <a:xfrm>
-            <a:off x="2286000" y="1005840"/>
-            <a:ext cx="7589520" cy="5394960"/>
+            <a:off x="2286000" y="960120"/>
+            <a:ext cx="7589520" cy="5440680"/>
           </a:xfrm>
           <a:prstGeom prst="rect">
             <a:avLst/>
@@ -5482,7 +7181,7 @@
           <a:solidFill>
             <a:srgbClr val="FFFFFF"/>
           </a:solidFill>
-          <a:ln>
+          <a:ln w="19050">
             <a:solidFill>
               <a:srgbClr val="007A87"/>
             </a:solidFill>
@@ -5518,8 +7217,8 @@
         </p:nvSpPr>
         <p:spPr>
           <a:xfrm>
-            <a:off x="2377440" y="1115568"/>
-            <a:ext cx="7406640" cy="548640"/>
+            <a:off x="2377440" y="1078992"/>
+            <a:ext cx="7406640" cy="502920"/>
           </a:xfrm>
           <a:prstGeom prst="rect">
             <a:avLst/>
@@ -5534,7 +7233,7 @@
           <a:p>
             <a:pPr algn="ctr"/>
             <a:r>
-              <a:rPr sz="1700" b="1">
+              <a:rPr sz="1700" b="1" i="0">
                 <a:solidFill>
                   <a:srgbClr val="0D2B55"/>
                 </a:solidFill>
@@ -5552,7 +7251,7 @@
         </p:nvSpPr>
         <p:spPr>
           <a:xfrm>
-            <a:off x="2377440" y="1691640"/>
+            <a:off x="2377440" y="1627632"/>
             <a:ext cx="7406640" cy="0"/>
           </a:xfrm>
           <a:prstGeom prst="rect">
@@ -5594,7 +7293,7 @@
         </p:nvSpPr>
         <p:spPr>
           <a:xfrm>
-            <a:off x="2468880" y="1874519"/>
+            <a:off x="2468880" y="1810512"/>
             <a:ext cx="2834640" cy="320040"/>
           </a:xfrm>
           <a:prstGeom prst="rect">
@@ -5610,7 +7309,7 @@
           <a:p>
             <a:pPr algn="l"/>
             <a:r>
-              <a:rPr sz="1200" b="1">
+              <a:rPr sz="1200" b="1" i="0">
                 <a:solidFill>
                   <a:srgbClr val="0D2B55"/>
                 </a:solidFill>
@@ -5628,7 +7327,7 @@
         </p:nvSpPr>
         <p:spPr>
           <a:xfrm>
-            <a:off x="5394960" y="1874519"/>
+            <a:off x="5394960" y="1810512"/>
             <a:ext cx="4297680" cy="320040"/>
           </a:xfrm>
           <a:prstGeom prst="rect">
@@ -5644,9 +7343,9 @@
           <a:p>
             <a:pPr algn="l"/>
             <a:r>
-              <a:rPr sz="1200" b="0">
-                <a:solidFill>
-                  <a:srgbClr val="333333"/>
+              <a:rPr sz="1200" b="0" i="0">
+                <a:solidFill>
+                  <a:srgbClr val="2A2A2A"/>
                 </a:solidFill>
               </a:rPr>
               <a:t>Hasan Arthur Altuntaş</a:t>
@@ -5662,7 +7361,7 @@
         </p:nvSpPr>
         <p:spPr>
           <a:xfrm>
-            <a:off x="5349240" y="2212848"/>
+            <a:off x="5349240" y="2148840"/>
             <a:ext cx="4343400" cy="0"/>
           </a:xfrm>
           <a:prstGeom prst="rect">
@@ -5704,7 +7403,7 @@
         </p:nvSpPr>
         <p:spPr>
           <a:xfrm>
-            <a:off x="2468880" y="2423160"/>
+            <a:off x="2468880" y="2377440"/>
             <a:ext cx="2834640" cy="320040"/>
           </a:xfrm>
           <a:prstGeom prst="rect">
@@ -5720,7 +7419,7 @@
           <a:p>
             <a:pPr algn="l"/>
             <a:r>
-              <a:rPr sz="1200" b="1">
+              <a:rPr sz="1200" b="1" i="0">
                 <a:solidFill>
                   <a:srgbClr val="0D2B55"/>
                 </a:solidFill>
@@ -5738,7 +7437,7 @@
         </p:nvSpPr>
         <p:spPr>
           <a:xfrm>
-            <a:off x="5394960" y="2423160"/>
+            <a:off x="5394960" y="2377440"/>
             <a:ext cx="4297680" cy="320040"/>
           </a:xfrm>
           <a:prstGeom prst="rect">
@@ -5754,9 +7453,9 @@
           <a:p>
             <a:pPr algn="l"/>
             <a:r>
-              <a:rPr sz="1200" b="0">
-                <a:solidFill>
-                  <a:srgbClr val="333333"/>
+              <a:rPr sz="1200" b="0" i="0">
+                <a:solidFill>
+                  <a:srgbClr val="2A2A2A"/>
                 </a:solidFill>
               </a:rPr>
               <a:t/>
@@ -5772,7 +7471,7 @@
         </p:nvSpPr>
         <p:spPr>
           <a:xfrm>
-            <a:off x="5349240" y="2761488"/>
+            <a:off x="5349240" y="2715768"/>
             <a:ext cx="4343400" cy="0"/>
           </a:xfrm>
           <a:prstGeom prst="rect">
@@ -5814,7 +7513,7 @@
         </p:nvSpPr>
         <p:spPr>
           <a:xfrm>
-            <a:off x="2468880" y="2971800"/>
+            <a:off x="2468880" y="2944368"/>
             <a:ext cx="2834640" cy="320040"/>
           </a:xfrm>
           <a:prstGeom prst="rect">
@@ -5830,7 +7529,7 @@
           <a:p>
             <a:pPr algn="l"/>
             <a:r>
-              <a:rPr sz="1200" b="1">
+              <a:rPr sz="1200" b="1" i="0">
                 <a:solidFill>
                   <a:srgbClr val="0D2B55"/>
                 </a:solidFill>
@@ -5848,7 +7547,7 @@
         </p:nvSpPr>
         <p:spPr>
           <a:xfrm>
-            <a:off x="5394960" y="2971800"/>
+            <a:off x="5394960" y="2944368"/>
             <a:ext cx="4297680" cy="320040"/>
           </a:xfrm>
           <a:prstGeom prst="rect">
@@ -5864,9 +7563,9 @@
           <a:p>
             <a:pPr algn="l"/>
             <a:r>
-              <a:rPr sz="1200" b="0">
-                <a:solidFill>
-                  <a:srgbClr val="333333"/>
+              <a:rPr sz="1200" b="0" i="0">
+                <a:solidFill>
+                  <a:srgbClr val="2A2A2A"/>
                 </a:solidFill>
               </a:rPr>
               <a:t>Bilgisayar Mühendisliği</a:t>
@@ -5882,7 +7581,7 @@
         </p:nvSpPr>
         <p:spPr>
           <a:xfrm>
-            <a:off x="5349240" y="3310128"/>
+            <a:off x="5349240" y="3282696"/>
             <a:ext cx="4343400" cy="0"/>
           </a:xfrm>
           <a:prstGeom prst="rect">
@@ -5924,7 +7623,7 @@
         </p:nvSpPr>
         <p:spPr>
           <a:xfrm>
-            <a:off x="2468880" y="3520439"/>
+            <a:off x="2468880" y="3511296"/>
             <a:ext cx="2834640" cy="320040"/>
           </a:xfrm>
           <a:prstGeom prst="rect">
@@ -5940,7 +7639,7 @@
           <a:p>
             <a:pPr algn="l"/>
             <a:r>
-              <a:rPr sz="1200" b="1">
+              <a:rPr sz="1200" b="1" i="0">
                 <a:solidFill>
                   <a:srgbClr val="0D2B55"/>
                 </a:solidFill>
@@ -5958,7 +7657,7 @@
         </p:nvSpPr>
         <p:spPr>
           <a:xfrm>
-            <a:off x="5394960" y="3520439"/>
+            <a:off x="5394960" y="3511296"/>
             <a:ext cx="4297680" cy="320040"/>
           </a:xfrm>
           <a:prstGeom prst="rect">
@@ -5974,9 +7673,9 @@
           <a:p>
             <a:pPr algn="l"/>
             <a:r>
-              <a:rPr sz="1200" b="0">
-                <a:solidFill>
-                  <a:srgbClr val="333333"/>
+              <a:rPr sz="1200" b="0" i="0">
+                <a:solidFill>
+                  <a:srgbClr val="2A2A2A"/>
                 </a:solidFill>
               </a:rPr>
               <a:t/>
@@ -5992,7 +7691,7 @@
         </p:nvSpPr>
         <p:spPr>
           <a:xfrm>
-            <a:off x="5349240" y="3858768"/>
+            <a:off x="5349240" y="3849624"/>
             <a:ext cx="4343400" cy="0"/>
           </a:xfrm>
           <a:prstGeom prst="rect">
@@ -6034,7 +7733,7 @@
         </p:nvSpPr>
         <p:spPr>
           <a:xfrm>
-            <a:off x="2468880" y="4069079"/>
+            <a:off x="2468880" y="4078224"/>
             <a:ext cx="2834640" cy="320040"/>
           </a:xfrm>
           <a:prstGeom prst="rect">
@@ -6050,7 +7749,7 @@
           <a:p>
             <a:pPr algn="l"/>
             <a:r>
-              <a:rPr sz="1200" b="1">
+              <a:rPr sz="1200" b="1" i="0">
                 <a:solidFill>
                   <a:srgbClr val="0D2B55"/>
                 </a:solidFill>
@@ -6068,7 +7767,7 @@
         </p:nvSpPr>
         <p:spPr>
           <a:xfrm>
-            <a:off x="5394960" y="4069079"/>
+            <a:off x="5394960" y="4078224"/>
             <a:ext cx="4297680" cy="320040"/>
           </a:xfrm>
           <a:prstGeom prst="rect">
@@ -6084,9 +7783,9 @@
           <a:p>
             <a:pPr algn="l"/>
             <a:r>
-              <a:rPr sz="1200" b="0">
-                <a:solidFill>
-                  <a:srgbClr val="333333"/>
+              <a:rPr sz="1200" b="0" i="0">
+                <a:solidFill>
+                  <a:srgbClr val="2A2A2A"/>
                 </a:solidFill>
               </a:rPr>
               <a:t/>
@@ -6102,7 +7801,7 @@
         </p:nvSpPr>
         <p:spPr>
           <a:xfrm>
-            <a:off x="5349240" y="4407407"/>
+            <a:off x="5349240" y="4416552"/>
             <a:ext cx="4343400" cy="0"/>
           </a:xfrm>
           <a:prstGeom prst="rect">
@@ -6144,7 +7843,7 @@
         </p:nvSpPr>
         <p:spPr>
           <a:xfrm>
-            <a:off x="2468880" y="4617720"/>
+            <a:off x="2468880" y="4645152"/>
             <a:ext cx="2834640" cy="320040"/>
           </a:xfrm>
           <a:prstGeom prst="rect">
@@ -6160,7 +7859,7 @@
           <a:p>
             <a:pPr algn="l"/>
             <a:r>
-              <a:rPr sz="1200" b="1">
+              <a:rPr sz="1200" b="1" i="0">
                 <a:solidFill>
                   <a:srgbClr val="0D2B55"/>
                 </a:solidFill>
@@ -6178,7 +7877,7 @@
         </p:nvSpPr>
         <p:spPr>
           <a:xfrm>
-            <a:off x="5394960" y="4617720"/>
+            <a:off x="5394960" y="4645152"/>
             <a:ext cx="4297680" cy="320040"/>
           </a:xfrm>
           <a:prstGeom prst="rect">
@@ -6194,9 +7893,9 @@
           <a:p>
             <a:pPr algn="l"/>
             <a:r>
-              <a:rPr sz="1200" b="0">
-                <a:solidFill>
-                  <a:srgbClr val="333333"/>
+              <a:rPr sz="1200" b="0" i="0">
+                <a:solidFill>
+                  <a:srgbClr val="2A2A2A"/>
                 </a:solidFill>
               </a:rPr>
               <a:t>Sonuç ve Demo Sunumu</a:t>
@@ -6212,7 +7911,7 @@
         </p:nvSpPr>
         <p:spPr>
           <a:xfrm>
-            <a:off x="5349240" y="4956048"/>
+            <a:off x="5349240" y="4983480"/>
             <a:ext cx="4343400" cy="0"/>
           </a:xfrm>
           <a:prstGeom prst="rect">
@@ -6254,7 +7953,7 @@
         </p:nvSpPr>
         <p:spPr>
           <a:xfrm>
-            <a:off x="2468880" y="5394960"/>
+            <a:off x="2468880" y="5440680"/>
             <a:ext cx="2926080" cy="347472"/>
           </a:xfrm>
           <a:prstGeom prst="rect">
@@ -6270,7 +7969,7 @@
           <a:p>
             <a:pPr algn="l"/>
             <a:r>
-              <a:rPr sz="1300" b="1">
+              <a:rPr sz="1300" b="1" i="0">
                 <a:solidFill>
                   <a:srgbClr val="0D2B55"/>
                 </a:solidFill>
@@ -6288,7 +7987,7 @@
         </p:nvSpPr>
         <p:spPr>
           <a:xfrm>
-            <a:off x="3246120" y="5742432"/>
+            <a:off x="3246120" y="5788152"/>
             <a:ext cx="6080760" cy="0"/>
           </a:xfrm>
           <a:prstGeom prst="rect">
@@ -6296,7 +7995,7 @@
           </a:prstGeom>
           <a:ln w="19050">
             <a:solidFill>
-              <a:srgbClr val="333333"/>
+              <a:srgbClr val="2A2A2A"/>
             </a:solidFill>
           </a:ln>
         </p:spPr>
@@ -6330,8 +8029,8 @@
         </p:nvSpPr>
         <p:spPr>
           <a:xfrm>
-            <a:off x="3246120" y="5797296"/>
-            <a:ext cx="6080760" cy="292608"/>
+            <a:off x="3246120" y="5843016"/>
+            <a:ext cx="6080760" cy="274320"/>
           </a:xfrm>
           <a:prstGeom prst="rect">
             <a:avLst/>
@@ -6346,9 +8045,9 @@
           <a:p>
             <a:pPr algn="ctr"/>
             <a:r>
-              <a:rPr sz="900" b="0">
-                <a:solidFill>
-                  <a:srgbClr val="888888"/>
+              <a:rPr sz="900" b="0" i="0">
+                <a:solidFill>
+                  <a:srgbClr val="66707A"/>
                 </a:solidFill>
               </a:rPr>
               <a:t>(Öğrenci bu alanı imzalayarak sunumun kendisine ait olduğunu onaylar.)</a:t>

--- a/docs/academic/TeslimEdilecekler/Sunumlar/04_Sonuc_ve_Demo_Sunumu.pptx
+++ b/docs/academic/TeslimEdilecekler/Sunumlar/04_Sonuc_ve_Demo_Sunumu.pptx
@@ -3088,7 +3088,7 @@
     <p:bg>
       <p:bgPr>
         <a:solidFill>
-          <a:srgbClr val="F4F6F8"/>
+          <a:srgbClr val="F6F8FA"/>
         </a:solidFill>
         <a:effectLst/>
       </p:bgPr>
@@ -3109,17 +3109,18 @@
         <p:spPr>
           <a:xfrm>
             <a:off x="0" y="0"/>
-            <a:ext cx="12188952" cy="2468880"/>
+            <a:ext cx="12188952" cy="2514600"/>
           </a:xfrm>
           <a:prstGeom prst="rect">
             <a:avLst/>
           </a:prstGeom>
           <a:solidFill>
-            <a:srgbClr val="0D2B55"/>
+            <a:srgbClr val="102A4C"/>
           </a:solidFill>
           <a:ln>
             <a:noFill/>
           </a:ln>
+          <a:effectLst/>
         </p:spPr>
         <p:style>
           <a:lnRef idx="1">
@@ -3151,18 +3152,19 @@
         </p:nvSpPr>
         <p:spPr>
           <a:xfrm>
-            <a:off x="0" y="2468880"/>
-            <a:ext cx="12188952" cy="64008"/>
+            <a:off x="0" y="2514600"/>
+            <a:ext cx="12188952" cy="54864"/>
           </a:xfrm>
           <a:prstGeom prst="rect">
             <a:avLst/>
           </a:prstGeom>
           <a:solidFill>
-            <a:srgbClr val="E0A800"/>
+            <a:srgbClr val="D99A07"/>
           </a:solidFill>
           <a:ln>
             <a:noFill/>
           </a:ln>
+          <a:effectLst/>
         </p:spPr>
         <p:style>
           <a:lnRef idx="1">
@@ -3188,126 +3190,25 @@
       </p:sp>
       <p:sp>
         <p:nvSpPr>
-          <p:cNvPr id="4" name="TextBox 3"/>
-          <p:cNvSpPr txBox="1"/>
-          <p:nvPr/>
-        </p:nvSpPr>
-        <p:spPr>
-          <a:xfrm>
-            <a:off x="548640" y="411480"/>
-            <a:ext cx="10972800" cy="365760"/>
-          </a:xfrm>
-          <a:prstGeom prst="rect">
-            <a:avLst/>
-          </a:prstGeom>
-          <a:noFill/>
-        </p:spPr>
-        <p:txBody>
-          <a:bodyPr wrap="square">
-            <a:spAutoFit/>
-          </a:bodyPr>
-          <a:lstStyle/>
-          <a:p>
-            <a:pPr algn="l"/>
-            <a:r>
-              <a:rPr sz="1300" b="1" i="0">
-                <a:solidFill>
-                  <a:srgbClr val="E0A800"/>
-                </a:solidFill>
-              </a:rPr>
-              <a:t>04 — SONUÇ VE DEMO</a:t>
-            </a:r>
-          </a:p>
-        </p:txBody>
-      </p:sp>
-      <p:sp>
-        <p:nvSpPr>
-          <p:cNvPr id="5" name="TextBox 4"/>
-          <p:cNvSpPr txBox="1"/>
-          <p:nvPr/>
-        </p:nvSpPr>
-        <p:spPr>
-          <a:xfrm>
-            <a:off x="548640" y="868680"/>
-            <a:ext cx="10972800" cy="914400"/>
-          </a:xfrm>
-          <a:prstGeom prst="rect">
-            <a:avLst/>
-          </a:prstGeom>
-          <a:noFill/>
-        </p:spPr>
-        <p:txBody>
-          <a:bodyPr wrap="square">
-            <a:spAutoFit/>
-          </a:bodyPr>
-          <a:lstStyle/>
-          <a:p>
-            <a:pPr algn="l"/>
-            <a:r>
-              <a:rPr sz="3400" b="1" i="0">
-                <a:solidFill>
-                  <a:srgbClr val="FFFFFF"/>
-                </a:solidFill>
-              </a:rPr>
-              <a:t>Bulgular ve Çalışan Sistem</a:t>
-            </a:r>
-          </a:p>
-        </p:txBody>
-      </p:sp>
-      <p:sp>
-        <p:nvSpPr>
-          <p:cNvPr id="6" name="TextBox 5"/>
-          <p:cNvSpPr txBox="1"/>
-          <p:nvPr/>
-        </p:nvSpPr>
-        <p:spPr>
-          <a:xfrm>
-            <a:off x="548640" y="1691640"/>
-            <a:ext cx="10972800" cy="548640"/>
-          </a:xfrm>
-          <a:prstGeom prst="rect">
-            <a:avLst/>
-          </a:prstGeom>
-          <a:noFill/>
-        </p:spPr>
-        <p:txBody>
-          <a:bodyPr wrap="square">
-            <a:spAutoFit/>
-          </a:bodyPr>
-          <a:lstStyle/>
-          <a:p>
-            <a:pPr algn="l"/>
-            <a:r>
-              <a:rPr sz="1600" b="0" i="0">
-                <a:solidFill>
-                  <a:srgbClr val="AEC6D6"/>
-                </a:solidFill>
-              </a:rPr>
-              <a:t>LightGBM lider model · gerçek çapraz doğrulama sonuçları</a:t>
-            </a:r>
-          </a:p>
-        </p:txBody>
-      </p:sp>
-      <p:sp>
-        <p:nvSpPr>
-          <p:cNvPr id="7" name="Rectangle 6"/>
+          <p:cNvPr id="4" name="Rectangle 3"/>
           <p:cNvSpPr/>
           <p:nvPr/>
         </p:nvSpPr>
         <p:spPr>
           <a:xfrm>
-            <a:off x="640080" y="2971800"/>
-            <a:ext cx="2697480" cy="1371600"/>
+            <a:off x="0" y="0"/>
+            <a:ext cx="182880" cy="2514600"/>
           </a:xfrm>
           <a:prstGeom prst="rect">
             <a:avLst/>
           </a:prstGeom>
           <a:solidFill>
-            <a:srgbClr val="0D2B55"/>
+            <a:srgbClr val="D99A07"/>
           </a:solidFill>
           <a:ln>
             <a:noFill/>
           </a:ln>
+          <a:effectLst/>
         </p:spPr>
         <p:style>
           <a:lnRef idx="1">
@@ -3333,14 +3234,14 @@
       </p:sp>
       <p:sp>
         <p:nvSpPr>
-          <p:cNvPr id="8" name="TextBox 7"/>
+          <p:cNvPr id="5" name="TextBox 4"/>
           <p:cNvSpPr txBox="1"/>
           <p:nvPr/>
         </p:nvSpPr>
         <p:spPr>
           <a:xfrm>
-            <a:off x="640080" y="3150108"/>
-            <a:ext cx="2697480" cy="685800"/>
+            <a:off x="548640" y="457200"/>
+            <a:ext cx="10972800" cy="365760"/>
           </a:xfrm>
           <a:prstGeom prst="rect">
             <a:avLst/>
@@ -3348,33 +3249,34 @@
           <a:noFill/>
         </p:spPr>
         <p:txBody>
-          <a:bodyPr wrap="square">
+          <a:bodyPr wrap="square" anchor="t" lIns="25400" rIns="25400" tIns="12700" bIns="12700">
             <a:spAutoFit/>
           </a:bodyPr>
           <a:lstStyle/>
           <a:p>
-            <a:pPr algn="ctr"/>
-            <a:r>
-              <a:rPr sz="2800" b="1" i="0">
-                <a:solidFill>
-                  <a:srgbClr val="E0A800"/>
-                </a:solidFill>
+            <a:pPr algn="l"/>
+            <a:r>
+              <a:rPr sz="1300" b="1" i="0">
+                <a:solidFill>
+                  <a:srgbClr val="D99A07"/>
+                </a:solidFill>
+                <a:latin typeface="Calibri"/>
               </a:rPr>
-              <a:t>0,9548</a:t>
-            </a:r>
-          </a:p>
-        </p:txBody>
-      </p:sp>
-      <p:sp>
-        <p:nvSpPr>
-          <p:cNvPr id="9" name="TextBox 8"/>
+              <a:t>04 — SONUÇ VE DEMO</a:t>
+            </a:r>
+          </a:p>
+        </p:txBody>
+      </p:sp>
+      <p:sp>
+        <p:nvSpPr>
+          <p:cNvPr id="6" name="TextBox 5"/>
           <p:cNvSpPr txBox="1"/>
           <p:nvPr/>
         </p:nvSpPr>
         <p:spPr>
           <a:xfrm>
-            <a:off x="640080" y="3822191"/>
-            <a:ext cx="2697480" cy="438912"/>
+            <a:off x="548640" y="914400"/>
+            <a:ext cx="10972800" cy="868680"/>
           </a:xfrm>
           <a:prstGeom prst="rect">
             <a:avLst/>
@@ -3382,43 +3284,80 @@
           <a:noFill/>
         </p:spPr>
         <p:txBody>
-          <a:bodyPr wrap="square">
+          <a:bodyPr wrap="square" anchor="t" lIns="25400" rIns="25400" tIns="12700" bIns="12700">
             <a:spAutoFit/>
           </a:bodyPr>
           <a:lstStyle/>
           <a:p>
-            <a:pPr algn="ctr"/>
-            <a:r>
-              <a:rPr sz="1100" b="0" i="0">
+            <a:pPr algn="l"/>
+            <a:r>
+              <a:rPr sz="3400" b="1" i="0">
                 <a:solidFill>
                   <a:srgbClr val="FFFFFF"/>
                 </a:solidFill>
+                <a:latin typeface="Calibri"/>
               </a:rPr>
-              <a:t>ROC-AUC</a:t>
-            </a:r>
-          </a:p>
-        </p:txBody>
-      </p:sp>
-      <p:sp>
-        <p:nvSpPr>
-          <p:cNvPr id="10" name="Rectangle 9"/>
+              <a:t>Bulgular ve Çalışan Sistem</a:t>
+            </a:r>
+          </a:p>
+        </p:txBody>
+      </p:sp>
+      <p:sp>
+        <p:nvSpPr>
+          <p:cNvPr id="7" name="TextBox 6"/>
+          <p:cNvSpPr txBox="1"/>
+          <p:nvPr/>
+        </p:nvSpPr>
+        <p:spPr>
+          <a:xfrm>
+            <a:off x="548640" y="1755648"/>
+            <a:ext cx="10972800" cy="502920"/>
+          </a:xfrm>
+          <a:prstGeom prst="rect">
+            <a:avLst/>
+          </a:prstGeom>
+          <a:noFill/>
+        </p:spPr>
+        <p:txBody>
+          <a:bodyPr wrap="square" anchor="t" lIns="25400" rIns="25400" tIns="12700" bIns="12700">
+            <a:spAutoFit/>
+          </a:bodyPr>
+          <a:lstStyle/>
+          <a:p>
+            <a:pPr algn="l"/>
+            <a:r>
+              <a:rPr sz="1600" b="0" i="0">
+                <a:solidFill>
+                  <a:srgbClr val="ADC4D6"/>
+                </a:solidFill>
+                <a:latin typeface="Calibri"/>
+              </a:rPr>
+              <a:t>LightGBM lider model · gerçek çapraz doğrulama sonuçları</a:t>
+            </a:r>
+          </a:p>
+        </p:txBody>
+      </p:sp>
+      <p:sp>
+        <p:nvSpPr>
+          <p:cNvPr id="8" name="Rectangle 7"/>
           <p:cNvSpPr/>
           <p:nvPr/>
         </p:nvSpPr>
         <p:spPr>
           <a:xfrm>
-            <a:off x="3520440" y="2971800"/>
+            <a:off x="548640" y="2880360"/>
             <a:ext cx="2697480" cy="1371600"/>
           </a:xfrm>
           <a:prstGeom prst="rect">
             <a:avLst/>
           </a:prstGeom>
           <a:solidFill>
-            <a:srgbClr val="0D2B55"/>
+            <a:srgbClr val="102A4C"/>
           </a:solidFill>
           <a:ln>
             <a:noFill/>
           </a:ln>
+          <a:effectLst/>
         </p:spPr>
         <p:style>
           <a:lnRef idx="1">
@@ -3444,13 +3383,13 @@
       </p:sp>
       <p:sp>
         <p:nvSpPr>
-          <p:cNvPr id="11" name="TextBox 10"/>
+          <p:cNvPr id="9" name="TextBox 8"/>
           <p:cNvSpPr txBox="1"/>
           <p:nvPr/>
         </p:nvSpPr>
         <p:spPr>
           <a:xfrm>
-            <a:off x="3520440" y="3150108"/>
+            <a:off x="548640" y="3072384"/>
             <a:ext cx="2697480" cy="685800"/>
           </a:xfrm>
           <a:prstGeom prst="rect">
@@ -3459,7 +3398,7 @@
           <a:noFill/>
         </p:spPr>
         <p:txBody>
-          <a:bodyPr wrap="square">
+          <a:bodyPr wrap="square" anchor="ctr" lIns="25400" rIns="25400" tIns="12700" bIns="12700">
             <a:spAutoFit/>
           </a:bodyPr>
           <a:lstStyle/>
@@ -3468,24 +3407,25 @@
             <a:r>
               <a:rPr sz="2800" b="1" i="0">
                 <a:solidFill>
-                  <a:srgbClr val="E0A800"/>
-                </a:solidFill>
+                  <a:srgbClr val="D99A07"/>
+                </a:solidFill>
+                <a:latin typeface="Calibri"/>
               </a:rPr>
-              <a:t>0,8839</a:t>
-            </a:r>
-          </a:p>
-        </p:txBody>
-      </p:sp>
-      <p:sp>
-        <p:nvSpPr>
-          <p:cNvPr id="12" name="TextBox 11"/>
+              <a:t>0,9548</a:t>
+            </a:r>
+          </a:p>
+        </p:txBody>
+      </p:sp>
+      <p:sp>
+        <p:nvSpPr>
+          <p:cNvPr id="10" name="TextBox 9"/>
           <p:cNvSpPr txBox="1"/>
           <p:nvPr/>
         </p:nvSpPr>
         <p:spPr>
           <a:xfrm>
-            <a:off x="3520440" y="3822191"/>
-            <a:ext cx="2697480" cy="438912"/>
+            <a:off x="548640" y="3744468"/>
+            <a:ext cx="2697480" cy="466344"/>
           </a:xfrm>
           <a:prstGeom prst="rect">
             <a:avLst/>
@@ -3493,7 +3433,7 @@
           <a:noFill/>
         </p:spPr>
         <p:txBody>
-          <a:bodyPr wrap="square">
+          <a:bodyPr wrap="square" anchor="ctr" lIns="25400" rIns="25400" tIns="12700" bIns="12700">
             <a:spAutoFit/>
           </a:bodyPr>
           <a:lstStyle/>
@@ -3504,32 +3444,34 @@
                 <a:solidFill>
                   <a:srgbClr val="FFFFFF"/>
                 </a:solidFill>
+                <a:latin typeface="Calibri"/>
               </a:rPr>
-              <a:t>Doğruluk</a:t>
-            </a:r>
-          </a:p>
-        </p:txBody>
-      </p:sp>
-      <p:sp>
-        <p:nvSpPr>
-          <p:cNvPr id="13" name="Rectangle 12"/>
+              <a:t>ROC-AUC</a:t>
+            </a:r>
+          </a:p>
+        </p:txBody>
+      </p:sp>
+      <p:sp>
+        <p:nvSpPr>
+          <p:cNvPr id="11" name="Rectangle 10"/>
           <p:cNvSpPr/>
           <p:nvPr/>
         </p:nvSpPr>
         <p:spPr>
           <a:xfrm>
-            <a:off x="6400800" y="2971800"/>
+            <a:off x="3429000" y="2880360"/>
             <a:ext cx="2697480" cy="1371600"/>
           </a:xfrm>
           <a:prstGeom prst="rect">
             <a:avLst/>
           </a:prstGeom>
           <a:solidFill>
-            <a:srgbClr val="0D2B55"/>
+            <a:srgbClr val="102A4C"/>
           </a:solidFill>
           <a:ln>
             <a:noFill/>
           </a:ln>
+          <a:effectLst/>
         </p:spPr>
         <p:style>
           <a:lnRef idx="1">
@@ -3555,13 +3497,13 @@
       </p:sp>
       <p:sp>
         <p:nvSpPr>
-          <p:cNvPr id="14" name="TextBox 13"/>
+          <p:cNvPr id="12" name="TextBox 11"/>
           <p:cNvSpPr txBox="1"/>
           <p:nvPr/>
         </p:nvSpPr>
         <p:spPr>
           <a:xfrm>
-            <a:off x="6400800" y="3150108"/>
+            <a:off x="3429000" y="3072384"/>
             <a:ext cx="2697480" cy="685800"/>
           </a:xfrm>
           <a:prstGeom prst="rect">
@@ -3570,7 +3512,7 @@
           <a:noFill/>
         </p:spPr>
         <p:txBody>
-          <a:bodyPr wrap="square">
+          <a:bodyPr wrap="square" anchor="ctr" lIns="25400" rIns="25400" tIns="12700" bIns="12700">
             <a:spAutoFit/>
           </a:bodyPr>
           <a:lstStyle/>
@@ -3579,24 +3521,25 @@
             <a:r>
               <a:rPr sz="2800" b="1" i="0">
                 <a:solidFill>
-                  <a:srgbClr val="E0A800"/>
-                </a:solidFill>
+                  <a:srgbClr val="D99A07"/>
+                </a:solidFill>
+                <a:latin typeface="Calibri"/>
               </a:rPr>
-              <a:t>0,8575</a:t>
-            </a:r>
-          </a:p>
-        </p:txBody>
-      </p:sp>
-      <p:sp>
-        <p:nvSpPr>
-          <p:cNvPr id="15" name="TextBox 14"/>
+              <a:t>0,8839</a:t>
+            </a:r>
+          </a:p>
+        </p:txBody>
+      </p:sp>
+      <p:sp>
+        <p:nvSpPr>
+          <p:cNvPr id="13" name="TextBox 12"/>
           <p:cNvSpPr txBox="1"/>
           <p:nvPr/>
         </p:nvSpPr>
         <p:spPr>
           <a:xfrm>
-            <a:off x="6400800" y="3822191"/>
-            <a:ext cx="2697480" cy="438912"/>
+            <a:off x="3429000" y="3744468"/>
+            <a:ext cx="2697480" cy="466344"/>
           </a:xfrm>
           <a:prstGeom prst="rect">
             <a:avLst/>
@@ -3604,7 +3547,7 @@
           <a:noFill/>
         </p:spPr>
         <p:txBody>
-          <a:bodyPr wrap="square">
+          <a:bodyPr wrap="square" anchor="ctr" lIns="25400" rIns="25400" tIns="12700" bIns="12700">
             <a:spAutoFit/>
           </a:bodyPr>
           <a:lstStyle/>
@@ -3615,32 +3558,34 @@
                 <a:solidFill>
                   <a:srgbClr val="FFFFFF"/>
                 </a:solidFill>
+                <a:latin typeface="Calibri"/>
               </a:rPr>
-              <a:t>F1-Skoru</a:t>
-            </a:r>
-          </a:p>
-        </p:txBody>
-      </p:sp>
-      <p:sp>
-        <p:nvSpPr>
-          <p:cNvPr id="16" name="Rectangle 15"/>
+              <a:t>Doğruluk</a:t>
+            </a:r>
+          </a:p>
+        </p:txBody>
+      </p:sp>
+      <p:sp>
+        <p:nvSpPr>
+          <p:cNvPr id="14" name="Rectangle 13"/>
           <p:cNvSpPr/>
           <p:nvPr/>
         </p:nvSpPr>
         <p:spPr>
           <a:xfrm>
-            <a:off x="9281160" y="2971800"/>
-            <a:ext cx="2423160" cy="1371600"/>
+            <a:off x="6309360" y="2880360"/>
+            <a:ext cx="2697480" cy="1371600"/>
           </a:xfrm>
           <a:prstGeom prst="rect">
             <a:avLst/>
           </a:prstGeom>
           <a:solidFill>
-            <a:srgbClr val="0D2B55"/>
+            <a:srgbClr val="102A4C"/>
           </a:solidFill>
           <a:ln>
             <a:noFill/>
           </a:ln>
+          <a:effectLst/>
         </p:spPr>
         <p:style>
           <a:lnRef idx="1">
@@ -3666,14 +3611,14 @@
       </p:sp>
       <p:sp>
         <p:nvSpPr>
-          <p:cNvPr id="17" name="TextBox 16"/>
+          <p:cNvPr id="15" name="TextBox 14"/>
           <p:cNvSpPr txBox="1"/>
           <p:nvPr/>
         </p:nvSpPr>
         <p:spPr>
           <a:xfrm>
-            <a:off x="9281160" y="3150108"/>
-            <a:ext cx="2423160" cy="685800"/>
+            <a:off x="6309360" y="3072384"/>
+            <a:ext cx="2697480" cy="685800"/>
           </a:xfrm>
           <a:prstGeom prst="rect">
             <a:avLst/>
@@ -3681,17 +3626,132 @@
           <a:noFill/>
         </p:spPr>
         <p:txBody>
-          <a:bodyPr wrap="square">
+          <a:bodyPr wrap="square" anchor="ctr" lIns="25400" rIns="25400" tIns="12700" bIns="12700">
             <a:spAutoFit/>
           </a:bodyPr>
           <a:lstStyle/>
           <a:p>
             <a:pPr algn="ctr"/>
             <a:r>
+              <a:rPr sz="2800" b="1" i="0">
+                <a:solidFill>
+                  <a:srgbClr val="D99A07"/>
+                </a:solidFill>
+                <a:latin typeface="Calibri"/>
+              </a:rPr>
+              <a:t>0,8575</a:t>
+            </a:r>
+          </a:p>
+        </p:txBody>
+      </p:sp>
+      <p:sp>
+        <p:nvSpPr>
+          <p:cNvPr id="16" name="TextBox 15"/>
+          <p:cNvSpPr txBox="1"/>
+          <p:nvPr/>
+        </p:nvSpPr>
+        <p:spPr>
+          <a:xfrm>
+            <a:off x="6309360" y="3744468"/>
+            <a:ext cx="2697480" cy="466344"/>
+          </a:xfrm>
+          <a:prstGeom prst="rect">
+            <a:avLst/>
+          </a:prstGeom>
+          <a:noFill/>
+        </p:spPr>
+        <p:txBody>
+          <a:bodyPr wrap="square" anchor="ctr" lIns="25400" rIns="25400" tIns="12700" bIns="12700">
+            <a:spAutoFit/>
+          </a:bodyPr>
+          <a:lstStyle/>
+          <a:p>
+            <a:pPr algn="ctr"/>
+            <a:r>
+              <a:rPr sz="1100" b="0" i="0">
+                <a:solidFill>
+                  <a:srgbClr val="FFFFFF"/>
+                </a:solidFill>
+                <a:latin typeface="Calibri"/>
+              </a:rPr>
+              <a:t>F1-Skoru</a:t>
+            </a:r>
+          </a:p>
+        </p:txBody>
+      </p:sp>
+      <p:sp>
+        <p:nvSpPr>
+          <p:cNvPr id="17" name="Rectangle 16"/>
+          <p:cNvSpPr/>
+          <p:nvPr/>
+        </p:nvSpPr>
+        <p:spPr>
+          <a:xfrm>
+            <a:off x="9189720" y="2880360"/>
+            <a:ext cx="2606040" cy="1371600"/>
+          </a:xfrm>
+          <a:prstGeom prst="rect">
+            <a:avLst/>
+          </a:prstGeom>
+          <a:solidFill>
+            <a:srgbClr val="102A4C"/>
+          </a:solidFill>
+          <a:ln>
+            <a:noFill/>
+          </a:ln>
+          <a:effectLst/>
+        </p:spPr>
+        <p:style>
+          <a:lnRef idx="1">
+            <a:schemeClr val="accent1"/>
+          </a:lnRef>
+          <a:fillRef idx="3">
+            <a:schemeClr val="accent1"/>
+          </a:fillRef>
+          <a:effectRef idx="2">
+            <a:schemeClr val="accent1"/>
+          </a:effectRef>
+          <a:fontRef idx="minor">
+            <a:schemeClr val="lt1"/>
+          </a:fontRef>
+        </p:style>
+        <p:txBody>
+          <a:bodyPr rtlCol="0" anchor="ctr"/>
+          <a:lstStyle/>
+          <a:p>
+            <a:pPr algn="ctr"/>
+          </a:p>
+        </p:txBody>
+      </p:sp>
+      <p:sp>
+        <p:nvSpPr>
+          <p:cNvPr id="18" name="TextBox 17"/>
+          <p:cNvSpPr txBox="1"/>
+          <p:nvPr/>
+        </p:nvSpPr>
+        <p:spPr>
+          <a:xfrm>
+            <a:off x="9189720" y="3072384"/>
+            <a:ext cx="2606040" cy="685800"/>
+          </a:xfrm>
+          <a:prstGeom prst="rect">
+            <a:avLst/>
+          </a:prstGeom>
+          <a:noFill/>
+        </p:spPr>
+        <p:txBody>
+          <a:bodyPr wrap="square" anchor="ctr" lIns="25400" rIns="25400" tIns="12700" bIns="12700">
+            <a:spAutoFit/>
+          </a:bodyPr>
+          <a:lstStyle/>
+          <a:p>
+            <a:pPr algn="ctr"/>
+            <a:r>
               <a:rPr sz="2400" b="1" i="0">
                 <a:solidFill>
-                  <a:srgbClr val="E0A800"/>
-                </a:solidFill>
+                  <a:srgbClr val="D99A07"/>
+                </a:solidFill>
+                <a:latin typeface="Calibri"/>
               </a:rPr>
               <a:t>0,4316</a:t>
             </a:r>
@@ -3700,14 +3760,14 @@
       </p:sp>
       <p:sp>
         <p:nvSpPr>
-          <p:cNvPr id="18" name="TextBox 17"/>
+          <p:cNvPr id="19" name="TextBox 18"/>
           <p:cNvSpPr txBox="1"/>
           <p:nvPr/>
         </p:nvSpPr>
         <p:spPr>
           <a:xfrm>
-            <a:off x="9281160" y="3822191"/>
-            <a:ext cx="2423160" cy="438912"/>
+            <a:off x="9189720" y="3744468"/>
+            <a:ext cx="2606040" cy="466344"/>
           </a:xfrm>
           <a:prstGeom prst="rect">
             <a:avLst/>
@@ -3715,7 +3775,7 @@
           <a:noFill/>
         </p:spPr>
         <p:txBody>
-          <a:bodyPr wrap="square">
+          <a:bodyPr wrap="square" anchor="ctr" lIns="25400" rIns="25400" tIns="12700" bIns="12700">
             <a:spAutoFit/>
           </a:bodyPr>
           <a:lstStyle/>
@@ -3726,6 +3786,7 @@
                 <a:solidFill>
                   <a:srgbClr val="FFFFFF"/>
                 </a:solidFill>
+                <a:latin typeface="Calibri"/>
               </a:rPr>
               <a:t>Youden θ*</a:t>
             </a:r>
@@ -3734,14 +3795,14 @@
       </p:sp>
       <p:sp>
         <p:nvSpPr>
-          <p:cNvPr id="19" name="TextBox 18"/>
+          <p:cNvPr id="20" name="TextBox 19"/>
           <p:cNvSpPr txBox="1"/>
           <p:nvPr/>
         </p:nvSpPr>
         <p:spPr>
           <a:xfrm>
-            <a:off x="640080" y="4663440"/>
-            <a:ext cx="11064240" cy="1737360"/>
+            <a:off x="548640" y="4617720"/>
+            <a:ext cx="11247120" cy="1737360"/>
           </a:xfrm>
           <a:prstGeom prst="rect">
             <a:avLst/>
@@ -3749,67 +3810,123 @@
           <a:noFill/>
         </p:spPr>
         <p:txBody>
-          <a:bodyPr wrap="square">
+          <a:bodyPr wrap="square" anchor="t" lIns="25400" rIns="25400">
             <a:spAutoFit/>
           </a:bodyPr>
           <a:lstStyle/>
           <a:p>
-            <a:pPr>
+            <a:pPr algn="l">
+              <a:spcBef>
+                <a:spcPts val="0"/>
+              </a:spcBef>
               <a:spcAft>
                 <a:spcPts val="900"/>
               </a:spcAft>
             </a:pPr>
             <a:r>
-              <a:rPr sz="1300">
-                <a:solidFill>
-                  <a:srgbClr val="2A2A2A"/>
-                </a:solidFill>
+              <a:rPr sz="1300" b="0" i="0">
+                <a:solidFill>
+                  <a:srgbClr val="242A30"/>
+                </a:solidFill>
+                <a:latin typeface="Calibri"/>
               </a:rPr>
               <a:t>✓  LightGBM, 11 model içinde en yüksek ROC-AUC ve en düşük varyansı (±0,0023) elde etti.</a:t>
             </a:r>
           </a:p>
           <a:p>
-            <a:pPr>
+            <a:pPr algn="l">
+              <a:spcBef>
+                <a:spcPts val="0"/>
+              </a:spcBef>
               <a:spcAft>
                 <a:spcPts val="900"/>
               </a:spcAft>
             </a:pPr>
             <a:r>
-              <a:rPr sz="1300">
-                <a:solidFill>
-                  <a:srgbClr val="2A2A2A"/>
-                </a:solidFill>
+              <a:rPr sz="1300" b="0" i="0">
+                <a:solidFill>
+                  <a:srgbClr val="242A30"/>
+                </a:solidFill>
+                <a:latin typeface="Calibri"/>
               </a:rPr>
-              <a:t>✓  spectral_flatness_std, YZ-insan ayrımındaki en belirleyici öznitelik olarak öne çıktı.</a:t>
-            </a:r>
-          </a:p>
-          <a:p>
-            <a:pPr>
+              <a:t>✓  spectral_flatness_std, YZ-insan ayrımındaki en belirleyici öznitelik oldu.</a:t>
+            </a:r>
+          </a:p>
+          <a:p>
+            <a:pPr algn="l">
+              <a:spcBef>
+                <a:spcPts val="0"/>
+              </a:spcBef>
               <a:spcAft>
                 <a:spcPts val="900"/>
               </a:spcAft>
             </a:pPr>
             <a:r>
-              <a:rPr sz="1300">
-                <a:solidFill>
-                  <a:srgbClr val="2A2A2A"/>
-                </a:solidFill>
+              <a:rPr sz="1300" b="0" i="0">
+                <a:solidFill>
+                  <a:srgbClr val="242A30"/>
+                </a:solidFill>
+                <a:latin typeface="Calibri"/>
               </a:rPr>
-              <a:t>✓  Youden J eşik optimizasyonu, dengesiz sınıf altında dengeli karar sağladı (θ*=0,4316).</a:t>
-            </a:r>
-          </a:p>
-        </p:txBody>
-      </p:sp>
-      <p:sp>
-        <p:nvSpPr>
-          <p:cNvPr id="20" name="TextBox 19"/>
+              <a:t>✓  Youden J eşik optimizasyonu, dengesiz sınıf altında dengeli karar sağladı.</a:t>
+            </a:r>
+          </a:p>
+        </p:txBody>
+      </p:sp>
+      <p:sp>
+        <p:nvSpPr>
+          <p:cNvPr id="21" name="Rectangle 20"/>
+          <p:cNvSpPr/>
+          <p:nvPr/>
+        </p:nvSpPr>
+        <p:spPr>
+          <a:xfrm>
+            <a:off x="365760" y="6419088"/>
+            <a:ext cx="11457432" cy="10972"/>
+          </a:xfrm>
+          <a:prstGeom prst="rect">
+            <a:avLst/>
+          </a:prstGeom>
+          <a:solidFill>
+            <a:srgbClr val="D2D9E0"/>
+          </a:solidFill>
+          <a:ln>
+            <a:noFill/>
+          </a:ln>
+          <a:effectLst/>
+        </p:spPr>
+        <p:style>
+          <a:lnRef idx="1">
+            <a:schemeClr val="accent1"/>
+          </a:lnRef>
+          <a:fillRef idx="3">
+            <a:schemeClr val="accent1"/>
+          </a:fillRef>
+          <a:effectRef idx="2">
+            <a:schemeClr val="accent1"/>
+          </a:effectRef>
+          <a:fontRef idx="minor">
+            <a:schemeClr val="lt1"/>
+          </a:fontRef>
+        </p:style>
+        <p:txBody>
+          <a:bodyPr rtlCol="0" anchor="ctr"/>
+          <a:lstStyle/>
+          <a:p>
+            <a:pPr algn="ctr"/>
+          </a:p>
+        </p:txBody>
+      </p:sp>
+      <p:sp>
+        <p:nvSpPr>
+          <p:cNvPr id="22" name="TextBox 21"/>
           <p:cNvSpPr txBox="1"/>
           <p:nvPr/>
         </p:nvSpPr>
         <p:spPr>
           <a:xfrm>
-            <a:off x="365760" y="6510528"/>
-            <a:ext cx="8229600" cy="301752"/>
+            <a:off x="365760" y="6473952"/>
+            <a:ext cx="7772400" cy="292608"/>
           </a:xfrm>
           <a:prstGeom prst="rect">
             <a:avLst/>
@@ -3817,7 +3934,7 @@
           <a:noFill/>
         </p:spPr>
         <p:txBody>
-          <a:bodyPr wrap="square">
+          <a:bodyPr wrap="square" anchor="t" lIns="25400" rIns="25400" tIns="12700" bIns="12700">
             <a:spAutoFit/>
           </a:bodyPr>
           <a:lstStyle/>
@@ -3826,24 +3943,25 @@
             <a:r>
               <a:rPr sz="900" b="0" i="0">
                 <a:solidFill>
-                  <a:srgbClr val="66707A"/>
-                </a:solidFill>
+                  <a:srgbClr val="6A7480"/>
+                </a:solidFill>
+                <a:latin typeface="Calibri"/>
               </a:rPr>
-              <a:t>AURIS  ·  Hasan Arthur Altuntaş  ·  BM498 Mezuniyet Tezi</a:t>
-            </a:r>
-          </a:p>
-        </p:txBody>
-      </p:sp>
-      <p:sp>
-        <p:nvSpPr>
-          <p:cNvPr id="21" name="TextBox 20"/>
+              <a:t>AURIS  ·  Yapay Zekâ Üretimli Müzik Tespiti</a:t>
+            </a:r>
+          </a:p>
+        </p:txBody>
+      </p:sp>
+      <p:sp>
+        <p:nvSpPr>
+          <p:cNvPr id="23" name="TextBox 22"/>
           <p:cNvSpPr txBox="1"/>
           <p:nvPr/>
         </p:nvSpPr>
         <p:spPr>
           <a:xfrm>
-            <a:off x="8595360" y="6510528"/>
-            <a:ext cx="3200400" cy="301752"/>
+            <a:off x="5029200" y="6473952"/>
+            <a:ext cx="6793992" cy="292608"/>
           </a:xfrm>
           <a:prstGeom prst="rect">
             <a:avLst/>
@@ -3851,7 +3969,7 @@
           <a:noFill/>
         </p:spPr>
         <p:txBody>
-          <a:bodyPr wrap="square">
+          <a:bodyPr wrap="square" anchor="t" lIns="25400" rIns="25400" tIns="12700" bIns="12700">
             <a:spAutoFit/>
           </a:bodyPr>
           <a:lstStyle/>
@@ -3860,10 +3978,11 @@
             <a:r>
               <a:rPr sz="900" b="0" i="0">
                 <a:solidFill>
-                  <a:srgbClr val="66707A"/>
-                </a:solidFill>
+                  <a:srgbClr val="6A7480"/>
+                </a:solidFill>
+                <a:latin typeface="Calibri"/>
               </a:rPr>
-              <a:t>Düzce Üniversitesi · 2025-2026</a:t>
+              <a:t>Hasan Arthur Altuntaş  ·  BM498  ·  Düzce Üniversitesi  ·  2025-2026</a:t>
             </a:r>
           </a:p>
         </p:txBody>
@@ -3882,7 +4001,7 @@
     <p:bg>
       <p:bgPr>
         <a:solidFill>
-          <a:srgbClr val="F4F6F8"/>
+          <a:srgbClr val="F6F8FA"/>
         </a:solidFill>
         <a:effectLst/>
       </p:bgPr>
@@ -3909,11 +4028,12 @@
             <a:avLst/>
           </a:prstGeom>
           <a:solidFill>
-            <a:srgbClr val="0D2B55"/>
+            <a:srgbClr val="102A4C"/>
           </a:solidFill>
           <a:ln>
             <a:noFill/>
           </a:ln>
+          <a:effectLst/>
         </p:spPr>
         <p:style>
           <a:lnRef idx="1">
@@ -3946,17 +4066,18 @@
         <p:spPr>
           <a:xfrm>
             <a:off x="0" y="1371600"/>
-            <a:ext cx="12188952" cy="54864"/>
+            <a:ext cx="12188952" cy="50292"/>
           </a:xfrm>
           <a:prstGeom prst="rect">
             <a:avLst/>
           </a:prstGeom>
           <a:solidFill>
-            <a:srgbClr val="E0A800"/>
+            <a:srgbClr val="D99A07"/>
           </a:solidFill>
           <a:ln>
             <a:noFill/>
           </a:ln>
+          <a:effectLst/>
         </p:spPr>
         <p:style>
           <a:lnRef idx="1">
@@ -3982,14 +4103,58 @@
       </p:sp>
       <p:sp>
         <p:nvSpPr>
-          <p:cNvPr id="4" name="TextBox 3"/>
+          <p:cNvPr id="4" name="Rectangle 3"/>
+          <p:cNvSpPr/>
+          <p:nvPr/>
+        </p:nvSpPr>
+        <p:spPr>
+          <a:xfrm>
+            <a:off x="0" y="0"/>
+            <a:ext cx="164592" cy="1371600"/>
+          </a:xfrm>
+          <a:prstGeom prst="rect">
+            <a:avLst/>
+          </a:prstGeom>
+          <a:solidFill>
+            <a:srgbClr val="D99A07"/>
+          </a:solidFill>
+          <a:ln>
+            <a:noFill/>
+          </a:ln>
+          <a:effectLst/>
+        </p:spPr>
+        <p:style>
+          <a:lnRef idx="1">
+            <a:schemeClr val="accent1"/>
+          </a:lnRef>
+          <a:fillRef idx="3">
+            <a:schemeClr val="accent1"/>
+          </a:fillRef>
+          <a:effectRef idx="2">
+            <a:schemeClr val="accent1"/>
+          </a:effectRef>
+          <a:fontRef idx="minor">
+            <a:schemeClr val="lt1"/>
+          </a:fontRef>
+        </p:style>
+        <p:txBody>
+          <a:bodyPr rtlCol="0" anchor="ctr"/>
+          <a:lstStyle/>
+          <a:p>
+            <a:pPr algn="ctr"/>
+          </a:p>
+        </p:txBody>
+      </p:sp>
+      <p:sp>
+        <p:nvSpPr>
+          <p:cNvPr id="5" name="TextBox 4"/>
           <p:cNvSpPr txBox="1"/>
           <p:nvPr/>
         </p:nvSpPr>
         <p:spPr>
           <a:xfrm>
-            <a:off x="365760" y="109728"/>
-            <a:ext cx="11430000" cy="320040"/>
+            <a:off x="411480" y="146304"/>
+            <a:ext cx="10058400" cy="292608"/>
           </a:xfrm>
           <a:prstGeom prst="rect">
             <a:avLst/>
@@ -3997,17 +4162,18 @@
           <a:noFill/>
         </p:spPr>
         <p:txBody>
-          <a:bodyPr wrap="square">
+          <a:bodyPr wrap="square" anchor="t" lIns="25400" rIns="25400" tIns="12700" bIns="12700">
             <a:spAutoFit/>
           </a:bodyPr>
           <a:lstStyle/>
           <a:p>
             <a:pPr algn="l"/>
             <a:r>
-              <a:rPr sz="1100" b="1" i="0">
-                <a:solidFill>
-                  <a:srgbClr val="E0A800"/>
-                </a:solidFill>
+              <a:rPr sz="1150" b="1" i="0">
+                <a:solidFill>
+                  <a:srgbClr val="D99A07"/>
+                </a:solidFill>
+                <a:latin typeface="Calibri"/>
               </a:rPr>
               <a:t>SONUÇLAR</a:t>
             </a:r>
@@ -4016,14 +4182,14 @@
       </p:sp>
       <p:sp>
         <p:nvSpPr>
-          <p:cNvPr id="5" name="TextBox 4"/>
+          <p:cNvPr id="6" name="TextBox 5"/>
           <p:cNvSpPr txBox="1"/>
           <p:nvPr/>
         </p:nvSpPr>
         <p:spPr>
           <a:xfrm>
-            <a:off x="365760" y="402336"/>
-            <a:ext cx="11430000" cy="640080"/>
+            <a:off x="411480" y="420624"/>
+            <a:ext cx="11338560" cy="603504"/>
           </a:xfrm>
           <a:prstGeom prst="rect">
             <a:avLst/>
@@ -4031,26 +4197,73 @@
           <a:noFill/>
         </p:spPr>
         <p:txBody>
-          <a:bodyPr wrap="square">
+          <a:bodyPr wrap="square" anchor="t" lIns="25400" rIns="25400" tIns="12700" bIns="12700">
             <a:spAutoFit/>
           </a:bodyPr>
           <a:lstStyle/>
           <a:p>
             <a:pPr algn="l"/>
             <a:r>
-              <a:rPr sz="2400" b="1" i="0">
+              <a:rPr sz="2300" b="1" i="0">
                 <a:solidFill>
                   <a:srgbClr val="FFFFFF"/>
                 </a:solidFill>
+                <a:latin typeface="Calibri"/>
               </a:rPr>
               <a:t>Tüm Modellerin Performans Karşılaştırması</a:t>
             </a:r>
           </a:p>
         </p:txBody>
       </p:sp>
+      <p:sp>
+        <p:nvSpPr>
+          <p:cNvPr id="7" name="Rectangle 6"/>
+          <p:cNvSpPr/>
+          <p:nvPr/>
+        </p:nvSpPr>
+        <p:spPr>
+          <a:xfrm>
+            <a:off x="320040" y="1716826"/>
+            <a:ext cx="7406640" cy="4027851"/>
+          </a:xfrm>
+          <a:prstGeom prst="rect">
+            <a:avLst/>
+          </a:prstGeom>
+          <a:solidFill>
+            <a:srgbClr val="FFFFFF"/>
+          </a:solidFill>
+          <a:ln w="9525">
+            <a:solidFill>
+              <a:srgbClr val="D2D9E0"/>
+            </a:solidFill>
+          </a:ln>
+          <a:effectLst/>
+        </p:spPr>
+        <p:style>
+          <a:lnRef idx="1">
+            <a:schemeClr val="accent1"/>
+          </a:lnRef>
+          <a:fillRef idx="3">
+            <a:schemeClr val="accent1"/>
+          </a:fillRef>
+          <a:effectRef idx="2">
+            <a:schemeClr val="accent1"/>
+          </a:effectRef>
+          <a:fontRef idx="minor">
+            <a:schemeClr val="lt1"/>
+          </a:fontRef>
+        </p:style>
+        <p:txBody>
+          <a:bodyPr rtlCol="0" anchor="ctr"/>
+          <a:lstStyle/>
+          <a:p>
+            <a:pPr algn="ctr"/>
+          </a:p>
+        </p:txBody>
+      </p:sp>
       <p:pic>
         <p:nvPicPr>
-          <p:cNvPr id="6" name="Picture 5" descr="paper_model_comparison.png"/>
+          <p:cNvPr id="8" name="Picture 7" descr="paper_model_comparison.png"/>
           <p:cNvPicPr>
             <a:picLocks noChangeAspect="1"/>
           </p:cNvPicPr>
@@ -4064,8 +4277,8 @@
         </p:blipFill>
         <p:spPr>
           <a:xfrm>
-            <a:off x="365760" y="1600200"/>
-            <a:ext cx="7589520" cy="4434840"/>
+            <a:off x="365760" y="1762546"/>
+            <a:ext cx="7315200" cy="3936411"/>
           </a:xfrm>
           <a:prstGeom prst="rect">
             <a:avLst/>
@@ -4074,14 +4287,14 @@
       </p:pic>
       <p:sp>
         <p:nvSpPr>
-          <p:cNvPr id="7" name="TextBox 6"/>
+          <p:cNvPr id="9" name="TextBox 8"/>
           <p:cNvSpPr txBox="1"/>
           <p:nvPr/>
         </p:nvSpPr>
         <p:spPr>
           <a:xfrm>
-            <a:off x="365760" y="6071616"/>
-            <a:ext cx="7589520" cy="292608"/>
+            <a:off x="365760" y="5753821"/>
+            <a:ext cx="7315200" cy="274320"/>
           </a:xfrm>
           <a:prstGeom prst="rect">
             <a:avLst/>
@@ -4089,7 +4302,7 @@
           <a:noFill/>
         </p:spPr>
         <p:txBody>
-          <a:bodyPr wrap="square">
+          <a:bodyPr wrap="square" anchor="t" lIns="25400" rIns="25400" tIns="12700" bIns="12700">
             <a:spAutoFit/>
           </a:bodyPr>
           <a:lstStyle/>
@@ -4098,8 +4311,9 @@
             <a:r>
               <a:rPr sz="1000" b="0" i="1">
                 <a:solidFill>
-                  <a:srgbClr val="66707A"/>
-                </a:solidFill>
+                  <a:srgbClr val="6A7480"/>
+                </a:solidFill>
+                <a:latin typeface="Calibri"/>
               </a:rPr>
               <a:t>Şekil 3: Doğruluk, F1 ve ROC-AUC karşılaştırması</a:t>
             </a:r>
@@ -4108,24 +4322,25 @@
       </p:sp>
       <p:sp>
         <p:nvSpPr>
-          <p:cNvPr id="8" name="Rectangle 7"/>
+          <p:cNvPr id="10" name="Rectangle 9"/>
           <p:cNvSpPr/>
           <p:nvPr/>
         </p:nvSpPr>
         <p:spPr>
           <a:xfrm>
-            <a:off x="8138160" y="1600200"/>
-            <a:ext cx="3703320" cy="4434840"/>
+            <a:off x="7909560" y="1627632"/>
+            <a:ext cx="3913632" cy="4526280"/>
           </a:xfrm>
           <a:prstGeom prst="rect">
             <a:avLst/>
           </a:prstGeom>
           <a:solidFill>
-            <a:srgbClr val="E0F0F2"/>
+            <a:srgbClr val="E2F1F2"/>
           </a:solidFill>
           <a:ln>
             <a:noFill/>
           </a:ln>
+          <a:effectLst/>
         </p:spPr>
         <p:style>
           <a:lnRef idx="1">
@@ -4151,24 +4366,25 @@
       </p:sp>
       <p:sp>
         <p:nvSpPr>
-          <p:cNvPr id="9" name="Rectangle 8"/>
+          <p:cNvPr id="11" name="Rectangle 10"/>
           <p:cNvSpPr/>
           <p:nvPr/>
         </p:nvSpPr>
         <p:spPr>
           <a:xfrm>
-            <a:off x="8138160" y="1600200"/>
-            <a:ext cx="82296" cy="4434840"/>
+            <a:off x="7909560" y="1627632"/>
+            <a:ext cx="91440" cy="4526280"/>
           </a:xfrm>
           <a:prstGeom prst="rect">
             <a:avLst/>
           </a:prstGeom>
           <a:solidFill>
-            <a:srgbClr val="007A87"/>
+            <a:srgbClr val="0A808C"/>
           </a:solidFill>
           <a:ln>
             <a:noFill/>
           </a:ln>
+          <a:effectLst/>
         </p:spPr>
         <p:style>
           <a:lnRef idx="1">
@@ -4194,14 +4410,14 @@
       </p:sp>
       <p:sp>
         <p:nvSpPr>
-          <p:cNvPr id="10" name="TextBox 9"/>
+          <p:cNvPr id="12" name="TextBox 11"/>
           <p:cNvSpPr txBox="1"/>
           <p:nvPr/>
         </p:nvSpPr>
         <p:spPr>
           <a:xfrm>
-            <a:off x="8339328" y="1709928"/>
-            <a:ext cx="3383279" cy="365760"/>
+            <a:off x="8129016" y="1746504"/>
+            <a:ext cx="3547872" cy="365760"/>
           </a:xfrm>
           <a:prstGeom prst="rect">
             <a:avLst/>
@@ -4209,7 +4425,7 @@
           <a:noFill/>
         </p:spPr>
         <p:txBody>
-          <a:bodyPr wrap="square">
+          <a:bodyPr wrap="square" anchor="t" lIns="25400" rIns="25400" tIns="12700" bIns="12700">
             <a:spAutoFit/>
           </a:bodyPr>
           <a:lstStyle/>
@@ -4218,8 +4434,9 @@
             <a:r>
               <a:rPr sz="1300" b="1" i="0">
                 <a:solidFill>
-                  <a:srgbClr val="0D2B55"/>
-                </a:solidFill>
+                  <a:srgbClr val="102A4C"/>
+                </a:solidFill>
+                <a:latin typeface="Calibri"/>
               </a:rPr>
               <a:t>Öne çıkanlar</a:t>
             </a:r>
@@ -4228,14 +4445,14 @@
       </p:sp>
       <p:sp>
         <p:nvSpPr>
-          <p:cNvPr id="11" name="TextBox 10"/>
+          <p:cNvPr id="13" name="TextBox 12"/>
           <p:cNvSpPr txBox="1"/>
           <p:nvPr/>
         </p:nvSpPr>
         <p:spPr>
           <a:xfrm>
-            <a:off x="8339328" y="2103120"/>
-            <a:ext cx="3383279" cy="3840479"/>
+            <a:off x="8129016" y="2176272"/>
+            <a:ext cx="3529584" cy="3867912"/>
           </a:xfrm>
           <a:prstGeom prst="rect">
             <a:avLst/>
@@ -4243,36 +4460,199 @@
           <a:noFill/>
         </p:spPr>
         <p:txBody>
-          <a:bodyPr wrap="square">
+          <a:bodyPr wrap="square" anchor="t" lIns="25400" rIns="25400">
             <a:spAutoFit/>
           </a:bodyPr>
           <a:lstStyle/>
           <a:p>
-            <a:pPr algn="l"/>
-            <a:r>
-              <a:rPr sz="1200" b="0" i="0">
-                <a:solidFill>
-                  <a:srgbClr val="2A2A2A"/>
-                </a:solidFill>
+            <a:pPr algn="l">
+              <a:spcBef>
+                <a:spcPts val="0"/>
+              </a:spcBef>
+              <a:spcAft>
+                <a:spcPts val="500"/>
+              </a:spcAft>
+            </a:pPr>
+            <a:r>
+              <a:rPr sz="1150" b="0" i="0">
+                <a:solidFill>
+                  <a:srgbClr val="242A30"/>
+                </a:solidFill>
+                <a:latin typeface="Calibri"/>
               </a:rPr>
-              <a:t>•  LightGBM (0,9548) ve Derin ÇKA (0,9542) başa baş.
-•  7 ML modeli ort. %92,75 ROC-AUC; 4 DL modeli ort. %92,32.
-•  1B-ESA hariç tutulduğunda DL ort. %94,62'ye yükseliyor.
-•  Sonuç: 47 boyutlu öznitelik vektörü ayırt edici bilginin büyük bölümünü kodluyor; öznitelik mühendisliği model kapasitesinin önüne geçiyor.</a:t>
-            </a:r>
-          </a:p>
-        </p:txBody>
-      </p:sp>
-      <p:sp>
-        <p:nvSpPr>
-          <p:cNvPr id="12" name="TextBox 11"/>
+              <a:t>LightGBM (0,9548) ve Derin ÇKA (0,9542) başa baş.</a:t>
+            </a:r>
+          </a:p>
+          <a:p>
+            <a:pPr algn="l">
+              <a:spcBef>
+                <a:spcPts val="0"/>
+              </a:spcBef>
+              <a:spcAft>
+                <a:spcPts val="500"/>
+              </a:spcAft>
+            </a:pPr>
+            <a:r>
+              <a:rPr sz="1150" b="0" i="0">
+                <a:solidFill>
+                  <a:srgbClr val="242A30"/>
+                </a:solidFill>
+                <a:latin typeface="Calibri"/>
+              </a:rPr>
+              <a:t/>
+            </a:r>
+          </a:p>
+          <a:p>
+            <a:pPr algn="l">
+              <a:spcBef>
+                <a:spcPts val="0"/>
+              </a:spcBef>
+              <a:spcAft>
+                <a:spcPts val="500"/>
+              </a:spcAft>
+            </a:pPr>
+            <a:r>
+              <a:rPr sz="1150" b="0" i="0">
+                <a:solidFill>
+                  <a:srgbClr val="242A30"/>
+                </a:solidFill>
+                <a:latin typeface="Calibri"/>
+              </a:rPr>
+              <a:t>7 ML modeli ort. %92,75 ROC-AUC; 4 DL modeli ort. %92,32.</a:t>
+            </a:r>
+          </a:p>
+          <a:p>
+            <a:pPr algn="l">
+              <a:spcBef>
+                <a:spcPts val="0"/>
+              </a:spcBef>
+              <a:spcAft>
+                <a:spcPts val="500"/>
+              </a:spcAft>
+            </a:pPr>
+            <a:r>
+              <a:rPr sz="1150" b="0" i="0">
+                <a:solidFill>
+                  <a:srgbClr val="242A30"/>
+                </a:solidFill>
+                <a:latin typeface="Calibri"/>
+              </a:rPr>
+              <a:t/>
+            </a:r>
+          </a:p>
+          <a:p>
+            <a:pPr algn="l">
+              <a:spcBef>
+                <a:spcPts val="0"/>
+              </a:spcBef>
+              <a:spcAft>
+                <a:spcPts val="500"/>
+              </a:spcAft>
+            </a:pPr>
+            <a:r>
+              <a:rPr sz="1150" b="0" i="0">
+                <a:solidFill>
+                  <a:srgbClr val="242A30"/>
+                </a:solidFill>
+                <a:latin typeface="Calibri"/>
+              </a:rPr>
+              <a:t>1B-ESA hariç tutulduğunda DL ort. %94,62'ye yükseliyor.</a:t>
+            </a:r>
+          </a:p>
+          <a:p>
+            <a:pPr algn="l">
+              <a:spcBef>
+                <a:spcPts val="0"/>
+              </a:spcBef>
+              <a:spcAft>
+                <a:spcPts val="500"/>
+              </a:spcAft>
+            </a:pPr>
+            <a:r>
+              <a:rPr sz="1150" b="0" i="0">
+                <a:solidFill>
+                  <a:srgbClr val="242A30"/>
+                </a:solidFill>
+                <a:latin typeface="Calibri"/>
+              </a:rPr>
+              <a:t/>
+            </a:r>
+          </a:p>
+          <a:p>
+            <a:pPr algn="l">
+              <a:spcBef>
+                <a:spcPts val="0"/>
+              </a:spcBef>
+              <a:spcAft>
+                <a:spcPts val="500"/>
+              </a:spcAft>
+            </a:pPr>
+            <a:r>
+              <a:rPr sz="1150" b="0" i="0">
+                <a:solidFill>
+                  <a:srgbClr val="242A30"/>
+                </a:solidFill>
+                <a:latin typeface="Calibri"/>
+              </a:rPr>
+              <a:t>Sonuç: 47 boyutlu vektör ayırt edici bilginin büyük bölümünü kodluyor — öznitelik mühendisliği model kapasitesinin önüne geçiyor.</a:t>
+            </a:r>
+          </a:p>
+        </p:txBody>
+      </p:sp>
+      <p:sp>
+        <p:nvSpPr>
+          <p:cNvPr id="14" name="Rectangle 13"/>
+          <p:cNvSpPr/>
+          <p:nvPr/>
+        </p:nvSpPr>
+        <p:spPr>
+          <a:xfrm>
+            <a:off x="365760" y="6419088"/>
+            <a:ext cx="11457432" cy="10972"/>
+          </a:xfrm>
+          <a:prstGeom prst="rect">
+            <a:avLst/>
+          </a:prstGeom>
+          <a:solidFill>
+            <a:srgbClr val="D2D9E0"/>
+          </a:solidFill>
+          <a:ln>
+            <a:noFill/>
+          </a:ln>
+          <a:effectLst/>
+        </p:spPr>
+        <p:style>
+          <a:lnRef idx="1">
+            <a:schemeClr val="accent1"/>
+          </a:lnRef>
+          <a:fillRef idx="3">
+            <a:schemeClr val="accent1"/>
+          </a:fillRef>
+          <a:effectRef idx="2">
+            <a:schemeClr val="accent1"/>
+          </a:effectRef>
+          <a:fontRef idx="minor">
+            <a:schemeClr val="lt1"/>
+          </a:fontRef>
+        </p:style>
+        <p:txBody>
+          <a:bodyPr rtlCol="0" anchor="ctr"/>
+          <a:lstStyle/>
+          <a:p>
+            <a:pPr algn="ctr"/>
+          </a:p>
+        </p:txBody>
+      </p:sp>
+      <p:sp>
+        <p:nvSpPr>
+          <p:cNvPr id="15" name="TextBox 14"/>
           <p:cNvSpPr txBox="1"/>
           <p:nvPr/>
         </p:nvSpPr>
         <p:spPr>
           <a:xfrm>
-            <a:off x="365760" y="6510528"/>
-            <a:ext cx="8229600" cy="301752"/>
+            <a:off x="365760" y="6473952"/>
+            <a:ext cx="7772400" cy="292608"/>
           </a:xfrm>
           <a:prstGeom prst="rect">
             <a:avLst/>
@@ -4280,7 +4660,7 @@
           <a:noFill/>
         </p:spPr>
         <p:txBody>
-          <a:bodyPr wrap="square">
+          <a:bodyPr wrap="square" anchor="t" lIns="25400" rIns="25400" tIns="12700" bIns="12700">
             <a:spAutoFit/>
           </a:bodyPr>
           <a:lstStyle/>
@@ -4289,24 +4669,25 @@
             <a:r>
               <a:rPr sz="900" b="0" i="0">
                 <a:solidFill>
-                  <a:srgbClr val="66707A"/>
-                </a:solidFill>
+                  <a:srgbClr val="6A7480"/>
+                </a:solidFill>
+                <a:latin typeface="Calibri"/>
               </a:rPr>
-              <a:t>AURIS  ·  Hasan Arthur Altuntaş  ·  BM498 Mezuniyet Tezi</a:t>
-            </a:r>
-          </a:p>
-        </p:txBody>
-      </p:sp>
-      <p:sp>
-        <p:nvSpPr>
-          <p:cNvPr id="13" name="TextBox 12"/>
+              <a:t>AURIS  ·  Yapay Zekâ Üretimli Müzik Tespiti</a:t>
+            </a:r>
+          </a:p>
+        </p:txBody>
+      </p:sp>
+      <p:sp>
+        <p:nvSpPr>
+          <p:cNvPr id="16" name="TextBox 15"/>
           <p:cNvSpPr txBox="1"/>
           <p:nvPr/>
         </p:nvSpPr>
         <p:spPr>
           <a:xfrm>
-            <a:off x="8595360" y="6510528"/>
-            <a:ext cx="3200400" cy="301752"/>
+            <a:off x="5029200" y="6473952"/>
+            <a:ext cx="6793992" cy="292608"/>
           </a:xfrm>
           <a:prstGeom prst="rect">
             <a:avLst/>
@@ -4314,7 +4695,7 @@
           <a:noFill/>
         </p:spPr>
         <p:txBody>
-          <a:bodyPr wrap="square">
+          <a:bodyPr wrap="square" anchor="t" lIns="25400" rIns="25400" tIns="12700" bIns="12700">
             <a:spAutoFit/>
           </a:bodyPr>
           <a:lstStyle/>
@@ -4323,10 +4704,11 @@
             <a:r>
               <a:rPr sz="900" b="0" i="0">
                 <a:solidFill>
-                  <a:srgbClr val="66707A"/>
-                </a:solidFill>
+                  <a:srgbClr val="6A7480"/>
+                </a:solidFill>
+                <a:latin typeface="Calibri"/>
               </a:rPr>
-              <a:t>Düzce Üniversitesi · 2025-2026</a:t>
+              <a:t>Hasan Arthur Altuntaş  ·  BM498  ·  Düzce Üniversitesi  ·  2025-2026</a:t>
             </a:r>
           </a:p>
         </p:txBody>
@@ -4345,7 +4727,7 @@
     <p:bg>
       <p:bgPr>
         <a:solidFill>
-          <a:srgbClr val="F4F6F8"/>
+          <a:srgbClr val="F6F8FA"/>
         </a:solidFill>
         <a:effectLst/>
       </p:bgPr>
@@ -4372,11 +4754,12 @@
             <a:avLst/>
           </a:prstGeom>
           <a:solidFill>
-            <a:srgbClr val="0D2B55"/>
+            <a:srgbClr val="102A4C"/>
           </a:solidFill>
           <a:ln>
             <a:noFill/>
           </a:ln>
+          <a:effectLst/>
         </p:spPr>
         <p:style>
           <a:lnRef idx="1">
@@ -4409,17 +4792,18 @@
         <p:spPr>
           <a:xfrm>
             <a:off x="0" y="1371600"/>
-            <a:ext cx="12188952" cy="54864"/>
+            <a:ext cx="12188952" cy="50292"/>
           </a:xfrm>
           <a:prstGeom prst="rect">
             <a:avLst/>
           </a:prstGeom>
           <a:solidFill>
-            <a:srgbClr val="E0A800"/>
+            <a:srgbClr val="D99A07"/>
           </a:solidFill>
           <a:ln>
             <a:noFill/>
           </a:ln>
+          <a:effectLst/>
         </p:spPr>
         <p:style>
           <a:lnRef idx="1">
@@ -4445,14 +4829,58 @@
       </p:sp>
       <p:sp>
         <p:nvSpPr>
-          <p:cNvPr id="4" name="TextBox 3"/>
+          <p:cNvPr id="4" name="Rectangle 3"/>
+          <p:cNvSpPr/>
+          <p:nvPr/>
+        </p:nvSpPr>
+        <p:spPr>
+          <a:xfrm>
+            <a:off x="0" y="0"/>
+            <a:ext cx="164592" cy="1371600"/>
+          </a:xfrm>
+          <a:prstGeom prst="rect">
+            <a:avLst/>
+          </a:prstGeom>
+          <a:solidFill>
+            <a:srgbClr val="D99A07"/>
+          </a:solidFill>
+          <a:ln>
+            <a:noFill/>
+          </a:ln>
+          <a:effectLst/>
+        </p:spPr>
+        <p:style>
+          <a:lnRef idx="1">
+            <a:schemeClr val="accent1"/>
+          </a:lnRef>
+          <a:fillRef idx="3">
+            <a:schemeClr val="accent1"/>
+          </a:fillRef>
+          <a:effectRef idx="2">
+            <a:schemeClr val="accent1"/>
+          </a:effectRef>
+          <a:fontRef idx="minor">
+            <a:schemeClr val="lt1"/>
+          </a:fontRef>
+        </p:style>
+        <p:txBody>
+          <a:bodyPr rtlCol="0" anchor="ctr"/>
+          <a:lstStyle/>
+          <a:p>
+            <a:pPr algn="ctr"/>
+          </a:p>
+        </p:txBody>
+      </p:sp>
+      <p:sp>
+        <p:nvSpPr>
+          <p:cNvPr id="5" name="TextBox 4"/>
           <p:cNvSpPr txBox="1"/>
           <p:nvPr/>
         </p:nvSpPr>
         <p:spPr>
           <a:xfrm>
-            <a:off x="365760" y="109728"/>
-            <a:ext cx="11430000" cy="320040"/>
+            <a:off x="411480" y="146304"/>
+            <a:ext cx="10058400" cy="292608"/>
           </a:xfrm>
           <a:prstGeom prst="rect">
             <a:avLst/>
@@ -4460,17 +4888,18 @@
           <a:noFill/>
         </p:spPr>
         <p:txBody>
-          <a:bodyPr wrap="square">
+          <a:bodyPr wrap="square" anchor="t" lIns="25400" rIns="25400" tIns="12700" bIns="12700">
             <a:spAutoFit/>
           </a:bodyPr>
           <a:lstStyle/>
           <a:p>
             <a:pPr algn="l"/>
             <a:r>
-              <a:rPr sz="1100" b="1" i="0">
-                <a:solidFill>
-                  <a:srgbClr val="E0A800"/>
-                </a:solidFill>
+              <a:rPr sz="1150" b="1" i="0">
+                <a:solidFill>
+                  <a:srgbClr val="D99A07"/>
+                </a:solidFill>
+                <a:latin typeface="Calibri"/>
               </a:rPr>
               <a:t>DEMO</a:t>
             </a:r>
@@ -4479,14 +4908,14 @@
       </p:sp>
       <p:sp>
         <p:nvSpPr>
-          <p:cNvPr id="5" name="TextBox 4"/>
+          <p:cNvPr id="6" name="TextBox 5"/>
           <p:cNvSpPr txBox="1"/>
           <p:nvPr/>
         </p:nvSpPr>
         <p:spPr>
           <a:xfrm>
-            <a:off x="365760" y="402336"/>
-            <a:ext cx="11430000" cy="640080"/>
+            <a:off x="411480" y="420624"/>
+            <a:ext cx="11338560" cy="603504"/>
           </a:xfrm>
           <a:prstGeom prst="rect">
             <a:avLst/>
@@ -4494,17 +4923,18 @@
           <a:noFill/>
         </p:spPr>
         <p:txBody>
-          <a:bodyPr wrap="square">
+          <a:bodyPr wrap="square" anchor="t" lIns="25400" rIns="25400" tIns="12700" bIns="12700">
             <a:spAutoFit/>
           </a:bodyPr>
           <a:lstStyle/>
           <a:p>
             <a:pPr algn="l"/>
             <a:r>
-              <a:rPr sz="2400" b="1" i="0">
+              <a:rPr sz="2300" b="1" i="0">
                 <a:solidFill>
                   <a:srgbClr val="FFFFFF"/>
                 </a:solidFill>
+                <a:latin typeface="Calibri"/>
               </a:rPr>
               <a:t>Sistem Çalışma Akışı</a:t>
             </a:r>
@@ -4513,13 +4943,13 @@
       </p:sp>
       <p:sp>
         <p:nvSpPr>
-          <p:cNvPr id="6" name="Rectangle 5"/>
+          <p:cNvPr id="7" name="Rectangle 6"/>
           <p:cNvSpPr/>
           <p:nvPr/>
         </p:nvSpPr>
         <p:spPr>
           <a:xfrm>
-            <a:off x="365760" y="1600200"/>
+            <a:off x="365760" y="1627632"/>
             <a:ext cx="6766560" cy="658368"/>
           </a:xfrm>
           <a:prstGeom prst="rect">
@@ -4530,9 +4960,10 @@
           </a:solidFill>
           <a:ln w="12700">
             <a:solidFill>
-              <a:srgbClr val="007A87"/>
+              <a:srgbClr val="0A808C"/>
             </a:solidFill>
           </a:ln>
+          <a:effectLst/>
         </p:spPr>
         <p:style>
           <a:lnRef idx="1">
@@ -4558,24 +4989,25 @@
       </p:sp>
       <p:sp>
         <p:nvSpPr>
-          <p:cNvPr id="7" name="Rectangle 6"/>
+          <p:cNvPr id="8" name="Rectangle 7"/>
           <p:cNvSpPr/>
           <p:nvPr/>
         </p:nvSpPr>
         <p:spPr>
           <a:xfrm>
-            <a:off x="365760" y="1600200"/>
-            <a:ext cx="566928" cy="658368"/>
+            <a:off x="365760" y="1627632"/>
+            <a:ext cx="594360" cy="658368"/>
           </a:xfrm>
           <a:prstGeom prst="rect">
             <a:avLst/>
           </a:prstGeom>
           <a:solidFill>
-            <a:srgbClr val="0D2B55"/>
+            <a:srgbClr val="102A4C"/>
           </a:solidFill>
           <a:ln>
             <a:noFill/>
           </a:ln>
+          <a:effectLst/>
         </p:spPr>
         <p:style>
           <a:lnRef idx="1">
@@ -4601,14 +5033,14 @@
       </p:sp>
       <p:sp>
         <p:nvSpPr>
-          <p:cNvPr id="8" name="TextBox 7"/>
+          <p:cNvPr id="9" name="TextBox 8"/>
           <p:cNvSpPr txBox="1"/>
           <p:nvPr/>
         </p:nvSpPr>
         <p:spPr>
           <a:xfrm>
-            <a:off x="365760" y="1636776"/>
-            <a:ext cx="566928" cy="585216"/>
+            <a:off x="365760" y="1627632"/>
+            <a:ext cx="594360" cy="658368"/>
           </a:xfrm>
           <a:prstGeom prst="rect">
             <a:avLst/>
@@ -4616,7 +5048,7 @@
           <a:noFill/>
         </p:spPr>
         <p:txBody>
-          <a:bodyPr wrap="square" anchor="ctr">
+          <a:bodyPr wrap="square" anchor="ctr" lIns="25400" rIns="25400" tIns="12700" bIns="12700">
             <a:spAutoFit/>
           </a:bodyPr>
           <a:lstStyle/>
@@ -4625,8 +5057,9 @@
             <a:r>
               <a:rPr sz="2000" b="1" i="0">
                 <a:solidFill>
-                  <a:srgbClr val="E0A800"/>
-                </a:solidFill>
+                  <a:srgbClr val="D99A07"/>
+                </a:solidFill>
+                <a:latin typeface="Calibri"/>
               </a:rPr>
               <a:t>1</a:t>
             </a:r>
@@ -4635,13 +5068,13 @@
       </p:sp>
       <p:sp>
         <p:nvSpPr>
-          <p:cNvPr id="9" name="TextBox 8"/>
+          <p:cNvPr id="10" name="TextBox 9"/>
           <p:cNvSpPr txBox="1"/>
           <p:nvPr/>
         </p:nvSpPr>
         <p:spPr>
           <a:xfrm>
-            <a:off x="1097280" y="1673352"/>
+            <a:off x="1097280" y="1709928"/>
             <a:ext cx="5943600" cy="292608"/>
           </a:xfrm>
           <a:prstGeom prst="rect">
@@ -4650,7 +5083,7 @@
           <a:noFill/>
         </p:spPr>
         <p:txBody>
-          <a:bodyPr wrap="square">
+          <a:bodyPr wrap="square" anchor="t" lIns="25400" rIns="25400" tIns="12700" bIns="12700">
             <a:spAutoFit/>
           </a:bodyPr>
           <a:lstStyle/>
@@ -4659,8 +5092,9 @@
             <a:r>
               <a:rPr sz="1250" b="1" i="0">
                 <a:solidFill>
-                  <a:srgbClr val="0D2B55"/>
-                </a:solidFill>
+                  <a:srgbClr val="102A4C"/>
+                </a:solidFill>
+                <a:latin typeface="Calibri"/>
               </a:rPr>
               <a:t>Müzik dosyası yüklenir</a:t>
             </a:r>
@@ -4669,14 +5103,14 @@
       </p:sp>
       <p:sp>
         <p:nvSpPr>
-          <p:cNvPr id="10" name="TextBox 9"/>
+          <p:cNvPr id="11" name="TextBox 10"/>
           <p:cNvSpPr txBox="1"/>
           <p:nvPr/>
         </p:nvSpPr>
         <p:spPr>
           <a:xfrm>
-            <a:off x="1097280" y="1965960"/>
-            <a:ext cx="5943600" cy="274320"/>
+            <a:off x="1097280" y="2002536"/>
+            <a:ext cx="5943600" cy="256032"/>
           </a:xfrm>
           <a:prstGeom prst="rect">
             <a:avLst/>
@@ -4684,7 +5118,7 @@
           <a:noFill/>
         </p:spPr>
         <p:txBody>
-          <a:bodyPr wrap="square">
+          <a:bodyPr wrap="square" anchor="t" lIns="25400" rIns="25400" tIns="12700" bIns="12700">
             <a:spAutoFit/>
           </a:bodyPr>
           <a:lstStyle/>
@@ -4693,8 +5127,9 @@
             <a:r>
               <a:rPr sz="1050" b="0" i="0">
                 <a:solidFill>
-                  <a:srgbClr val="2A2A2A"/>
-                </a:solidFill>
+                  <a:srgbClr val="242A30"/>
+                </a:solidFill>
+                <a:latin typeface="Calibri"/>
               </a:rPr>
               <a:t>WAV / MP3 formatı kabul edilir</a:t>
             </a:r>
@@ -4703,13 +5138,13 @@
       </p:sp>
       <p:sp>
         <p:nvSpPr>
-          <p:cNvPr id="11" name="Rectangle 10"/>
+          <p:cNvPr id="12" name="Rectangle 11"/>
           <p:cNvSpPr/>
           <p:nvPr/>
         </p:nvSpPr>
         <p:spPr>
           <a:xfrm>
-            <a:off x="365760" y="2350008"/>
+            <a:off x="365760" y="2377440"/>
             <a:ext cx="6766560" cy="658368"/>
           </a:xfrm>
           <a:prstGeom prst="rect">
@@ -4720,9 +5155,10 @@
           </a:solidFill>
           <a:ln w="12700">
             <a:solidFill>
-              <a:srgbClr val="007A87"/>
+              <a:srgbClr val="0A808C"/>
             </a:solidFill>
           </a:ln>
+          <a:effectLst/>
         </p:spPr>
         <p:style>
           <a:lnRef idx="1">
@@ -4748,24 +5184,25 @@
       </p:sp>
       <p:sp>
         <p:nvSpPr>
-          <p:cNvPr id="12" name="Rectangle 11"/>
+          <p:cNvPr id="13" name="Rectangle 12"/>
           <p:cNvSpPr/>
           <p:nvPr/>
         </p:nvSpPr>
         <p:spPr>
           <a:xfrm>
-            <a:off x="365760" y="2350008"/>
-            <a:ext cx="566928" cy="658368"/>
+            <a:off x="365760" y="2377440"/>
+            <a:ext cx="594360" cy="658368"/>
           </a:xfrm>
           <a:prstGeom prst="rect">
             <a:avLst/>
           </a:prstGeom>
           <a:solidFill>
-            <a:srgbClr val="0D2B55"/>
+            <a:srgbClr val="102A4C"/>
           </a:solidFill>
           <a:ln>
             <a:noFill/>
           </a:ln>
+          <a:effectLst/>
         </p:spPr>
         <p:style>
           <a:lnRef idx="1">
@@ -4791,14 +5228,14 @@
       </p:sp>
       <p:sp>
         <p:nvSpPr>
-          <p:cNvPr id="13" name="TextBox 12"/>
+          <p:cNvPr id="14" name="TextBox 13"/>
           <p:cNvSpPr txBox="1"/>
           <p:nvPr/>
         </p:nvSpPr>
         <p:spPr>
           <a:xfrm>
-            <a:off x="365760" y="2386584"/>
-            <a:ext cx="566928" cy="585216"/>
+            <a:off x="365760" y="2377440"/>
+            <a:ext cx="594360" cy="658368"/>
           </a:xfrm>
           <a:prstGeom prst="rect">
             <a:avLst/>
@@ -4806,7 +5243,7 @@
           <a:noFill/>
         </p:spPr>
         <p:txBody>
-          <a:bodyPr wrap="square" anchor="ctr">
+          <a:bodyPr wrap="square" anchor="ctr" lIns="25400" rIns="25400" tIns="12700" bIns="12700">
             <a:spAutoFit/>
           </a:bodyPr>
           <a:lstStyle/>
@@ -4815,8 +5252,9 @@
             <a:r>
               <a:rPr sz="2000" b="1" i="0">
                 <a:solidFill>
-                  <a:srgbClr val="E0A800"/>
-                </a:solidFill>
+                  <a:srgbClr val="D99A07"/>
+                </a:solidFill>
+                <a:latin typeface="Calibri"/>
               </a:rPr>
               <a:t>2</a:t>
             </a:r>
@@ -4825,13 +5263,13 @@
       </p:sp>
       <p:sp>
         <p:nvSpPr>
-          <p:cNvPr id="14" name="TextBox 13"/>
+          <p:cNvPr id="15" name="TextBox 14"/>
           <p:cNvSpPr txBox="1"/>
           <p:nvPr/>
         </p:nvSpPr>
         <p:spPr>
           <a:xfrm>
-            <a:off x="1097280" y="2423160"/>
+            <a:off x="1097280" y="2459736"/>
             <a:ext cx="5943600" cy="292608"/>
           </a:xfrm>
           <a:prstGeom prst="rect">
@@ -4840,7 +5278,7 @@
           <a:noFill/>
         </p:spPr>
         <p:txBody>
-          <a:bodyPr wrap="square">
+          <a:bodyPr wrap="square" anchor="t" lIns="25400" rIns="25400" tIns="12700" bIns="12700">
             <a:spAutoFit/>
           </a:bodyPr>
           <a:lstStyle/>
@@ -4849,8 +5287,9 @@
             <a:r>
               <a:rPr sz="1250" b="1" i="0">
                 <a:solidFill>
-                  <a:srgbClr val="0D2B55"/>
-                </a:solidFill>
+                  <a:srgbClr val="102A4C"/>
+                </a:solidFill>
+                <a:latin typeface="Calibri"/>
               </a:rPr>
               <a:t>Ön işleme</a:t>
             </a:r>
@@ -4859,14 +5298,14 @@
       </p:sp>
       <p:sp>
         <p:nvSpPr>
-          <p:cNvPr id="15" name="TextBox 14"/>
+          <p:cNvPr id="16" name="TextBox 15"/>
           <p:cNvSpPr txBox="1"/>
           <p:nvPr/>
         </p:nvSpPr>
         <p:spPr>
           <a:xfrm>
-            <a:off x="1097280" y="2715768"/>
-            <a:ext cx="5943600" cy="274320"/>
+            <a:off x="1097280" y="2752344"/>
+            <a:ext cx="5943600" cy="256032"/>
           </a:xfrm>
           <a:prstGeom prst="rect">
             <a:avLst/>
@@ -4874,7 +5313,7 @@
           <a:noFill/>
         </p:spPr>
         <p:txBody>
-          <a:bodyPr wrap="square">
+          <a:bodyPr wrap="square" anchor="t" lIns="25400" rIns="25400" tIns="12700" bIns="12700">
             <a:spAutoFit/>
           </a:bodyPr>
           <a:lstStyle/>
@@ -4883,8 +5322,9 @@
             <a:r>
               <a:rPr sz="1050" b="0" i="0">
                 <a:solidFill>
-                  <a:srgbClr val="2A2A2A"/>
-                </a:solidFill>
+                  <a:srgbClr val="242A30"/>
+                </a:solidFill>
+                <a:latin typeface="Calibri"/>
               </a:rPr>
               <a:t>22.050 Hz'e indirgenir, mono'ya çevrilir</a:t>
             </a:r>
@@ -4893,13 +5333,13 @@
       </p:sp>
       <p:sp>
         <p:nvSpPr>
-          <p:cNvPr id="16" name="Rectangle 15"/>
+          <p:cNvPr id="17" name="Rectangle 16"/>
           <p:cNvSpPr/>
           <p:nvPr/>
         </p:nvSpPr>
         <p:spPr>
           <a:xfrm>
-            <a:off x="365760" y="3099815"/>
+            <a:off x="365760" y="3127248"/>
             <a:ext cx="6766560" cy="658368"/>
           </a:xfrm>
           <a:prstGeom prst="rect">
@@ -4910,9 +5350,10 @@
           </a:solidFill>
           <a:ln w="12700">
             <a:solidFill>
-              <a:srgbClr val="007A87"/>
+              <a:srgbClr val="0A808C"/>
             </a:solidFill>
           </a:ln>
+          <a:effectLst/>
         </p:spPr>
         <p:style>
           <a:lnRef idx="1">
@@ -4938,24 +5379,25 @@
       </p:sp>
       <p:sp>
         <p:nvSpPr>
-          <p:cNvPr id="17" name="Rectangle 16"/>
+          <p:cNvPr id="18" name="Rectangle 17"/>
           <p:cNvSpPr/>
           <p:nvPr/>
         </p:nvSpPr>
         <p:spPr>
           <a:xfrm>
-            <a:off x="365760" y="3099815"/>
-            <a:ext cx="566928" cy="658368"/>
+            <a:off x="365760" y="3127248"/>
+            <a:ext cx="594360" cy="658368"/>
           </a:xfrm>
           <a:prstGeom prst="rect">
             <a:avLst/>
           </a:prstGeom>
           <a:solidFill>
-            <a:srgbClr val="0D2B55"/>
+            <a:srgbClr val="102A4C"/>
           </a:solidFill>
           <a:ln>
             <a:noFill/>
           </a:ln>
+          <a:effectLst/>
         </p:spPr>
         <p:style>
           <a:lnRef idx="1">
@@ -4981,14 +5423,14 @@
       </p:sp>
       <p:sp>
         <p:nvSpPr>
-          <p:cNvPr id="18" name="TextBox 17"/>
+          <p:cNvPr id="19" name="TextBox 18"/>
           <p:cNvSpPr txBox="1"/>
           <p:nvPr/>
         </p:nvSpPr>
         <p:spPr>
           <a:xfrm>
-            <a:off x="365760" y="3136391"/>
-            <a:ext cx="566928" cy="585216"/>
+            <a:off x="365760" y="3127248"/>
+            <a:ext cx="594360" cy="658368"/>
           </a:xfrm>
           <a:prstGeom prst="rect">
             <a:avLst/>
@@ -4996,7 +5438,7 @@
           <a:noFill/>
         </p:spPr>
         <p:txBody>
-          <a:bodyPr wrap="square" anchor="ctr">
+          <a:bodyPr wrap="square" anchor="ctr" lIns="25400" rIns="25400" tIns="12700" bIns="12700">
             <a:spAutoFit/>
           </a:bodyPr>
           <a:lstStyle/>
@@ -5005,8 +5447,9 @@
             <a:r>
               <a:rPr sz="2000" b="1" i="0">
                 <a:solidFill>
-                  <a:srgbClr val="E0A800"/>
-                </a:solidFill>
+                  <a:srgbClr val="D99A07"/>
+                </a:solidFill>
+                <a:latin typeface="Calibri"/>
               </a:rPr>
               <a:t>3</a:t>
             </a:r>
@@ -5015,13 +5458,13 @@
       </p:sp>
       <p:sp>
         <p:nvSpPr>
-          <p:cNvPr id="19" name="TextBox 18"/>
+          <p:cNvPr id="20" name="TextBox 19"/>
           <p:cNvSpPr txBox="1"/>
           <p:nvPr/>
         </p:nvSpPr>
         <p:spPr>
           <a:xfrm>
-            <a:off x="1097280" y="3172968"/>
+            <a:off x="1097280" y="3209544"/>
             <a:ext cx="5943600" cy="292608"/>
           </a:xfrm>
           <a:prstGeom prst="rect">
@@ -5030,7 +5473,7 @@
           <a:noFill/>
         </p:spPr>
         <p:txBody>
-          <a:bodyPr wrap="square">
+          <a:bodyPr wrap="square" anchor="t" lIns="25400" rIns="25400" tIns="12700" bIns="12700">
             <a:spAutoFit/>
           </a:bodyPr>
           <a:lstStyle/>
@@ -5039,8 +5482,9 @@
             <a:r>
               <a:rPr sz="1250" b="1" i="0">
                 <a:solidFill>
-                  <a:srgbClr val="0D2B55"/>
-                </a:solidFill>
+                  <a:srgbClr val="102A4C"/>
+                </a:solidFill>
+                <a:latin typeface="Calibri"/>
               </a:rPr>
               <a:t>Öznitelik çıkarma</a:t>
             </a:r>
@@ -5049,14 +5493,14 @@
       </p:sp>
       <p:sp>
         <p:nvSpPr>
-          <p:cNvPr id="20" name="TextBox 19"/>
+          <p:cNvPr id="21" name="TextBox 20"/>
           <p:cNvSpPr txBox="1"/>
           <p:nvPr/>
         </p:nvSpPr>
         <p:spPr>
           <a:xfrm>
-            <a:off x="1097280" y="3465575"/>
-            <a:ext cx="5943600" cy="274320"/>
+            <a:off x="1097280" y="3502152"/>
+            <a:ext cx="5943600" cy="256032"/>
           </a:xfrm>
           <a:prstGeom prst="rect">
             <a:avLst/>
@@ -5064,7 +5508,7 @@
           <a:noFill/>
         </p:spPr>
         <p:txBody>
-          <a:bodyPr wrap="square">
+          <a:bodyPr wrap="square" anchor="t" lIns="25400" rIns="25400" tIns="12700" bIns="12700">
             <a:spAutoFit/>
           </a:bodyPr>
           <a:lstStyle/>
@@ -5073,8 +5517,9 @@
             <a:r>
               <a:rPr sz="1050" b="0" i="0">
                 <a:solidFill>
-                  <a:srgbClr val="2A2A2A"/>
-                </a:solidFill>
+                  <a:srgbClr val="242A30"/>
+                </a:solidFill>
+                <a:latin typeface="Calibri"/>
               </a:rPr>
               <a:t>librosa ile 47 boyutlu vektör hesaplanır</a:t>
             </a:r>
@@ -5083,13 +5528,13 @@
       </p:sp>
       <p:sp>
         <p:nvSpPr>
-          <p:cNvPr id="21" name="Rectangle 20"/>
+          <p:cNvPr id="22" name="Rectangle 21"/>
           <p:cNvSpPr/>
           <p:nvPr/>
         </p:nvSpPr>
         <p:spPr>
           <a:xfrm>
-            <a:off x="365760" y="3849624"/>
+            <a:off x="365760" y="3877056"/>
             <a:ext cx="6766560" cy="658368"/>
           </a:xfrm>
           <a:prstGeom prst="rect">
@@ -5100,9 +5545,10 @@
           </a:solidFill>
           <a:ln w="12700">
             <a:solidFill>
-              <a:srgbClr val="007A87"/>
+              <a:srgbClr val="0A808C"/>
             </a:solidFill>
           </a:ln>
+          <a:effectLst/>
         </p:spPr>
         <p:style>
           <a:lnRef idx="1">
@@ -5128,24 +5574,25 @@
       </p:sp>
       <p:sp>
         <p:nvSpPr>
-          <p:cNvPr id="22" name="Rectangle 21"/>
+          <p:cNvPr id="23" name="Rectangle 22"/>
           <p:cNvSpPr/>
           <p:nvPr/>
         </p:nvSpPr>
         <p:spPr>
           <a:xfrm>
-            <a:off x="365760" y="3849624"/>
-            <a:ext cx="566928" cy="658368"/>
+            <a:off x="365760" y="3877056"/>
+            <a:ext cx="594360" cy="658368"/>
           </a:xfrm>
           <a:prstGeom prst="rect">
             <a:avLst/>
           </a:prstGeom>
           <a:solidFill>
-            <a:srgbClr val="0D2B55"/>
+            <a:srgbClr val="102A4C"/>
           </a:solidFill>
           <a:ln>
             <a:noFill/>
           </a:ln>
+          <a:effectLst/>
         </p:spPr>
         <p:style>
           <a:lnRef idx="1">
@@ -5171,14 +5618,14 @@
       </p:sp>
       <p:sp>
         <p:nvSpPr>
-          <p:cNvPr id="23" name="TextBox 22"/>
+          <p:cNvPr id="24" name="TextBox 23"/>
           <p:cNvSpPr txBox="1"/>
           <p:nvPr/>
         </p:nvSpPr>
         <p:spPr>
           <a:xfrm>
-            <a:off x="365760" y="3886200"/>
-            <a:ext cx="566928" cy="585216"/>
+            <a:off x="365760" y="3877056"/>
+            <a:ext cx="594360" cy="658368"/>
           </a:xfrm>
           <a:prstGeom prst="rect">
             <a:avLst/>
@@ -5186,7 +5633,7 @@
           <a:noFill/>
         </p:spPr>
         <p:txBody>
-          <a:bodyPr wrap="square" anchor="ctr">
+          <a:bodyPr wrap="square" anchor="ctr" lIns="25400" rIns="25400" tIns="12700" bIns="12700">
             <a:spAutoFit/>
           </a:bodyPr>
           <a:lstStyle/>
@@ -5195,8 +5642,9 @@
             <a:r>
               <a:rPr sz="2000" b="1" i="0">
                 <a:solidFill>
-                  <a:srgbClr val="E0A800"/>
-                </a:solidFill>
+                  <a:srgbClr val="D99A07"/>
+                </a:solidFill>
+                <a:latin typeface="Calibri"/>
               </a:rPr>
               <a:t>4</a:t>
             </a:r>
@@ -5205,13 +5653,13 @@
       </p:sp>
       <p:sp>
         <p:nvSpPr>
-          <p:cNvPr id="24" name="TextBox 23"/>
+          <p:cNvPr id="25" name="TextBox 24"/>
           <p:cNvSpPr txBox="1"/>
           <p:nvPr/>
         </p:nvSpPr>
         <p:spPr>
           <a:xfrm>
-            <a:off x="1097280" y="3922776"/>
+            <a:off x="1097280" y="3959352"/>
             <a:ext cx="5943600" cy="292608"/>
           </a:xfrm>
           <a:prstGeom prst="rect">
@@ -5220,7 +5668,7 @@
           <a:noFill/>
         </p:spPr>
         <p:txBody>
-          <a:bodyPr wrap="square">
+          <a:bodyPr wrap="square" anchor="t" lIns="25400" rIns="25400" tIns="12700" bIns="12700">
             <a:spAutoFit/>
           </a:bodyPr>
           <a:lstStyle/>
@@ -5229,8 +5677,9 @@
             <a:r>
               <a:rPr sz="1250" b="1" i="0">
                 <a:solidFill>
-                  <a:srgbClr val="0D2B55"/>
-                </a:solidFill>
+                  <a:srgbClr val="102A4C"/>
+                </a:solidFill>
+                <a:latin typeface="Calibri"/>
               </a:rPr>
               <a:t>Model tahmini</a:t>
             </a:r>
@@ -5239,14 +5688,14 @@
       </p:sp>
       <p:sp>
         <p:nvSpPr>
-          <p:cNvPr id="25" name="TextBox 24"/>
+          <p:cNvPr id="26" name="TextBox 25"/>
           <p:cNvSpPr txBox="1"/>
           <p:nvPr/>
         </p:nvSpPr>
         <p:spPr>
           <a:xfrm>
-            <a:off x="1097280" y="4215384"/>
-            <a:ext cx="5943600" cy="274320"/>
+            <a:off x="1097280" y="4251960"/>
+            <a:ext cx="5943600" cy="256032"/>
           </a:xfrm>
           <a:prstGeom prst="rect">
             <a:avLst/>
@@ -5254,7 +5703,7 @@
           <a:noFill/>
         </p:spPr>
         <p:txBody>
-          <a:bodyPr wrap="square">
+          <a:bodyPr wrap="square" anchor="t" lIns="25400" rIns="25400" tIns="12700" bIns="12700">
             <a:spAutoFit/>
           </a:bodyPr>
           <a:lstStyle/>
@@ -5263,8 +5712,9 @@
             <a:r>
               <a:rPr sz="1050" b="0" i="0">
                 <a:solidFill>
-                  <a:srgbClr val="2A2A2A"/>
-                </a:solidFill>
+                  <a:srgbClr val="242A30"/>
+                </a:solidFill>
+                <a:latin typeface="Calibri"/>
               </a:rPr>
               <a:t>LightGBM yapay zekâ olasılığı üretir</a:t>
             </a:r>
@@ -5273,13 +5723,13 @@
       </p:sp>
       <p:sp>
         <p:nvSpPr>
-          <p:cNvPr id="26" name="Rectangle 25"/>
+          <p:cNvPr id="27" name="Rectangle 26"/>
           <p:cNvSpPr/>
           <p:nvPr/>
         </p:nvSpPr>
         <p:spPr>
           <a:xfrm>
-            <a:off x="365760" y="4599431"/>
+            <a:off x="365760" y="4626864"/>
             <a:ext cx="6766560" cy="658368"/>
           </a:xfrm>
           <a:prstGeom prst="rect">
@@ -5290,9 +5740,10 @@
           </a:solidFill>
           <a:ln w="12700">
             <a:solidFill>
-              <a:srgbClr val="007A87"/>
+              <a:srgbClr val="0A808C"/>
             </a:solidFill>
           </a:ln>
+          <a:effectLst/>
         </p:spPr>
         <p:style>
           <a:lnRef idx="1">
@@ -5318,24 +5769,25 @@
       </p:sp>
       <p:sp>
         <p:nvSpPr>
-          <p:cNvPr id="27" name="Rectangle 26"/>
+          <p:cNvPr id="28" name="Rectangle 27"/>
           <p:cNvSpPr/>
           <p:nvPr/>
         </p:nvSpPr>
         <p:spPr>
           <a:xfrm>
-            <a:off x="365760" y="4599431"/>
-            <a:ext cx="566928" cy="658368"/>
+            <a:off x="365760" y="4626864"/>
+            <a:ext cx="594360" cy="658368"/>
           </a:xfrm>
           <a:prstGeom prst="rect">
             <a:avLst/>
           </a:prstGeom>
           <a:solidFill>
-            <a:srgbClr val="0D2B55"/>
+            <a:srgbClr val="102A4C"/>
           </a:solidFill>
           <a:ln>
             <a:noFill/>
           </a:ln>
+          <a:effectLst/>
         </p:spPr>
         <p:style>
           <a:lnRef idx="1">
@@ -5361,14 +5813,14 @@
       </p:sp>
       <p:sp>
         <p:nvSpPr>
-          <p:cNvPr id="28" name="TextBox 27"/>
+          <p:cNvPr id="29" name="TextBox 28"/>
           <p:cNvSpPr txBox="1"/>
           <p:nvPr/>
         </p:nvSpPr>
         <p:spPr>
           <a:xfrm>
-            <a:off x="365760" y="4636007"/>
-            <a:ext cx="566928" cy="585216"/>
+            <a:off x="365760" y="4626864"/>
+            <a:ext cx="594360" cy="658368"/>
           </a:xfrm>
           <a:prstGeom prst="rect">
             <a:avLst/>
@@ -5376,7 +5828,7 @@
           <a:noFill/>
         </p:spPr>
         <p:txBody>
-          <a:bodyPr wrap="square" anchor="ctr">
+          <a:bodyPr wrap="square" anchor="ctr" lIns="25400" rIns="25400" tIns="12700" bIns="12700">
             <a:spAutoFit/>
           </a:bodyPr>
           <a:lstStyle/>
@@ -5385,8 +5837,9 @@
             <a:r>
               <a:rPr sz="2000" b="1" i="0">
                 <a:solidFill>
-                  <a:srgbClr val="E0A800"/>
-                </a:solidFill>
+                  <a:srgbClr val="D99A07"/>
+                </a:solidFill>
+                <a:latin typeface="Calibri"/>
               </a:rPr>
               <a:t>5</a:t>
             </a:r>
@@ -5395,13 +5848,13 @@
       </p:sp>
       <p:sp>
         <p:nvSpPr>
-          <p:cNvPr id="29" name="TextBox 28"/>
+          <p:cNvPr id="30" name="TextBox 29"/>
           <p:cNvSpPr txBox="1"/>
           <p:nvPr/>
         </p:nvSpPr>
         <p:spPr>
           <a:xfrm>
-            <a:off x="1097280" y="4672583"/>
+            <a:off x="1097280" y="4709159"/>
             <a:ext cx="5943600" cy="292608"/>
           </a:xfrm>
           <a:prstGeom prst="rect">
@@ -5410,7 +5863,7 @@
           <a:noFill/>
         </p:spPr>
         <p:txBody>
-          <a:bodyPr wrap="square">
+          <a:bodyPr wrap="square" anchor="t" lIns="25400" rIns="25400" tIns="12700" bIns="12700">
             <a:spAutoFit/>
           </a:bodyPr>
           <a:lstStyle/>
@@ -5419,8 +5872,9 @@
             <a:r>
               <a:rPr sz="1250" b="1" i="0">
                 <a:solidFill>
-                  <a:srgbClr val="0D2B55"/>
-                </a:solidFill>
+                  <a:srgbClr val="102A4C"/>
+                </a:solidFill>
+                <a:latin typeface="Calibri"/>
               </a:rPr>
               <a:t>Eşik uygulama</a:t>
             </a:r>
@@ -5429,14 +5883,14 @@
       </p:sp>
       <p:sp>
         <p:nvSpPr>
-          <p:cNvPr id="30" name="TextBox 29"/>
+          <p:cNvPr id="31" name="TextBox 30"/>
           <p:cNvSpPr txBox="1"/>
           <p:nvPr/>
         </p:nvSpPr>
         <p:spPr>
           <a:xfrm>
-            <a:off x="1097280" y="4965192"/>
-            <a:ext cx="5943600" cy="274320"/>
+            <a:off x="1097280" y="5001768"/>
+            <a:ext cx="5943600" cy="256032"/>
           </a:xfrm>
           <a:prstGeom prst="rect">
             <a:avLst/>
@@ -5444,7 +5898,7 @@
           <a:noFill/>
         </p:spPr>
         <p:txBody>
-          <a:bodyPr wrap="square">
+          <a:bodyPr wrap="square" anchor="t" lIns="25400" rIns="25400" tIns="12700" bIns="12700">
             <a:spAutoFit/>
           </a:bodyPr>
           <a:lstStyle/>
@@ -5453,8 +5907,9 @@
             <a:r>
               <a:rPr sz="1050" b="0" i="0">
                 <a:solidFill>
-                  <a:srgbClr val="2A2A2A"/>
-                </a:solidFill>
+                  <a:srgbClr val="242A30"/>
+                </a:solidFill>
+                <a:latin typeface="Calibri"/>
               </a:rPr>
               <a:t>θ*=0,4316 ile sınıf kararı verilir</a:t>
             </a:r>
@@ -5463,13 +5918,13 @@
       </p:sp>
       <p:sp>
         <p:nvSpPr>
-          <p:cNvPr id="31" name="Rectangle 30"/>
+          <p:cNvPr id="32" name="Rectangle 31"/>
           <p:cNvSpPr/>
           <p:nvPr/>
         </p:nvSpPr>
         <p:spPr>
           <a:xfrm>
-            <a:off x="365760" y="5349240"/>
+            <a:off x="365760" y="5376672"/>
             <a:ext cx="6766560" cy="658368"/>
           </a:xfrm>
           <a:prstGeom prst="rect">
@@ -5480,9 +5935,10 @@
           </a:solidFill>
           <a:ln w="12700">
             <a:solidFill>
-              <a:srgbClr val="007A87"/>
+              <a:srgbClr val="0A808C"/>
             </a:solidFill>
           </a:ln>
+          <a:effectLst/>
         </p:spPr>
         <p:style>
           <a:lnRef idx="1">
@@ -5508,24 +5964,25 @@
       </p:sp>
       <p:sp>
         <p:nvSpPr>
-          <p:cNvPr id="32" name="Rectangle 31"/>
+          <p:cNvPr id="33" name="Rectangle 32"/>
           <p:cNvSpPr/>
           <p:nvPr/>
         </p:nvSpPr>
         <p:spPr>
           <a:xfrm>
-            <a:off x="365760" y="5349240"/>
-            <a:ext cx="566928" cy="658368"/>
+            <a:off x="365760" y="5376672"/>
+            <a:ext cx="594360" cy="658368"/>
           </a:xfrm>
           <a:prstGeom prst="rect">
             <a:avLst/>
           </a:prstGeom>
           <a:solidFill>
-            <a:srgbClr val="0D2B55"/>
+            <a:srgbClr val="102A4C"/>
           </a:solidFill>
           <a:ln>
             <a:noFill/>
           </a:ln>
+          <a:effectLst/>
         </p:spPr>
         <p:style>
           <a:lnRef idx="1">
@@ -5551,14 +6008,14 @@
       </p:sp>
       <p:sp>
         <p:nvSpPr>
-          <p:cNvPr id="33" name="TextBox 32"/>
+          <p:cNvPr id="34" name="TextBox 33"/>
           <p:cNvSpPr txBox="1"/>
           <p:nvPr/>
         </p:nvSpPr>
         <p:spPr>
           <a:xfrm>
-            <a:off x="365760" y="5385816"/>
-            <a:ext cx="566928" cy="585216"/>
+            <a:off x="365760" y="5376672"/>
+            <a:ext cx="594360" cy="658368"/>
           </a:xfrm>
           <a:prstGeom prst="rect">
             <a:avLst/>
@@ -5566,7 +6023,7 @@
           <a:noFill/>
         </p:spPr>
         <p:txBody>
-          <a:bodyPr wrap="square" anchor="ctr">
+          <a:bodyPr wrap="square" anchor="ctr" lIns="25400" rIns="25400" tIns="12700" bIns="12700">
             <a:spAutoFit/>
           </a:bodyPr>
           <a:lstStyle/>
@@ -5575,8 +6032,9 @@
             <a:r>
               <a:rPr sz="2000" b="1" i="0">
                 <a:solidFill>
-                  <a:srgbClr val="E0A800"/>
-                </a:solidFill>
+                  <a:srgbClr val="D99A07"/>
+                </a:solidFill>
+                <a:latin typeface="Calibri"/>
               </a:rPr>
               <a:t>6</a:t>
             </a:r>
@@ -5585,13 +6043,13 @@
       </p:sp>
       <p:sp>
         <p:nvSpPr>
-          <p:cNvPr id="34" name="TextBox 33"/>
+          <p:cNvPr id="35" name="TextBox 34"/>
           <p:cNvSpPr txBox="1"/>
           <p:nvPr/>
         </p:nvSpPr>
         <p:spPr>
           <a:xfrm>
-            <a:off x="1097280" y="5422392"/>
+            <a:off x="1097280" y="5458968"/>
             <a:ext cx="5943600" cy="292608"/>
           </a:xfrm>
           <a:prstGeom prst="rect">
@@ -5600,7 +6058,7 @@
           <a:noFill/>
         </p:spPr>
         <p:txBody>
-          <a:bodyPr wrap="square">
+          <a:bodyPr wrap="square" anchor="t" lIns="25400" rIns="25400" tIns="12700" bIns="12700">
             <a:spAutoFit/>
           </a:bodyPr>
           <a:lstStyle/>
@@ -5609,8 +6067,9 @@
             <a:r>
               <a:rPr sz="1250" b="1" i="0">
                 <a:solidFill>
-                  <a:srgbClr val="0D2B55"/>
-                </a:solidFill>
+                  <a:srgbClr val="102A4C"/>
+                </a:solidFill>
+                <a:latin typeface="Calibri"/>
               </a:rPr>
               <a:t>Açıklama</a:t>
             </a:r>
@@ -5619,14 +6078,14 @@
       </p:sp>
       <p:sp>
         <p:nvSpPr>
-          <p:cNvPr id="35" name="TextBox 34"/>
+          <p:cNvPr id="36" name="TextBox 35"/>
           <p:cNvSpPr txBox="1"/>
           <p:nvPr/>
         </p:nvSpPr>
         <p:spPr>
           <a:xfrm>
-            <a:off x="1097280" y="5715000"/>
-            <a:ext cx="5943600" cy="274320"/>
+            <a:off x="1097280" y="5751576"/>
+            <a:ext cx="5943600" cy="256032"/>
           </a:xfrm>
           <a:prstGeom prst="rect">
             <a:avLst/>
@@ -5634,7 +6093,7 @@
           <a:noFill/>
         </p:spPr>
         <p:txBody>
-          <a:bodyPr wrap="square">
+          <a:bodyPr wrap="square" anchor="t" lIns="25400" rIns="25400" tIns="12700" bIns="12700">
             <a:spAutoFit/>
           </a:bodyPr>
           <a:lstStyle/>
@@ -5643,17 +6102,64 @@
             <a:r>
               <a:rPr sz="1050" b="0" i="0">
                 <a:solidFill>
-                  <a:srgbClr val="2A2A2A"/>
-                </a:solidFill>
+                  <a:srgbClr val="242A30"/>
+                </a:solidFill>
+                <a:latin typeface="Calibri"/>
               </a:rPr>
               <a:t>SHAP ile kararın gerekçesi gösterilir</a:t>
             </a:r>
           </a:p>
         </p:txBody>
       </p:sp>
+      <p:sp>
+        <p:nvSpPr>
+          <p:cNvPr id="37" name="Rectangle 36"/>
+          <p:cNvSpPr/>
+          <p:nvPr/>
+        </p:nvSpPr>
+        <p:spPr>
+          <a:xfrm>
+            <a:off x="7315200" y="1842432"/>
+            <a:ext cx="4526279" cy="2898815"/>
+          </a:xfrm>
+          <a:prstGeom prst="rect">
+            <a:avLst/>
+          </a:prstGeom>
+          <a:solidFill>
+            <a:srgbClr val="FFFFFF"/>
+          </a:solidFill>
+          <a:ln w="9525">
+            <a:solidFill>
+              <a:srgbClr val="D2D9E0"/>
+            </a:solidFill>
+          </a:ln>
+          <a:effectLst/>
+        </p:spPr>
+        <p:style>
+          <a:lnRef idx="1">
+            <a:schemeClr val="accent1"/>
+          </a:lnRef>
+          <a:fillRef idx="3">
+            <a:schemeClr val="accent1"/>
+          </a:fillRef>
+          <a:effectRef idx="2">
+            <a:schemeClr val="accent1"/>
+          </a:effectRef>
+          <a:fontRef idx="minor">
+            <a:schemeClr val="lt1"/>
+          </a:fontRef>
+        </p:style>
+        <p:txBody>
+          <a:bodyPr rtlCol="0" anchor="ctr"/>
+          <a:lstStyle/>
+          <a:p>
+            <a:pPr algn="ctr"/>
+          </a:p>
+        </p:txBody>
+      </p:sp>
       <p:pic>
         <p:nvPicPr>
-          <p:cNvPr id="36" name="Picture 35" descr="paper_score_distribution.png"/>
+          <p:cNvPr id="38" name="Picture 37" descr="paper_score_distribution.png"/>
           <p:cNvPicPr>
             <a:picLocks noChangeAspect="1"/>
           </p:cNvPicPr>
@@ -5667,8 +6173,8 @@
         </p:blipFill>
         <p:spPr>
           <a:xfrm>
-            <a:off x="7406640" y="1783080"/>
-            <a:ext cx="4389120" cy="3566160"/>
+            <a:off x="7360920" y="1888152"/>
+            <a:ext cx="4434840" cy="2807375"/>
           </a:xfrm>
           <a:prstGeom prst="rect">
             <a:avLst/>
@@ -5677,14 +6183,14 @@
       </p:pic>
       <p:sp>
         <p:nvSpPr>
-          <p:cNvPr id="37" name="TextBox 36"/>
+          <p:cNvPr id="39" name="TextBox 38"/>
           <p:cNvSpPr txBox="1"/>
           <p:nvPr/>
         </p:nvSpPr>
         <p:spPr>
           <a:xfrm>
-            <a:off x="7406640" y="5385816"/>
-            <a:ext cx="4389120" cy="292608"/>
+            <a:off x="7360920" y="4750391"/>
+            <a:ext cx="4434840" cy="274320"/>
           </a:xfrm>
           <a:prstGeom prst="rect">
             <a:avLst/>
@@ -5692,7 +6198,7 @@
           <a:noFill/>
         </p:spPr>
         <p:txBody>
-          <a:bodyPr wrap="square">
+          <a:bodyPr wrap="square" anchor="t" lIns="25400" rIns="25400" tIns="12700" bIns="12700">
             <a:spAutoFit/>
           </a:bodyPr>
           <a:lstStyle/>
@@ -5701,8 +6207,9 @@
             <a:r>
               <a:rPr sz="1000" b="0" i="1">
                 <a:solidFill>
-                  <a:srgbClr val="66707A"/>
-                </a:solidFill>
+                  <a:srgbClr val="6A7480"/>
+                </a:solidFill>
+                <a:latin typeface="Calibri"/>
               </a:rPr>
               <a:t>Şekil 9: P(YZ) olasılık dağılımı</a:t>
             </a:r>
@@ -5711,24 +6218,25 @@
       </p:sp>
       <p:sp>
         <p:nvSpPr>
-          <p:cNvPr id="38" name="Rectangle 37"/>
+          <p:cNvPr id="40" name="Rectangle 39"/>
           <p:cNvSpPr/>
           <p:nvPr/>
         </p:nvSpPr>
         <p:spPr>
           <a:xfrm>
-            <a:off x="7406640" y="5486400"/>
-            <a:ext cx="4389120" cy="868680"/>
+            <a:off x="7360920" y="5074920"/>
+            <a:ext cx="4434840" cy="960120"/>
           </a:xfrm>
           <a:prstGeom prst="rect">
             <a:avLst/>
           </a:prstGeom>
           <a:solidFill>
-            <a:srgbClr val="E8ECF0"/>
+            <a:srgbClr val="EAEEF2"/>
           </a:solidFill>
           <a:ln>
             <a:noFill/>
           </a:ln>
+          <a:effectLst/>
         </p:spPr>
         <p:style>
           <a:lnRef idx="1">
@@ -5754,24 +6262,25 @@
       </p:sp>
       <p:sp>
         <p:nvSpPr>
-          <p:cNvPr id="39" name="Rectangle 38"/>
+          <p:cNvPr id="41" name="Rectangle 40"/>
           <p:cNvSpPr/>
           <p:nvPr/>
         </p:nvSpPr>
         <p:spPr>
           <a:xfrm>
-            <a:off x="7406640" y="5486400"/>
-            <a:ext cx="82296" cy="868680"/>
+            <a:off x="7360920" y="5074920"/>
+            <a:ext cx="91440" cy="960120"/>
           </a:xfrm>
           <a:prstGeom prst="rect">
             <a:avLst/>
           </a:prstGeom>
           <a:solidFill>
-            <a:srgbClr val="E0A800"/>
+            <a:srgbClr val="D99A07"/>
           </a:solidFill>
           <a:ln>
             <a:noFill/>
           </a:ln>
+          <a:effectLst/>
         </p:spPr>
         <p:style>
           <a:lnRef idx="1">
@@ -5797,14 +6306,14 @@
       </p:sp>
       <p:sp>
         <p:nvSpPr>
-          <p:cNvPr id="40" name="TextBox 39"/>
+          <p:cNvPr id="42" name="TextBox 41"/>
           <p:cNvSpPr txBox="1"/>
           <p:nvPr/>
         </p:nvSpPr>
         <p:spPr>
           <a:xfrm>
-            <a:off x="7607808" y="5596128"/>
-            <a:ext cx="4069080" cy="365760"/>
+            <a:off x="7580376" y="5193792"/>
+            <a:ext cx="4069079" cy="365760"/>
           </a:xfrm>
           <a:prstGeom prst="rect">
             <a:avLst/>
@@ -5812,7 +6321,7 @@
           <a:noFill/>
         </p:spPr>
         <p:txBody>
-          <a:bodyPr wrap="square">
+          <a:bodyPr wrap="square" anchor="t" lIns="25400" rIns="25400" tIns="12700" bIns="12700">
             <a:spAutoFit/>
           </a:bodyPr>
           <a:lstStyle/>
@@ -5821,8 +6330,9 @@
             <a:r>
               <a:rPr sz="1300" b="1" i="0">
                 <a:solidFill>
-                  <a:srgbClr val="0D2B55"/>
-                </a:solidFill>
+                  <a:srgbClr val="102A4C"/>
+                </a:solidFill>
+                <a:latin typeface="Calibri"/>
               </a:rPr>
               <a:t>Çıktı</a:t>
             </a:r>
@@ -5831,14 +6341,14 @@
       </p:sp>
       <p:sp>
         <p:nvSpPr>
-          <p:cNvPr id="41" name="TextBox 40"/>
+          <p:cNvPr id="43" name="TextBox 42"/>
           <p:cNvSpPr txBox="1"/>
           <p:nvPr/>
         </p:nvSpPr>
         <p:spPr>
           <a:xfrm>
-            <a:off x="7607808" y="5989320"/>
-            <a:ext cx="4069080" cy="274319"/>
+            <a:off x="7580376" y="5623559"/>
+            <a:ext cx="4050791" cy="301752"/>
           </a:xfrm>
           <a:prstGeom prst="rect">
             <a:avLst/>
@@ -5846,33 +6356,85 @@
           <a:noFill/>
         </p:spPr>
         <p:txBody>
-          <a:bodyPr wrap="square">
+          <a:bodyPr wrap="square" anchor="t" lIns="25400" rIns="25400">
             <a:spAutoFit/>
           </a:bodyPr>
           <a:lstStyle/>
           <a:p>
-            <a:pPr algn="l"/>
-            <a:r>
-              <a:rPr sz="1200" b="0" i="0">
-                <a:solidFill>
-                  <a:srgbClr val="2A2A2A"/>
-                </a:solidFill>
+            <a:pPr algn="l">
+              <a:spcBef>
+                <a:spcPts val="0"/>
+              </a:spcBef>
+              <a:spcAft>
+                <a:spcPts val="400"/>
+              </a:spcAft>
+            </a:pPr>
+            <a:r>
+              <a:rPr sz="1100" b="0" i="0">
+                <a:solidFill>
+                  <a:srgbClr val="242A30"/>
+                </a:solidFill>
+                <a:latin typeface="Calibri"/>
               </a:rPr>
-              <a:t>Sınıf etiketi (YZ / İnsan) + güven skoru + SHAP gerekçesi. Demo videosu teslim paketinde (Uygulama/).</a:t>
-            </a:r>
-          </a:p>
-        </p:txBody>
-      </p:sp>
-      <p:sp>
-        <p:nvSpPr>
-          <p:cNvPr id="42" name="TextBox 41"/>
+              <a:t>Sınıf etiketi (YZ / İnsan), güven skoru ve SHAP gerekçesi. Demo videosu Uygulama/ klasöründe.</a:t>
+            </a:r>
+          </a:p>
+        </p:txBody>
+      </p:sp>
+      <p:sp>
+        <p:nvSpPr>
+          <p:cNvPr id="44" name="Rectangle 43"/>
+          <p:cNvSpPr/>
+          <p:nvPr/>
+        </p:nvSpPr>
+        <p:spPr>
+          <a:xfrm>
+            <a:off x="365760" y="6419088"/>
+            <a:ext cx="11457432" cy="10972"/>
+          </a:xfrm>
+          <a:prstGeom prst="rect">
+            <a:avLst/>
+          </a:prstGeom>
+          <a:solidFill>
+            <a:srgbClr val="D2D9E0"/>
+          </a:solidFill>
+          <a:ln>
+            <a:noFill/>
+          </a:ln>
+          <a:effectLst/>
+        </p:spPr>
+        <p:style>
+          <a:lnRef idx="1">
+            <a:schemeClr val="accent1"/>
+          </a:lnRef>
+          <a:fillRef idx="3">
+            <a:schemeClr val="accent1"/>
+          </a:fillRef>
+          <a:effectRef idx="2">
+            <a:schemeClr val="accent1"/>
+          </a:effectRef>
+          <a:fontRef idx="minor">
+            <a:schemeClr val="lt1"/>
+          </a:fontRef>
+        </p:style>
+        <p:txBody>
+          <a:bodyPr rtlCol="0" anchor="ctr"/>
+          <a:lstStyle/>
+          <a:p>
+            <a:pPr algn="ctr"/>
+          </a:p>
+        </p:txBody>
+      </p:sp>
+      <p:sp>
+        <p:nvSpPr>
+          <p:cNvPr id="45" name="TextBox 44"/>
           <p:cNvSpPr txBox="1"/>
           <p:nvPr/>
         </p:nvSpPr>
         <p:spPr>
           <a:xfrm>
-            <a:off x="365760" y="6510528"/>
-            <a:ext cx="8229600" cy="301752"/>
+            <a:off x="365760" y="6473952"/>
+            <a:ext cx="7772400" cy="292608"/>
           </a:xfrm>
           <a:prstGeom prst="rect">
             <a:avLst/>
@@ -5880,7 +6442,7 @@
           <a:noFill/>
         </p:spPr>
         <p:txBody>
-          <a:bodyPr wrap="square">
+          <a:bodyPr wrap="square" anchor="t" lIns="25400" rIns="25400" tIns="12700" bIns="12700">
             <a:spAutoFit/>
           </a:bodyPr>
           <a:lstStyle/>
@@ -5889,24 +6451,25 @@
             <a:r>
               <a:rPr sz="900" b="0" i="0">
                 <a:solidFill>
-                  <a:srgbClr val="66707A"/>
-                </a:solidFill>
+                  <a:srgbClr val="6A7480"/>
+                </a:solidFill>
+                <a:latin typeface="Calibri"/>
               </a:rPr>
-              <a:t>AURIS  ·  Hasan Arthur Altuntaş  ·  BM498 Mezuniyet Tezi</a:t>
-            </a:r>
-          </a:p>
-        </p:txBody>
-      </p:sp>
-      <p:sp>
-        <p:nvSpPr>
-          <p:cNvPr id="43" name="TextBox 42"/>
+              <a:t>AURIS  ·  Yapay Zekâ Üretimli Müzik Tespiti</a:t>
+            </a:r>
+          </a:p>
+        </p:txBody>
+      </p:sp>
+      <p:sp>
+        <p:nvSpPr>
+          <p:cNvPr id="46" name="TextBox 45"/>
           <p:cNvSpPr txBox="1"/>
           <p:nvPr/>
         </p:nvSpPr>
         <p:spPr>
           <a:xfrm>
-            <a:off x="8595360" y="6510528"/>
-            <a:ext cx="3200400" cy="301752"/>
+            <a:off x="5029200" y="6473952"/>
+            <a:ext cx="6793992" cy="292608"/>
           </a:xfrm>
           <a:prstGeom prst="rect">
             <a:avLst/>
@@ -5914,7 +6477,7 @@
           <a:noFill/>
         </p:spPr>
         <p:txBody>
-          <a:bodyPr wrap="square">
+          <a:bodyPr wrap="square" anchor="t" lIns="25400" rIns="25400" tIns="12700" bIns="12700">
             <a:spAutoFit/>
           </a:bodyPr>
           <a:lstStyle/>
@@ -5923,10 +6486,11 @@
             <a:r>
               <a:rPr sz="900" b="0" i="0">
                 <a:solidFill>
-                  <a:srgbClr val="66707A"/>
-                </a:solidFill>
+                  <a:srgbClr val="6A7480"/>
+                </a:solidFill>
+                <a:latin typeface="Calibri"/>
               </a:rPr>
-              <a:t>Düzce Üniversitesi · 2025-2026</a:t>
+              <a:t>Hasan Arthur Altuntaş  ·  BM498  ·  Düzce Üniversitesi  ·  2025-2026</a:t>
             </a:r>
           </a:p>
         </p:txBody>
@@ -5945,7 +6509,7 @@
     <p:bg>
       <p:bgPr>
         <a:solidFill>
-          <a:srgbClr val="F4F6F8"/>
+          <a:srgbClr val="F6F8FA"/>
         </a:solidFill>
         <a:effectLst/>
       </p:bgPr>
@@ -5972,11 +6536,12 @@
             <a:avLst/>
           </a:prstGeom>
           <a:solidFill>
-            <a:srgbClr val="0D2B55"/>
+            <a:srgbClr val="102A4C"/>
           </a:solidFill>
           <a:ln>
             <a:noFill/>
           </a:ln>
+          <a:effectLst/>
         </p:spPr>
         <p:style>
           <a:lnRef idx="1">
@@ -6009,17 +6574,18 @@
         <p:spPr>
           <a:xfrm>
             <a:off x="0" y="1371600"/>
-            <a:ext cx="12188952" cy="54864"/>
+            <a:ext cx="12188952" cy="50292"/>
           </a:xfrm>
           <a:prstGeom prst="rect">
             <a:avLst/>
           </a:prstGeom>
           <a:solidFill>
-            <a:srgbClr val="E0A800"/>
+            <a:srgbClr val="D99A07"/>
           </a:solidFill>
           <a:ln>
             <a:noFill/>
           </a:ln>
+          <a:effectLst/>
         </p:spPr>
         <p:style>
           <a:lnRef idx="1">
@@ -6045,14 +6611,58 @@
       </p:sp>
       <p:sp>
         <p:nvSpPr>
-          <p:cNvPr id="4" name="TextBox 3"/>
+          <p:cNvPr id="4" name="Rectangle 3"/>
+          <p:cNvSpPr/>
+          <p:nvPr/>
+        </p:nvSpPr>
+        <p:spPr>
+          <a:xfrm>
+            <a:off x="0" y="0"/>
+            <a:ext cx="164592" cy="1371600"/>
+          </a:xfrm>
+          <a:prstGeom prst="rect">
+            <a:avLst/>
+          </a:prstGeom>
+          <a:solidFill>
+            <a:srgbClr val="D99A07"/>
+          </a:solidFill>
+          <a:ln>
+            <a:noFill/>
+          </a:ln>
+          <a:effectLst/>
+        </p:spPr>
+        <p:style>
+          <a:lnRef idx="1">
+            <a:schemeClr val="accent1"/>
+          </a:lnRef>
+          <a:fillRef idx="3">
+            <a:schemeClr val="accent1"/>
+          </a:fillRef>
+          <a:effectRef idx="2">
+            <a:schemeClr val="accent1"/>
+          </a:effectRef>
+          <a:fontRef idx="minor">
+            <a:schemeClr val="lt1"/>
+          </a:fontRef>
+        </p:style>
+        <p:txBody>
+          <a:bodyPr rtlCol="0" anchor="ctr"/>
+          <a:lstStyle/>
+          <a:p>
+            <a:pPr algn="ctr"/>
+          </a:p>
+        </p:txBody>
+      </p:sp>
+      <p:sp>
+        <p:nvSpPr>
+          <p:cNvPr id="5" name="TextBox 4"/>
           <p:cNvSpPr txBox="1"/>
           <p:nvPr/>
         </p:nvSpPr>
         <p:spPr>
           <a:xfrm>
-            <a:off x="365760" y="109728"/>
-            <a:ext cx="11430000" cy="320040"/>
+            <a:off x="411480" y="146304"/>
+            <a:ext cx="10058400" cy="292608"/>
           </a:xfrm>
           <a:prstGeom prst="rect">
             <a:avLst/>
@@ -6060,17 +6670,18 @@
           <a:noFill/>
         </p:spPr>
         <p:txBody>
-          <a:bodyPr wrap="square">
+          <a:bodyPr wrap="square" anchor="t" lIns="25400" rIns="25400" tIns="12700" bIns="12700">
             <a:spAutoFit/>
           </a:bodyPr>
           <a:lstStyle/>
           <a:p>
             <a:pPr algn="l"/>
             <a:r>
-              <a:rPr sz="1100" b="1" i="0">
-                <a:solidFill>
-                  <a:srgbClr val="E0A800"/>
-                </a:solidFill>
+              <a:rPr sz="1150" b="1" i="0">
+                <a:solidFill>
+                  <a:srgbClr val="D99A07"/>
+                </a:solidFill>
+                <a:latin typeface="Calibri"/>
               </a:rPr>
               <a:t>DEĞERLENDIRME</a:t>
             </a:r>
@@ -6079,14 +6690,14 @@
       </p:sp>
       <p:sp>
         <p:nvSpPr>
-          <p:cNvPr id="5" name="TextBox 4"/>
+          <p:cNvPr id="6" name="TextBox 5"/>
           <p:cNvSpPr txBox="1"/>
           <p:nvPr/>
         </p:nvSpPr>
         <p:spPr>
           <a:xfrm>
-            <a:off x="365760" y="402336"/>
-            <a:ext cx="11430000" cy="640080"/>
+            <a:off x="411480" y="420624"/>
+            <a:ext cx="11338560" cy="603504"/>
           </a:xfrm>
           <a:prstGeom prst="rect">
             <a:avLst/>
@@ -6094,17 +6705,18 @@
           <a:noFill/>
         </p:spPr>
         <p:txBody>
-          <a:bodyPr wrap="square">
+          <a:bodyPr wrap="square" anchor="t" lIns="25400" rIns="25400" tIns="12700" bIns="12700">
             <a:spAutoFit/>
           </a:bodyPr>
           <a:lstStyle/>
           <a:p>
             <a:pPr algn="l"/>
             <a:r>
-              <a:rPr sz="2400" b="1" i="0">
+              <a:rPr sz="2300" b="1" i="0">
                 <a:solidFill>
                   <a:srgbClr val="FFFFFF"/>
                 </a:solidFill>
+                <a:latin typeface="Calibri"/>
               </a:rPr>
               <a:t>Akademik Katkı ve Özgün Değer</a:t>
             </a:r>
@@ -6113,14 +6725,14 @@
       </p:sp>
       <p:sp>
         <p:nvSpPr>
-          <p:cNvPr id="6" name="Rectangle 5"/>
+          <p:cNvPr id="7" name="Rectangle 6"/>
           <p:cNvSpPr/>
           <p:nvPr/>
         </p:nvSpPr>
         <p:spPr>
           <a:xfrm>
-            <a:off x="365760" y="1600200"/>
-            <a:ext cx="5577840" cy="1417320"/>
+            <a:off x="365760" y="1627632"/>
+            <a:ext cx="5577840" cy="1389888"/>
           </a:xfrm>
           <a:prstGeom prst="rect">
             <a:avLst/>
@@ -6130,9 +6742,10 @@
           </a:solidFill>
           <a:ln w="12700">
             <a:solidFill>
-              <a:srgbClr val="007A87"/>
+              <a:srgbClr val="0A808C"/>
             </a:solidFill>
           </a:ln>
+          <a:effectLst/>
         </p:spPr>
         <p:style>
           <a:lnRef idx="1">
@@ -6158,14 +6771,58 @@
       </p:sp>
       <p:sp>
         <p:nvSpPr>
-          <p:cNvPr id="7" name="TextBox 6"/>
+          <p:cNvPr id="8" name="Rectangle 7"/>
+          <p:cNvSpPr/>
+          <p:nvPr/>
+        </p:nvSpPr>
+        <p:spPr>
+          <a:xfrm>
+            <a:off x="365760" y="1627632"/>
+            <a:ext cx="566928" cy="1389888"/>
+          </a:xfrm>
+          <a:prstGeom prst="rect">
+            <a:avLst/>
+          </a:prstGeom>
+          <a:solidFill>
+            <a:srgbClr val="102A4C"/>
+          </a:solidFill>
+          <a:ln>
+            <a:noFill/>
+          </a:ln>
+          <a:effectLst/>
+        </p:spPr>
+        <p:style>
+          <a:lnRef idx="1">
+            <a:schemeClr val="accent1"/>
+          </a:lnRef>
+          <a:fillRef idx="3">
+            <a:schemeClr val="accent1"/>
+          </a:fillRef>
+          <a:effectRef idx="2">
+            <a:schemeClr val="accent1"/>
+          </a:effectRef>
+          <a:fontRef idx="minor">
+            <a:schemeClr val="lt1"/>
+          </a:fontRef>
+        </p:style>
+        <p:txBody>
+          <a:bodyPr rtlCol="0" anchor="ctr"/>
+          <a:lstStyle/>
+          <a:p>
+            <a:pPr algn="ctr"/>
+          </a:p>
+        </p:txBody>
+      </p:sp>
+      <p:sp>
+        <p:nvSpPr>
+          <p:cNvPr id="9" name="TextBox 8"/>
           <p:cNvSpPr txBox="1"/>
           <p:nvPr/>
         </p:nvSpPr>
         <p:spPr>
           <a:xfrm>
-            <a:off x="502920" y="1709928"/>
-            <a:ext cx="548640" cy="548640"/>
+            <a:off x="365760" y="1627632"/>
+            <a:ext cx="566928" cy="1389888"/>
           </a:xfrm>
           <a:prstGeom prst="rect">
             <a:avLst/>
@@ -6173,17 +6830,18 @@
           <a:noFill/>
         </p:spPr>
         <p:txBody>
-          <a:bodyPr wrap="square">
+          <a:bodyPr wrap="square" anchor="ctr" lIns="25400" rIns="25400" tIns="12700" bIns="12700">
             <a:spAutoFit/>
           </a:bodyPr>
           <a:lstStyle/>
           <a:p>
-            <a:pPr algn="l"/>
-            <a:r>
-              <a:rPr sz="2200" b="1" i="0">
-                <a:solidFill>
-                  <a:srgbClr val="007A87"/>
-                </a:solidFill>
+            <a:pPr algn="ctr"/>
+            <a:r>
+              <a:rPr sz="2400" b="1" i="0">
+                <a:solidFill>
+                  <a:srgbClr val="D99A07"/>
+                </a:solidFill>
+                <a:latin typeface="Calibri"/>
               </a:rPr>
               <a:t>1</a:t>
             </a:r>
@@ -6192,14 +6850,14 @@
       </p:sp>
       <p:sp>
         <p:nvSpPr>
-          <p:cNvPr id="8" name="TextBox 7"/>
+          <p:cNvPr id="10" name="TextBox 9"/>
           <p:cNvSpPr txBox="1"/>
           <p:nvPr/>
         </p:nvSpPr>
         <p:spPr>
           <a:xfrm>
-            <a:off x="1143000" y="1737360"/>
-            <a:ext cx="4663440" cy="411480"/>
+            <a:off x="1097280" y="1773936"/>
+            <a:ext cx="4754880" cy="457200"/>
           </a:xfrm>
           <a:prstGeom prst="rect">
             <a:avLst/>
@@ -6207,7 +6865,7 @@
           <a:noFill/>
         </p:spPr>
         <p:txBody>
-          <a:bodyPr wrap="square">
+          <a:bodyPr wrap="square" anchor="t" lIns="25400" rIns="25400" tIns="12700" bIns="12700">
             <a:spAutoFit/>
           </a:bodyPr>
           <a:lstStyle/>
@@ -6216,8 +6874,9 @@
             <a:r>
               <a:rPr sz="1300" b="1" i="0">
                 <a:solidFill>
-                  <a:srgbClr val="0D2B55"/>
-                </a:solidFill>
+                  <a:srgbClr val="102A4C"/>
+                </a:solidFill>
+                <a:latin typeface="Calibri"/>
               </a:rPr>
               <a:t>47 boyutlu heterojen öznitelik</a:t>
             </a:r>
@@ -6226,14 +6885,14 @@
       </p:sp>
       <p:sp>
         <p:nvSpPr>
-          <p:cNvPr id="9" name="TextBox 8"/>
+          <p:cNvPr id="11" name="TextBox 10"/>
           <p:cNvSpPr txBox="1"/>
           <p:nvPr/>
         </p:nvSpPr>
         <p:spPr>
           <a:xfrm>
-            <a:off x="1143000" y="2167128"/>
-            <a:ext cx="4663440" cy="777240"/>
+            <a:off x="1097280" y="2231136"/>
+            <a:ext cx="4754880" cy="731520"/>
           </a:xfrm>
           <a:prstGeom prst="rect">
             <a:avLst/>
@@ -6241,7 +6900,7 @@
           <a:noFill/>
         </p:spPr>
         <p:txBody>
-          <a:bodyPr wrap="square">
+          <a:bodyPr wrap="square" anchor="t" lIns="25400" rIns="25400" tIns="12700" bIns="12700">
             <a:spAutoFit/>
           </a:bodyPr>
           <a:lstStyle/>
@@ -6250,24 +6909,25 @@
             <a:r>
               <a:rPr sz="1100" b="0" i="0">
                 <a:solidFill>
-                  <a:srgbClr val="2A2A2A"/>
-                </a:solidFill>
+                  <a:srgbClr val="242A30"/>
+                </a:solidFill>
+                <a:latin typeface="Calibri"/>
               </a:rPr>
-              <a:t>Beş akustik aileyi tek vektörde birleştiren, müzik-spesifik kapsamlı temsil.</a:t>
-            </a:r>
-          </a:p>
-        </p:txBody>
-      </p:sp>
-      <p:sp>
-        <p:nvSpPr>
-          <p:cNvPr id="10" name="Rectangle 9"/>
+              <a:t>Beş akustik aileyi tek vektörde birleştiren müzik-spesifik temsil.</a:t>
+            </a:r>
+          </a:p>
+        </p:txBody>
+      </p:sp>
+      <p:sp>
+        <p:nvSpPr>
+          <p:cNvPr id="12" name="Rectangle 11"/>
           <p:cNvSpPr/>
           <p:nvPr/>
         </p:nvSpPr>
         <p:spPr>
           <a:xfrm>
-            <a:off x="6172200" y="1600200"/>
-            <a:ext cx="5577840" cy="1417320"/>
+            <a:off x="6172200" y="1627632"/>
+            <a:ext cx="5577840" cy="1389888"/>
           </a:xfrm>
           <a:prstGeom prst="rect">
             <a:avLst/>
@@ -6277,9 +6937,10 @@
           </a:solidFill>
           <a:ln w="12700">
             <a:solidFill>
-              <a:srgbClr val="007A87"/>
+              <a:srgbClr val="0A808C"/>
             </a:solidFill>
           </a:ln>
+          <a:effectLst/>
         </p:spPr>
         <p:style>
           <a:lnRef idx="1">
@@ -6305,14 +6966,58 @@
       </p:sp>
       <p:sp>
         <p:nvSpPr>
-          <p:cNvPr id="11" name="TextBox 10"/>
+          <p:cNvPr id="13" name="Rectangle 12"/>
+          <p:cNvSpPr/>
+          <p:nvPr/>
+        </p:nvSpPr>
+        <p:spPr>
+          <a:xfrm>
+            <a:off x="6172200" y="1627632"/>
+            <a:ext cx="566928" cy="1389888"/>
+          </a:xfrm>
+          <a:prstGeom prst="rect">
+            <a:avLst/>
+          </a:prstGeom>
+          <a:solidFill>
+            <a:srgbClr val="102A4C"/>
+          </a:solidFill>
+          <a:ln>
+            <a:noFill/>
+          </a:ln>
+          <a:effectLst/>
+        </p:spPr>
+        <p:style>
+          <a:lnRef idx="1">
+            <a:schemeClr val="accent1"/>
+          </a:lnRef>
+          <a:fillRef idx="3">
+            <a:schemeClr val="accent1"/>
+          </a:fillRef>
+          <a:effectRef idx="2">
+            <a:schemeClr val="accent1"/>
+          </a:effectRef>
+          <a:fontRef idx="minor">
+            <a:schemeClr val="lt1"/>
+          </a:fontRef>
+        </p:style>
+        <p:txBody>
+          <a:bodyPr rtlCol="0" anchor="ctr"/>
+          <a:lstStyle/>
+          <a:p>
+            <a:pPr algn="ctr"/>
+          </a:p>
+        </p:txBody>
+      </p:sp>
+      <p:sp>
+        <p:nvSpPr>
+          <p:cNvPr id="14" name="TextBox 13"/>
           <p:cNvSpPr txBox="1"/>
           <p:nvPr/>
         </p:nvSpPr>
         <p:spPr>
           <a:xfrm>
-            <a:off x="6309360" y="1709928"/>
-            <a:ext cx="548640" cy="548640"/>
+            <a:off x="6172200" y="1627632"/>
+            <a:ext cx="566928" cy="1389888"/>
           </a:xfrm>
           <a:prstGeom prst="rect">
             <a:avLst/>
@@ -6320,17 +7025,18 @@
           <a:noFill/>
         </p:spPr>
         <p:txBody>
-          <a:bodyPr wrap="square">
+          <a:bodyPr wrap="square" anchor="ctr" lIns="25400" rIns="25400" tIns="12700" bIns="12700">
             <a:spAutoFit/>
           </a:bodyPr>
           <a:lstStyle/>
           <a:p>
-            <a:pPr algn="l"/>
-            <a:r>
-              <a:rPr sz="2200" b="1" i="0">
-                <a:solidFill>
-                  <a:srgbClr val="007A87"/>
-                </a:solidFill>
+            <a:pPr algn="ctr"/>
+            <a:r>
+              <a:rPr sz="2400" b="1" i="0">
+                <a:solidFill>
+                  <a:srgbClr val="D99A07"/>
+                </a:solidFill>
+                <a:latin typeface="Calibri"/>
               </a:rPr>
               <a:t>2</a:t>
             </a:r>
@@ -6339,14 +7045,14 @@
       </p:sp>
       <p:sp>
         <p:nvSpPr>
-          <p:cNvPr id="12" name="TextBox 11"/>
+          <p:cNvPr id="15" name="TextBox 14"/>
           <p:cNvSpPr txBox="1"/>
           <p:nvPr/>
         </p:nvSpPr>
         <p:spPr>
           <a:xfrm>
-            <a:off x="6949440" y="1737360"/>
-            <a:ext cx="4663440" cy="411480"/>
+            <a:off x="6903720" y="1773936"/>
+            <a:ext cx="4754880" cy="457200"/>
           </a:xfrm>
           <a:prstGeom prst="rect">
             <a:avLst/>
@@ -6354,7 +7060,7 @@
           <a:noFill/>
         </p:spPr>
         <p:txBody>
-          <a:bodyPr wrap="square">
+          <a:bodyPr wrap="square" anchor="t" lIns="25400" rIns="25400" tIns="12700" bIns="12700">
             <a:spAutoFit/>
           </a:bodyPr>
           <a:lstStyle/>
@@ -6363,8 +7069,9 @@
             <a:r>
               <a:rPr sz="1300" b="1" i="0">
                 <a:solidFill>
-                  <a:srgbClr val="0D2B55"/>
-                </a:solidFill>
+                  <a:srgbClr val="102A4C"/>
+                </a:solidFill>
+                <a:latin typeface="Calibri"/>
               </a:rPr>
               <a:t>11 modelli topluluk öğrenmesi</a:t>
             </a:r>
@@ -6373,14 +7080,14 @@
       </p:sp>
       <p:sp>
         <p:nvSpPr>
-          <p:cNvPr id="13" name="TextBox 12"/>
+          <p:cNvPr id="16" name="TextBox 15"/>
           <p:cNvSpPr txBox="1"/>
           <p:nvPr/>
         </p:nvSpPr>
         <p:spPr>
           <a:xfrm>
-            <a:off x="6949440" y="2167128"/>
-            <a:ext cx="4663440" cy="777240"/>
+            <a:off x="6903720" y="2231136"/>
+            <a:ext cx="4754880" cy="731520"/>
           </a:xfrm>
           <a:prstGeom prst="rect">
             <a:avLst/>
@@ -6388,7 +7095,7 @@
           <a:noFill/>
         </p:spPr>
         <p:txBody>
-          <a:bodyPr wrap="square">
+          <a:bodyPr wrap="square" anchor="t" lIns="25400" rIns="25400" tIns="12700" bIns="12700">
             <a:spAutoFit/>
           </a:bodyPr>
           <a:lstStyle/>
@@ -6397,8 +7104,9 @@
             <a:r>
               <a:rPr sz="1100" b="0" i="0">
                 <a:solidFill>
-                  <a:srgbClr val="2A2A2A"/>
-                </a:solidFill>
+                  <a:srgbClr val="242A30"/>
+                </a:solidFill>
+                <a:latin typeface="Calibri"/>
               </a:rPr>
               <a:t>ML ve DL ailelerinin ortak protokolde sistematik karşılaştırması.</a:t>
             </a:r>
@@ -6407,14 +7115,14 @@
       </p:sp>
       <p:sp>
         <p:nvSpPr>
-          <p:cNvPr id="14" name="Rectangle 13"/>
+          <p:cNvPr id="17" name="Rectangle 16"/>
           <p:cNvSpPr/>
           <p:nvPr/>
         </p:nvSpPr>
         <p:spPr>
           <a:xfrm>
-            <a:off x="365760" y="3172968"/>
-            <a:ext cx="5577840" cy="1417320"/>
+            <a:off x="365760" y="3163824"/>
+            <a:ext cx="5577840" cy="1389888"/>
           </a:xfrm>
           <a:prstGeom prst="rect">
             <a:avLst/>
@@ -6424,9 +7132,10 @@
           </a:solidFill>
           <a:ln w="12700">
             <a:solidFill>
-              <a:srgbClr val="007A87"/>
+              <a:srgbClr val="0A808C"/>
             </a:solidFill>
           </a:ln>
+          <a:effectLst/>
         </p:spPr>
         <p:style>
           <a:lnRef idx="1">
@@ -6452,14 +7161,58 @@
       </p:sp>
       <p:sp>
         <p:nvSpPr>
-          <p:cNvPr id="15" name="TextBox 14"/>
+          <p:cNvPr id="18" name="Rectangle 17"/>
+          <p:cNvSpPr/>
+          <p:nvPr/>
+        </p:nvSpPr>
+        <p:spPr>
+          <a:xfrm>
+            <a:off x="365760" y="3163824"/>
+            <a:ext cx="566928" cy="1389888"/>
+          </a:xfrm>
+          <a:prstGeom prst="rect">
+            <a:avLst/>
+          </a:prstGeom>
+          <a:solidFill>
+            <a:srgbClr val="102A4C"/>
+          </a:solidFill>
+          <a:ln>
+            <a:noFill/>
+          </a:ln>
+          <a:effectLst/>
+        </p:spPr>
+        <p:style>
+          <a:lnRef idx="1">
+            <a:schemeClr val="accent1"/>
+          </a:lnRef>
+          <a:fillRef idx="3">
+            <a:schemeClr val="accent1"/>
+          </a:fillRef>
+          <a:effectRef idx="2">
+            <a:schemeClr val="accent1"/>
+          </a:effectRef>
+          <a:fontRef idx="minor">
+            <a:schemeClr val="lt1"/>
+          </a:fontRef>
+        </p:style>
+        <p:txBody>
+          <a:bodyPr rtlCol="0" anchor="ctr"/>
+          <a:lstStyle/>
+          <a:p>
+            <a:pPr algn="ctr"/>
+          </a:p>
+        </p:txBody>
+      </p:sp>
+      <p:sp>
+        <p:nvSpPr>
+          <p:cNvPr id="19" name="TextBox 18"/>
           <p:cNvSpPr txBox="1"/>
           <p:nvPr/>
         </p:nvSpPr>
         <p:spPr>
           <a:xfrm>
-            <a:off x="502920" y="3282696"/>
-            <a:ext cx="548640" cy="548640"/>
+            <a:off x="365760" y="3163824"/>
+            <a:ext cx="566928" cy="1389888"/>
           </a:xfrm>
           <a:prstGeom prst="rect">
             <a:avLst/>
@@ -6467,17 +7220,18 @@
           <a:noFill/>
         </p:spPr>
         <p:txBody>
-          <a:bodyPr wrap="square">
+          <a:bodyPr wrap="square" anchor="ctr" lIns="25400" rIns="25400" tIns="12700" bIns="12700">
             <a:spAutoFit/>
           </a:bodyPr>
           <a:lstStyle/>
           <a:p>
-            <a:pPr algn="l"/>
-            <a:r>
-              <a:rPr sz="2200" b="1" i="0">
-                <a:solidFill>
-                  <a:srgbClr val="007A87"/>
-                </a:solidFill>
+            <a:pPr algn="ctr"/>
+            <a:r>
+              <a:rPr sz="2400" b="1" i="0">
+                <a:solidFill>
+                  <a:srgbClr val="D99A07"/>
+                </a:solidFill>
+                <a:latin typeface="Calibri"/>
               </a:rPr>
               <a:t>3</a:t>
             </a:r>
@@ -6486,14 +7240,14 @@
       </p:sp>
       <p:sp>
         <p:nvSpPr>
-          <p:cNvPr id="16" name="TextBox 15"/>
+          <p:cNvPr id="20" name="TextBox 19"/>
           <p:cNvSpPr txBox="1"/>
           <p:nvPr/>
         </p:nvSpPr>
         <p:spPr>
           <a:xfrm>
-            <a:off x="1143000" y="3310127"/>
-            <a:ext cx="4663440" cy="411480"/>
+            <a:off x="1097280" y="3310128"/>
+            <a:ext cx="4754880" cy="457200"/>
           </a:xfrm>
           <a:prstGeom prst="rect">
             <a:avLst/>
@@ -6501,7 +7255,7 @@
           <a:noFill/>
         </p:spPr>
         <p:txBody>
-          <a:bodyPr wrap="square">
+          <a:bodyPr wrap="square" anchor="t" lIns="25400" rIns="25400" tIns="12700" bIns="12700">
             <a:spAutoFit/>
           </a:bodyPr>
           <a:lstStyle/>
@@ -6510,8 +7264,9 @@
             <a:r>
               <a:rPr sz="1300" b="1" i="0">
                 <a:solidFill>
-                  <a:srgbClr val="0D2B55"/>
-                </a:solidFill>
+                  <a:srgbClr val="102A4C"/>
+                </a:solidFill>
+                <a:latin typeface="Calibri"/>
               </a:rPr>
               <a:t>TreeSHAP açıklanabilirlik</a:t>
             </a:r>
@@ -6520,14 +7275,14 @@
       </p:sp>
       <p:sp>
         <p:nvSpPr>
-          <p:cNvPr id="17" name="TextBox 16"/>
+          <p:cNvPr id="21" name="TextBox 20"/>
           <p:cNvSpPr txBox="1"/>
           <p:nvPr/>
         </p:nvSpPr>
         <p:spPr>
           <a:xfrm>
-            <a:off x="1143000" y="3739896"/>
-            <a:ext cx="4663440" cy="777240"/>
+            <a:off x="1097280" y="3767328"/>
+            <a:ext cx="4754880" cy="731520"/>
           </a:xfrm>
           <a:prstGeom prst="rect">
             <a:avLst/>
@@ -6535,7 +7290,7 @@
           <a:noFill/>
         </p:spPr>
         <p:txBody>
-          <a:bodyPr wrap="square">
+          <a:bodyPr wrap="square" anchor="t" lIns="25400" rIns="25400" tIns="12700" bIns="12700">
             <a:spAutoFit/>
           </a:bodyPr>
           <a:lstStyle/>
@@ -6544,24 +7299,25 @@
             <a:r>
               <a:rPr sz="1100" b="0" i="0">
                 <a:solidFill>
-                  <a:srgbClr val="2A2A2A"/>
-                </a:solidFill>
+                  <a:srgbClr val="242A30"/>
+                </a:solidFill>
+                <a:latin typeface="Calibri"/>
               </a:rPr>
-              <a:t>Müzik deepfake tespitinde global + yerel öznitelik etkisinin yorumlanması.</a:t>
-            </a:r>
-          </a:p>
-        </p:txBody>
-      </p:sp>
-      <p:sp>
-        <p:nvSpPr>
-          <p:cNvPr id="18" name="Rectangle 17"/>
+              <a:t>Müzik deepfake tespitinde global + yerel öznitelik etkisi.</a:t>
+            </a:r>
+          </a:p>
+        </p:txBody>
+      </p:sp>
+      <p:sp>
+        <p:nvSpPr>
+          <p:cNvPr id="22" name="Rectangle 21"/>
           <p:cNvSpPr/>
           <p:nvPr/>
         </p:nvSpPr>
         <p:spPr>
           <a:xfrm>
-            <a:off x="6172200" y="3172968"/>
-            <a:ext cx="5577840" cy="1417320"/>
+            <a:off x="6172200" y="3163824"/>
+            <a:ext cx="5577840" cy="1389888"/>
           </a:xfrm>
           <a:prstGeom prst="rect">
             <a:avLst/>
@@ -6571,9 +7327,10 @@
           </a:solidFill>
           <a:ln w="12700">
             <a:solidFill>
-              <a:srgbClr val="007A87"/>
+              <a:srgbClr val="0A808C"/>
             </a:solidFill>
           </a:ln>
+          <a:effectLst/>
         </p:spPr>
         <p:style>
           <a:lnRef idx="1">
@@ -6599,14 +7356,58 @@
       </p:sp>
       <p:sp>
         <p:nvSpPr>
-          <p:cNvPr id="19" name="TextBox 18"/>
+          <p:cNvPr id="23" name="Rectangle 22"/>
+          <p:cNvSpPr/>
+          <p:nvPr/>
+        </p:nvSpPr>
+        <p:spPr>
+          <a:xfrm>
+            <a:off x="6172200" y="3163824"/>
+            <a:ext cx="566928" cy="1389888"/>
+          </a:xfrm>
+          <a:prstGeom prst="rect">
+            <a:avLst/>
+          </a:prstGeom>
+          <a:solidFill>
+            <a:srgbClr val="102A4C"/>
+          </a:solidFill>
+          <a:ln>
+            <a:noFill/>
+          </a:ln>
+          <a:effectLst/>
+        </p:spPr>
+        <p:style>
+          <a:lnRef idx="1">
+            <a:schemeClr val="accent1"/>
+          </a:lnRef>
+          <a:fillRef idx="3">
+            <a:schemeClr val="accent1"/>
+          </a:fillRef>
+          <a:effectRef idx="2">
+            <a:schemeClr val="accent1"/>
+          </a:effectRef>
+          <a:fontRef idx="minor">
+            <a:schemeClr val="lt1"/>
+          </a:fontRef>
+        </p:style>
+        <p:txBody>
+          <a:bodyPr rtlCol="0" anchor="ctr"/>
+          <a:lstStyle/>
+          <a:p>
+            <a:pPr algn="ctr"/>
+          </a:p>
+        </p:txBody>
+      </p:sp>
+      <p:sp>
+        <p:nvSpPr>
+          <p:cNvPr id="24" name="TextBox 23"/>
           <p:cNvSpPr txBox="1"/>
           <p:nvPr/>
         </p:nvSpPr>
         <p:spPr>
           <a:xfrm>
-            <a:off x="6309360" y="3282696"/>
-            <a:ext cx="548640" cy="548640"/>
+            <a:off x="6172200" y="3163824"/>
+            <a:ext cx="566928" cy="1389888"/>
           </a:xfrm>
           <a:prstGeom prst="rect">
             <a:avLst/>
@@ -6614,17 +7415,18 @@
           <a:noFill/>
         </p:spPr>
         <p:txBody>
-          <a:bodyPr wrap="square">
+          <a:bodyPr wrap="square" anchor="ctr" lIns="25400" rIns="25400" tIns="12700" bIns="12700">
             <a:spAutoFit/>
           </a:bodyPr>
           <a:lstStyle/>
           <a:p>
-            <a:pPr algn="l"/>
-            <a:r>
-              <a:rPr sz="2200" b="1" i="0">
-                <a:solidFill>
-                  <a:srgbClr val="007A87"/>
-                </a:solidFill>
+            <a:pPr algn="ctr"/>
+            <a:r>
+              <a:rPr sz="2400" b="1" i="0">
+                <a:solidFill>
+                  <a:srgbClr val="D99A07"/>
+                </a:solidFill>
+                <a:latin typeface="Calibri"/>
               </a:rPr>
               <a:t>4</a:t>
             </a:r>
@@ -6633,14 +7435,14 @@
       </p:sp>
       <p:sp>
         <p:nvSpPr>
-          <p:cNvPr id="20" name="TextBox 19"/>
+          <p:cNvPr id="25" name="TextBox 24"/>
           <p:cNvSpPr txBox="1"/>
           <p:nvPr/>
         </p:nvSpPr>
         <p:spPr>
           <a:xfrm>
-            <a:off x="6949440" y="3310127"/>
-            <a:ext cx="4663440" cy="411480"/>
+            <a:off x="6903720" y="3310128"/>
+            <a:ext cx="4754880" cy="457200"/>
           </a:xfrm>
           <a:prstGeom prst="rect">
             <a:avLst/>
@@ -6648,7 +7450,7 @@
           <a:noFill/>
         </p:spPr>
         <p:txBody>
-          <a:bodyPr wrap="square">
+          <a:bodyPr wrap="square" anchor="t" lIns="25400" rIns="25400" tIns="12700" bIns="12700">
             <a:spAutoFit/>
           </a:bodyPr>
           <a:lstStyle/>
@@ -6657,8 +7459,9 @@
             <a:r>
               <a:rPr sz="1300" b="1" i="0">
                 <a:solidFill>
-                  <a:srgbClr val="0D2B55"/>
-                </a:solidFill>
+                  <a:srgbClr val="102A4C"/>
+                </a:solidFill>
+                <a:latin typeface="Calibri"/>
               </a:rPr>
               <a:t>Youden J eşik optimizasyonu</a:t>
             </a:r>
@@ -6667,14 +7470,14 @@
       </p:sp>
       <p:sp>
         <p:nvSpPr>
-          <p:cNvPr id="21" name="TextBox 20"/>
+          <p:cNvPr id="26" name="TextBox 25"/>
           <p:cNvSpPr txBox="1"/>
           <p:nvPr/>
         </p:nvSpPr>
         <p:spPr>
           <a:xfrm>
-            <a:off x="6949440" y="3739896"/>
-            <a:ext cx="4663440" cy="777240"/>
+            <a:off x="6903720" y="3767328"/>
+            <a:ext cx="4754880" cy="731520"/>
           </a:xfrm>
           <a:prstGeom prst="rect">
             <a:avLst/>
@@ -6682,7 +7485,7 @@
           <a:noFill/>
         </p:spPr>
         <p:txBody>
-          <a:bodyPr wrap="square">
+          <a:bodyPr wrap="square" anchor="t" lIns="25400" rIns="25400" tIns="12700" bIns="12700">
             <a:spAutoFit/>
           </a:bodyPr>
           <a:lstStyle/>
@@ -6691,24 +7494,25 @@
             <a:r>
               <a:rPr sz="1100" b="0" i="0">
                 <a:solidFill>
-                  <a:srgbClr val="2A2A2A"/>
-                </a:solidFill>
+                  <a:srgbClr val="242A30"/>
+                </a:solidFill>
+                <a:latin typeface="Calibri"/>
               </a:rPr>
-              <a:t>Dengesiz sınıf için θ*=0,4316; varsayılan 0,5 eşiğinden üstün denge.</a:t>
-            </a:r>
-          </a:p>
-        </p:txBody>
-      </p:sp>
-      <p:sp>
-        <p:nvSpPr>
-          <p:cNvPr id="22" name="Rectangle 21"/>
+              <a:t>Dengesiz sınıf için θ*=0,4316; varsayılan 0,5'ten üstün denge.</a:t>
+            </a:r>
+          </a:p>
+        </p:txBody>
+      </p:sp>
+      <p:sp>
+        <p:nvSpPr>
+          <p:cNvPr id="27" name="Rectangle 26"/>
           <p:cNvSpPr/>
           <p:nvPr/>
         </p:nvSpPr>
         <p:spPr>
           <a:xfrm>
-            <a:off x="365760" y="4745736"/>
-            <a:ext cx="5577840" cy="1417320"/>
+            <a:off x="365760" y="4700016"/>
+            <a:ext cx="5577840" cy="1389888"/>
           </a:xfrm>
           <a:prstGeom prst="rect">
             <a:avLst/>
@@ -6718,9 +7522,10 @@
           </a:solidFill>
           <a:ln w="12700">
             <a:solidFill>
-              <a:srgbClr val="007A87"/>
+              <a:srgbClr val="0A808C"/>
             </a:solidFill>
           </a:ln>
+          <a:effectLst/>
         </p:spPr>
         <p:style>
           <a:lnRef idx="1">
@@ -6746,14 +7551,58 @@
       </p:sp>
       <p:sp>
         <p:nvSpPr>
-          <p:cNvPr id="23" name="TextBox 22"/>
+          <p:cNvPr id="28" name="Rectangle 27"/>
+          <p:cNvSpPr/>
+          <p:nvPr/>
+        </p:nvSpPr>
+        <p:spPr>
+          <a:xfrm>
+            <a:off x="365760" y="4700016"/>
+            <a:ext cx="566928" cy="1389888"/>
+          </a:xfrm>
+          <a:prstGeom prst="rect">
+            <a:avLst/>
+          </a:prstGeom>
+          <a:solidFill>
+            <a:srgbClr val="102A4C"/>
+          </a:solidFill>
+          <a:ln>
+            <a:noFill/>
+          </a:ln>
+          <a:effectLst/>
+        </p:spPr>
+        <p:style>
+          <a:lnRef idx="1">
+            <a:schemeClr val="accent1"/>
+          </a:lnRef>
+          <a:fillRef idx="3">
+            <a:schemeClr val="accent1"/>
+          </a:fillRef>
+          <a:effectRef idx="2">
+            <a:schemeClr val="accent1"/>
+          </a:effectRef>
+          <a:fontRef idx="minor">
+            <a:schemeClr val="lt1"/>
+          </a:fontRef>
+        </p:style>
+        <p:txBody>
+          <a:bodyPr rtlCol="0" anchor="ctr"/>
+          <a:lstStyle/>
+          <a:p>
+            <a:pPr algn="ctr"/>
+          </a:p>
+        </p:txBody>
+      </p:sp>
+      <p:sp>
+        <p:nvSpPr>
+          <p:cNvPr id="29" name="TextBox 28"/>
           <p:cNvSpPr txBox="1"/>
           <p:nvPr/>
         </p:nvSpPr>
         <p:spPr>
           <a:xfrm>
-            <a:off x="502920" y="4855464"/>
-            <a:ext cx="548640" cy="548640"/>
+            <a:off x="365760" y="4700016"/>
+            <a:ext cx="566928" cy="1389888"/>
           </a:xfrm>
           <a:prstGeom prst="rect">
             <a:avLst/>
@@ -6761,17 +7610,18 @@
           <a:noFill/>
         </p:spPr>
         <p:txBody>
-          <a:bodyPr wrap="square">
+          <a:bodyPr wrap="square" anchor="ctr" lIns="25400" rIns="25400" tIns="12700" bIns="12700">
             <a:spAutoFit/>
           </a:bodyPr>
           <a:lstStyle/>
           <a:p>
-            <a:pPr algn="l"/>
-            <a:r>
-              <a:rPr sz="2200" b="1" i="0">
-                <a:solidFill>
-                  <a:srgbClr val="007A87"/>
-                </a:solidFill>
+            <a:pPr algn="ctr"/>
+            <a:r>
+              <a:rPr sz="2400" b="1" i="0">
+                <a:solidFill>
+                  <a:srgbClr val="D99A07"/>
+                </a:solidFill>
+                <a:latin typeface="Calibri"/>
               </a:rPr>
               <a:t>5</a:t>
             </a:r>
@@ -6780,14 +7630,14 @@
       </p:sp>
       <p:sp>
         <p:nvSpPr>
-          <p:cNvPr id="24" name="TextBox 23"/>
+          <p:cNvPr id="30" name="TextBox 29"/>
           <p:cNvSpPr txBox="1"/>
           <p:nvPr/>
         </p:nvSpPr>
         <p:spPr>
           <a:xfrm>
-            <a:off x="1143000" y="4882896"/>
-            <a:ext cx="4663440" cy="411480"/>
+            <a:off x="1097280" y="4846320"/>
+            <a:ext cx="4754880" cy="457200"/>
           </a:xfrm>
           <a:prstGeom prst="rect">
             <a:avLst/>
@@ -6795,7 +7645,7 @@
           <a:noFill/>
         </p:spPr>
         <p:txBody>
-          <a:bodyPr wrap="square">
+          <a:bodyPr wrap="square" anchor="t" lIns="25400" rIns="25400" tIns="12700" bIns="12700">
             <a:spAutoFit/>
           </a:bodyPr>
           <a:lstStyle/>
@@ -6804,8 +7654,9 @@
             <a:r>
               <a:rPr sz="1300" b="1" i="0">
                 <a:solidFill>
-                  <a:srgbClr val="0D2B55"/>
-                </a:solidFill>
+                  <a:srgbClr val="102A4C"/>
+                </a:solidFill>
+                <a:latin typeface="Calibri"/>
               </a:rPr>
               <a:t>Hafif ve rekabetçi</a:t>
             </a:r>
@@ -6814,14 +7665,14 @@
       </p:sp>
       <p:sp>
         <p:nvSpPr>
-          <p:cNvPr id="25" name="TextBox 24"/>
+          <p:cNvPr id="31" name="TextBox 30"/>
           <p:cNvSpPr txBox="1"/>
           <p:nvPr/>
         </p:nvSpPr>
         <p:spPr>
           <a:xfrm>
-            <a:off x="1143000" y="5312664"/>
-            <a:ext cx="4663440" cy="777240"/>
+            <a:off x="1097280" y="5303520"/>
+            <a:ext cx="4754880" cy="731520"/>
           </a:xfrm>
           <a:prstGeom prst="rect">
             <a:avLst/>
@@ -6829,7 +7680,7 @@
           <a:noFill/>
         </p:spPr>
         <p:txBody>
-          <a:bodyPr wrap="square">
+          <a:bodyPr wrap="square" anchor="t" lIns="25400" rIns="25400" tIns="12700" bIns="12700">
             <a:spAutoFit/>
           </a:bodyPr>
           <a:lstStyle/>
@@ -6838,24 +7689,25 @@
             <a:r>
               <a:rPr sz="1100" b="0" i="0">
                 <a:solidFill>
-                  <a:srgbClr val="2A2A2A"/>
-                </a:solidFill>
+                  <a:srgbClr val="242A30"/>
+                </a:solidFill>
+                <a:latin typeface="Calibri"/>
               </a:rPr>
-              <a:t>Derin öğrenme altyapısı olmadan SONICS'e yakın ROC-AUC (0,9548).</a:t>
-            </a:r>
-          </a:p>
-        </p:txBody>
-      </p:sp>
-      <p:sp>
-        <p:nvSpPr>
-          <p:cNvPr id="26" name="Rectangle 25"/>
+              <a:t>Derin öğrenme altyapısı olmadan SONICS'e yakın ROC-AUC.</a:t>
+            </a:r>
+          </a:p>
+        </p:txBody>
+      </p:sp>
+      <p:sp>
+        <p:nvSpPr>
+          <p:cNvPr id="32" name="Rectangle 31"/>
           <p:cNvSpPr/>
           <p:nvPr/>
         </p:nvSpPr>
         <p:spPr>
           <a:xfrm>
-            <a:off x="6172200" y="4745736"/>
-            <a:ext cx="5577840" cy="1417320"/>
+            <a:off x="6172200" y="4700016"/>
+            <a:ext cx="5577840" cy="1389888"/>
           </a:xfrm>
           <a:prstGeom prst="rect">
             <a:avLst/>
@@ -6865,9 +7717,10 @@
           </a:solidFill>
           <a:ln w="12700">
             <a:solidFill>
-              <a:srgbClr val="007A87"/>
+              <a:srgbClr val="0A808C"/>
             </a:solidFill>
           </a:ln>
+          <a:effectLst/>
         </p:spPr>
         <p:style>
           <a:lnRef idx="1">
@@ -6893,14 +7746,58 @@
       </p:sp>
       <p:sp>
         <p:nvSpPr>
-          <p:cNvPr id="27" name="TextBox 26"/>
+          <p:cNvPr id="33" name="Rectangle 32"/>
+          <p:cNvSpPr/>
+          <p:nvPr/>
+        </p:nvSpPr>
+        <p:spPr>
+          <a:xfrm>
+            <a:off x="6172200" y="4700016"/>
+            <a:ext cx="566928" cy="1389888"/>
+          </a:xfrm>
+          <a:prstGeom prst="rect">
+            <a:avLst/>
+          </a:prstGeom>
+          <a:solidFill>
+            <a:srgbClr val="102A4C"/>
+          </a:solidFill>
+          <a:ln>
+            <a:noFill/>
+          </a:ln>
+          <a:effectLst/>
+        </p:spPr>
+        <p:style>
+          <a:lnRef idx="1">
+            <a:schemeClr val="accent1"/>
+          </a:lnRef>
+          <a:fillRef idx="3">
+            <a:schemeClr val="accent1"/>
+          </a:fillRef>
+          <a:effectRef idx="2">
+            <a:schemeClr val="accent1"/>
+          </a:effectRef>
+          <a:fontRef idx="minor">
+            <a:schemeClr val="lt1"/>
+          </a:fontRef>
+        </p:style>
+        <p:txBody>
+          <a:bodyPr rtlCol="0" anchor="ctr"/>
+          <a:lstStyle/>
+          <a:p>
+            <a:pPr algn="ctr"/>
+          </a:p>
+        </p:txBody>
+      </p:sp>
+      <p:sp>
+        <p:nvSpPr>
+          <p:cNvPr id="34" name="TextBox 33"/>
           <p:cNvSpPr txBox="1"/>
           <p:nvPr/>
         </p:nvSpPr>
         <p:spPr>
           <a:xfrm>
-            <a:off x="6309360" y="4855464"/>
-            <a:ext cx="548640" cy="548640"/>
+            <a:off x="6172200" y="4700016"/>
+            <a:ext cx="566928" cy="1389888"/>
           </a:xfrm>
           <a:prstGeom prst="rect">
             <a:avLst/>
@@ -6908,17 +7805,18 @@
           <a:noFill/>
         </p:spPr>
         <p:txBody>
-          <a:bodyPr wrap="square">
+          <a:bodyPr wrap="square" anchor="ctr" lIns="25400" rIns="25400" tIns="12700" bIns="12700">
             <a:spAutoFit/>
           </a:bodyPr>
           <a:lstStyle/>
           <a:p>
-            <a:pPr algn="l"/>
-            <a:r>
-              <a:rPr sz="2200" b="1" i="0">
-                <a:solidFill>
-                  <a:srgbClr val="007A87"/>
-                </a:solidFill>
+            <a:pPr algn="ctr"/>
+            <a:r>
+              <a:rPr sz="2400" b="1" i="0">
+                <a:solidFill>
+                  <a:srgbClr val="D99A07"/>
+                </a:solidFill>
+                <a:latin typeface="Calibri"/>
               </a:rPr>
               <a:t>6</a:t>
             </a:r>
@@ -6927,14 +7825,14 @@
       </p:sp>
       <p:sp>
         <p:nvSpPr>
-          <p:cNvPr id="28" name="TextBox 27"/>
+          <p:cNvPr id="35" name="TextBox 34"/>
           <p:cNvSpPr txBox="1"/>
           <p:nvPr/>
         </p:nvSpPr>
         <p:spPr>
           <a:xfrm>
-            <a:off x="6949440" y="4882896"/>
-            <a:ext cx="4663440" cy="411480"/>
+            <a:off x="6903720" y="4846320"/>
+            <a:ext cx="4754880" cy="457200"/>
           </a:xfrm>
           <a:prstGeom prst="rect">
             <a:avLst/>
@@ -6942,7 +7840,7 @@
           <a:noFill/>
         </p:spPr>
         <p:txBody>
-          <a:bodyPr wrap="square">
+          <a:bodyPr wrap="square" anchor="t" lIns="25400" rIns="25400" tIns="12700" bIns="12700">
             <a:spAutoFit/>
           </a:bodyPr>
           <a:lstStyle/>
@@ -6951,8 +7849,9 @@
             <a:r>
               <a:rPr sz="1300" b="1" i="0">
                 <a:solidFill>
-                  <a:srgbClr val="0D2B55"/>
-                </a:solidFill>
+                  <a:srgbClr val="102A4C"/>
+                </a:solidFill>
+                <a:latin typeface="Calibri"/>
               </a:rPr>
               <a:t>GUJSA akademik yayını</a:t>
             </a:r>
@@ -6961,14 +7860,14 @@
       </p:sp>
       <p:sp>
         <p:nvSpPr>
-          <p:cNvPr id="29" name="TextBox 28"/>
+          <p:cNvPr id="36" name="TextBox 35"/>
           <p:cNvSpPr txBox="1"/>
           <p:nvPr/>
         </p:nvSpPr>
         <p:spPr>
           <a:xfrm>
-            <a:off x="6949440" y="5312664"/>
-            <a:ext cx="4663440" cy="777240"/>
+            <a:off x="6903720" y="5303520"/>
+            <a:ext cx="4754880" cy="731520"/>
           </a:xfrm>
           <a:prstGeom prst="rect">
             <a:avLst/>
@@ -6976,7 +7875,7 @@
           <a:noFill/>
         </p:spPr>
         <p:txBody>
-          <a:bodyPr wrap="square">
+          <a:bodyPr wrap="square" anchor="t" lIns="25400" rIns="25400" tIns="12700" bIns="12700">
             <a:spAutoFit/>
           </a:bodyPr>
           <a:lstStyle/>
@@ -6985,24 +7884,69 @@
             <a:r>
               <a:rPr sz="1100" b="0" i="0">
                 <a:solidFill>
-                  <a:srgbClr val="2A2A2A"/>
-                </a:solidFill>
+                  <a:srgbClr val="242A30"/>
+                </a:solidFill>
+                <a:latin typeface="Calibri"/>
               </a:rPr>
-              <a:t>39 güncel referansla ulusal hakemli dergi formatında hazırlandı.</a:t>
-            </a:r>
-          </a:p>
-        </p:txBody>
-      </p:sp>
-      <p:sp>
-        <p:nvSpPr>
-          <p:cNvPr id="30" name="TextBox 29"/>
+              <a:t>39 güncel referansla ulusal hakemli dergi formatında.</a:t>
+            </a:r>
+          </a:p>
+        </p:txBody>
+      </p:sp>
+      <p:sp>
+        <p:nvSpPr>
+          <p:cNvPr id="37" name="Rectangle 36"/>
+          <p:cNvSpPr/>
+          <p:nvPr/>
+        </p:nvSpPr>
+        <p:spPr>
+          <a:xfrm>
+            <a:off x="365760" y="6419088"/>
+            <a:ext cx="11457432" cy="10972"/>
+          </a:xfrm>
+          <a:prstGeom prst="rect">
+            <a:avLst/>
+          </a:prstGeom>
+          <a:solidFill>
+            <a:srgbClr val="D2D9E0"/>
+          </a:solidFill>
+          <a:ln>
+            <a:noFill/>
+          </a:ln>
+          <a:effectLst/>
+        </p:spPr>
+        <p:style>
+          <a:lnRef idx="1">
+            <a:schemeClr val="accent1"/>
+          </a:lnRef>
+          <a:fillRef idx="3">
+            <a:schemeClr val="accent1"/>
+          </a:fillRef>
+          <a:effectRef idx="2">
+            <a:schemeClr val="accent1"/>
+          </a:effectRef>
+          <a:fontRef idx="minor">
+            <a:schemeClr val="lt1"/>
+          </a:fontRef>
+        </p:style>
+        <p:txBody>
+          <a:bodyPr rtlCol="0" anchor="ctr"/>
+          <a:lstStyle/>
+          <a:p>
+            <a:pPr algn="ctr"/>
+          </a:p>
+        </p:txBody>
+      </p:sp>
+      <p:sp>
+        <p:nvSpPr>
+          <p:cNvPr id="38" name="TextBox 37"/>
           <p:cNvSpPr txBox="1"/>
           <p:nvPr/>
         </p:nvSpPr>
         <p:spPr>
           <a:xfrm>
-            <a:off x="365760" y="6510528"/>
-            <a:ext cx="8229600" cy="301752"/>
+            <a:off x="365760" y="6473952"/>
+            <a:ext cx="7772400" cy="292608"/>
           </a:xfrm>
           <a:prstGeom prst="rect">
             <a:avLst/>
@@ -7010,7 +7954,7 @@
           <a:noFill/>
         </p:spPr>
         <p:txBody>
-          <a:bodyPr wrap="square">
+          <a:bodyPr wrap="square" anchor="t" lIns="25400" rIns="25400" tIns="12700" bIns="12700">
             <a:spAutoFit/>
           </a:bodyPr>
           <a:lstStyle/>
@@ -7019,24 +7963,25 @@
             <a:r>
               <a:rPr sz="900" b="0" i="0">
                 <a:solidFill>
-                  <a:srgbClr val="66707A"/>
-                </a:solidFill>
+                  <a:srgbClr val="6A7480"/>
+                </a:solidFill>
+                <a:latin typeface="Calibri"/>
               </a:rPr>
-              <a:t>AURIS  ·  Hasan Arthur Altuntaş  ·  BM498 Mezuniyet Tezi</a:t>
-            </a:r>
-          </a:p>
-        </p:txBody>
-      </p:sp>
-      <p:sp>
-        <p:nvSpPr>
-          <p:cNvPr id="31" name="TextBox 30"/>
+              <a:t>AURIS  ·  Yapay Zekâ Üretimli Müzik Tespiti</a:t>
+            </a:r>
+          </a:p>
+        </p:txBody>
+      </p:sp>
+      <p:sp>
+        <p:nvSpPr>
+          <p:cNvPr id="39" name="TextBox 38"/>
           <p:cNvSpPr txBox="1"/>
           <p:nvPr/>
         </p:nvSpPr>
         <p:spPr>
           <a:xfrm>
-            <a:off x="8595360" y="6510528"/>
-            <a:ext cx="3200400" cy="301752"/>
+            <a:off x="5029200" y="6473952"/>
+            <a:ext cx="6793992" cy="292608"/>
           </a:xfrm>
           <a:prstGeom prst="rect">
             <a:avLst/>
@@ -7044,7 +7989,7 @@
           <a:noFill/>
         </p:spPr>
         <p:txBody>
-          <a:bodyPr wrap="square">
+          <a:bodyPr wrap="square" anchor="t" lIns="25400" rIns="25400" tIns="12700" bIns="12700">
             <a:spAutoFit/>
           </a:bodyPr>
           <a:lstStyle/>
@@ -7053,10 +7998,11 @@
             <a:r>
               <a:rPr sz="900" b="0" i="0">
                 <a:solidFill>
-                  <a:srgbClr val="66707A"/>
-                </a:solidFill>
+                  <a:srgbClr val="6A7480"/>
+                </a:solidFill>
+                <a:latin typeface="Calibri"/>
               </a:rPr>
-              <a:t>Düzce Üniversitesi · 2025-2026</a:t>
+              <a:t>Hasan Arthur Altuntaş  ·  BM498  ·  Düzce Üniversitesi  ·  2025-2026</a:t>
             </a:r>
           </a:p>
         </p:txBody>
@@ -7075,7 +8021,7 @@
     <p:bg>
       <p:bgPr>
         <a:solidFill>
-          <a:srgbClr val="F4F6F8"/>
+          <a:srgbClr val="F6F8FA"/>
         </a:solidFill>
         <a:effectLst/>
       </p:bgPr>
@@ -7102,11 +8048,12 @@
             <a:avLst/>
           </a:prstGeom>
           <a:solidFill>
-            <a:srgbClr val="0D2B55"/>
+            <a:srgbClr val="102A4C"/>
           </a:solidFill>
           <a:ln>
             <a:noFill/>
           </a:ln>
+          <a:effectLst/>
         </p:spPr>
         <p:style>
           <a:lnRef idx="1">
@@ -7138,8 +8085,8 @@
         </p:nvSpPr>
         <p:spPr>
           <a:xfrm>
-            <a:off x="320040" y="64008"/>
-            <a:ext cx="11521440" cy="347472"/>
+            <a:off x="365760" y="64008"/>
+            <a:ext cx="11430000" cy="347472"/>
           </a:xfrm>
           <a:prstGeom prst="rect">
             <a:avLst/>
@@ -7147,7 +8094,7 @@
           <a:noFill/>
         </p:spPr>
         <p:txBody>
-          <a:bodyPr wrap="square">
+          <a:bodyPr wrap="square" anchor="ctr" lIns="25400" rIns="25400" tIns="12700" bIns="12700">
             <a:spAutoFit/>
           </a:bodyPr>
           <a:lstStyle/>
@@ -7158,8 +8105,9 @@
                 <a:solidFill>
                   <a:srgbClr val="FFFFFF"/>
                 </a:solidFill>
+                <a:latin typeface="Calibri"/>
               </a:rPr>
-              <a:t>BM498 — 04: Sonuç ve Demo Sunumu</a:t>
+              <a:t>BM498 Mezuniyet Tezi — 04: Sonuç ve Demo Sunumu</a:t>
             </a:r>
           </a:p>
         </p:txBody>
@@ -7172,8 +8120,8 @@
         </p:nvSpPr>
         <p:spPr>
           <a:xfrm>
-            <a:off x="2286000" y="960120"/>
-            <a:ext cx="7589520" cy="5440680"/>
+            <a:off x="2194560" y="960120"/>
+            <a:ext cx="7772400" cy="5440680"/>
           </a:xfrm>
           <a:prstGeom prst="rect">
             <a:avLst/>
@@ -7183,9 +8131,10 @@
           </a:solidFill>
           <a:ln w="19050">
             <a:solidFill>
-              <a:srgbClr val="007A87"/>
+              <a:srgbClr val="0A808C"/>
             </a:solidFill>
           </a:ln>
+          <a:effectLst/>
         </p:spPr>
         <p:style>
           <a:lnRef idx="1">
@@ -7211,57 +8160,25 @@
       </p:sp>
       <p:sp>
         <p:nvSpPr>
-          <p:cNvPr id="5" name="TextBox 4"/>
-          <p:cNvSpPr txBox="1"/>
-          <p:nvPr/>
-        </p:nvSpPr>
-        <p:spPr>
-          <a:xfrm>
-            <a:off x="2377440" y="1078992"/>
-            <a:ext cx="7406640" cy="502920"/>
-          </a:xfrm>
-          <a:prstGeom prst="rect">
-            <a:avLst/>
-          </a:prstGeom>
-          <a:noFill/>
-        </p:spPr>
-        <p:txBody>
-          <a:bodyPr wrap="square">
-            <a:spAutoFit/>
-          </a:bodyPr>
-          <a:lstStyle/>
-          <a:p>
-            <a:pPr algn="ctr"/>
-            <a:r>
-              <a:rPr sz="1700" b="1" i="0">
-                <a:solidFill>
-                  <a:srgbClr val="0D2B55"/>
-                </a:solidFill>
-              </a:rPr>
-              <a:t>ÖĞRENCİ İMZA SAYFASI</a:t>
-            </a:r>
-          </a:p>
-        </p:txBody>
-      </p:sp>
-      <p:sp>
-        <p:nvSpPr>
-          <p:cNvPr id="6" name="Rectangle 5"/>
+          <p:cNvPr id="5" name="Rectangle 4"/>
           <p:cNvSpPr/>
           <p:nvPr/>
         </p:nvSpPr>
         <p:spPr>
           <a:xfrm>
-            <a:off x="2377440" y="1627632"/>
-            <a:ext cx="7406640" cy="0"/>
-          </a:xfrm>
-          <a:prstGeom prst="rect">
-            <a:avLst/>
-          </a:prstGeom>
-          <a:ln w="19050">
-            <a:solidFill>
-              <a:srgbClr val="007A87"/>
-            </a:solidFill>
+            <a:off x="2194560" y="960120"/>
+            <a:ext cx="7772400" cy="640080"/>
+          </a:xfrm>
+          <a:prstGeom prst="rect">
+            <a:avLst/>
+          </a:prstGeom>
+          <a:solidFill>
+            <a:srgbClr val="102A4C"/>
+          </a:solidFill>
+          <a:ln>
+            <a:noFill/>
           </a:ln>
+          <a:effectLst/>
         </p:spPr>
         <p:style>
           <a:lnRef idx="1">
@@ -7287,13 +8204,48 @@
       </p:sp>
       <p:sp>
         <p:nvSpPr>
+          <p:cNvPr id="6" name="TextBox 5"/>
+          <p:cNvSpPr txBox="1"/>
+          <p:nvPr/>
+        </p:nvSpPr>
+        <p:spPr>
+          <a:xfrm>
+            <a:off x="2194560" y="960120"/>
+            <a:ext cx="7772400" cy="640080"/>
+          </a:xfrm>
+          <a:prstGeom prst="rect">
+            <a:avLst/>
+          </a:prstGeom>
+          <a:noFill/>
+        </p:spPr>
+        <p:txBody>
+          <a:bodyPr wrap="square" anchor="ctr" lIns="25400" rIns="25400" tIns="12700" bIns="12700">
+            <a:spAutoFit/>
+          </a:bodyPr>
+          <a:lstStyle/>
+          <a:p>
+            <a:pPr algn="ctr"/>
+            <a:r>
+              <a:rPr sz="1700" b="1" i="0">
+                <a:solidFill>
+                  <a:srgbClr val="FFFFFF"/>
+                </a:solidFill>
+                <a:latin typeface="Calibri"/>
+              </a:rPr>
+              <a:t>ÖĞRENCİ İMZA SAYFASI</a:t>
+            </a:r>
+          </a:p>
+        </p:txBody>
+      </p:sp>
+      <p:sp>
+        <p:nvSpPr>
           <p:cNvPr id="7" name="TextBox 6"/>
           <p:cNvSpPr txBox="1"/>
           <p:nvPr/>
         </p:nvSpPr>
         <p:spPr>
           <a:xfrm>
-            <a:off x="2468880" y="1810512"/>
+            <a:off x="2514600" y="1920240"/>
             <a:ext cx="2834640" cy="320040"/>
           </a:xfrm>
           <a:prstGeom prst="rect">
@@ -7302,7 +8254,7 @@
           <a:noFill/>
         </p:spPr>
         <p:txBody>
-          <a:bodyPr wrap="square">
+          <a:bodyPr wrap="square" anchor="t" lIns="25400" rIns="25400" tIns="12700" bIns="12700">
             <a:spAutoFit/>
           </a:bodyPr>
           <a:lstStyle/>
@@ -7311,8 +8263,9 @@
             <a:r>
               <a:rPr sz="1200" b="1" i="0">
                 <a:solidFill>
-                  <a:srgbClr val="0D2B55"/>
-                </a:solidFill>
+                  <a:srgbClr val="102A4C"/>
+                </a:solidFill>
+                <a:latin typeface="Calibri"/>
               </a:rPr>
               <a:t>Öğrenci Adı Soyadı:</a:t>
             </a:r>
@@ -7327,8 +8280,8 @@
         </p:nvSpPr>
         <p:spPr>
           <a:xfrm>
-            <a:off x="5394960" y="1810512"/>
-            <a:ext cx="4297680" cy="320040"/>
+            <a:off x="5440680" y="1920240"/>
+            <a:ext cx="4206240" cy="320040"/>
           </a:xfrm>
           <a:prstGeom prst="rect">
             <a:avLst/>
@@ -7336,7 +8289,7 @@
           <a:noFill/>
         </p:spPr>
         <p:txBody>
-          <a:bodyPr wrap="square">
+          <a:bodyPr wrap="square" anchor="t" lIns="25400" rIns="25400" tIns="12700" bIns="12700">
             <a:spAutoFit/>
           </a:bodyPr>
           <a:lstStyle/>
@@ -7345,8 +8298,9 @@
             <a:r>
               <a:rPr sz="1200" b="0" i="0">
                 <a:solidFill>
-                  <a:srgbClr val="2A2A2A"/>
-                </a:solidFill>
+                  <a:srgbClr val="242A30"/>
+                </a:solidFill>
+                <a:latin typeface="Calibri"/>
               </a:rPr>
               <a:t>Hasan Arthur Altuntaş</a:t>
             </a:r>
@@ -7361,17 +8315,19 @@
         </p:nvSpPr>
         <p:spPr>
           <a:xfrm>
-            <a:off x="5349240" y="2148840"/>
-            <a:ext cx="4343400" cy="0"/>
-          </a:xfrm>
-          <a:prstGeom prst="rect">
-            <a:avLst/>
-          </a:prstGeom>
-          <a:ln w="12700">
-            <a:solidFill>
-              <a:srgbClr val="CCCCCC"/>
-            </a:solidFill>
+            <a:off x="5394960" y="2249424"/>
+            <a:ext cx="4297680" cy="10972"/>
+          </a:xfrm>
+          <a:prstGeom prst="rect">
+            <a:avLst/>
+          </a:prstGeom>
+          <a:solidFill>
+            <a:srgbClr val="D2D9E0"/>
+          </a:solidFill>
+          <a:ln>
+            <a:noFill/>
           </a:ln>
+          <a:effectLst/>
         </p:spPr>
         <p:style>
           <a:lnRef idx="1">
@@ -7403,7 +8359,7 @@
         </p:nvSpPr>
         <p:spPr>
           <a:xfrm>
-            <a:off x="2468880" y="2377440"/>
+            <a:off x="2514600" y="2468880"/>
             <a:ext cx="2834640" cy="320040"/>
           </a:xfrm>
           <a:prstGeom prst="rect">
@@ -7412,7 +8368,7 @@
           <a:noFill/>
         </p:spPr>
         <p:txBody>
-          <a:bodyPr wrap="square">
+          <a:bodyPr wrap="square" anchor="t" lIns="25400" rIns="25400" tIns="12700" bIns="12700">
             <a:spAutoFit/>
           </a:bodyPr>
           <a:lstStyle/>
@@ -7421,8 +8377,9 @@
             <a:r>
               <a:rPr sz="1200" b="1" i="0">
                 <a:solidFill>
-                  <a:srgbClr val="0D2B55"/>
-                </a:solidFill>
+                  <a:srgbClr val="102A4C"/>
+                </a:solidFill>
+                <a:latin typeface="Calibri"/>
               </a:rPr>
               <a:t>Öğrenci Numarası:</a:t>
             </a:r>
@@ -7437,8 +8394,8 @@
         </p:nvSpPr>
         <p:spPr>
           <a:xfrm>
-            <a:off x="5394960" y="2377440"/>
-            <a:ext cx="4297680" cy="320040"/>
+            <a:off x="5440680" y="2468880"/>
+            <a:ext cx="4206240" cy="320040"/>
           </a:xfrm>
           <a:prstGeom prst="rect">
             <a:avLst/>
@@ -7446,7 +8403,7 @@
           <a:noFill/>
         </p:spPr>
         <p:txBody>
-          <a:bodyPr wrap="square">
+          <a:bodyPr wrap="square" anchor="t" lIns="25400" rIns="25400" tIns="12700" bIns="12700">
             <a:spAutoFit/>
           </a:bodyPr>
           <a:lstStyle/>
@@ -7455,8 +8412,9 @@
             <a:r>
               <a:rPr sz="1200" b="0" i="0">
                 <a:solidFill>
-                  <a:srgbClr val="2A2A2A"/>
-                </a:solidFill>
+                  <a:srgbClr val="242A30"/>
+                </a:solidFill>
+                <a:latin typeface="Calibri"/>
               </a:rPr>
               <a:t/>
             </a:r>
@@ -7471,17 +8429,19 @@
         </p:nvSpPr>
         <p:spPr>
           <a:xfrm>
-            <a:off x="5349240" y="2715768"/>
-            <a:ext cx="4343400" cy="0"/>
-          </a:xfrm>
-          <a:prstGeom prst="rect">
-            <a:avLst/>
-          </a:prstGeom>
-          <a:ln w="12700">
-            <a:solidFill>
-              <a:srgbClr val="CCCCCC"/>
-            </a:solidFill>
+            <a:off x="5394960" y="2798064"/>
+            <a:ext cx="4297680" cy="10972"/>
+          </a:xfrm>
+          <a:prstGeom prst="rect">
+            <a:avLst/>
+          </a:prstGeom>
+          <a:solidFill>
+            <a:srgbClr val="D2D9E0"/>
+          </a:solidFill>
+          <a:ln>
+            <a:noFill/>
           </a:ln>
+          <a:effectLst/>
         </p:spPr>
         <p:style>
           <a:lnRef idx="1">
@@ -7513,7 +8473,7 @@
         </p:nvSpPr>
         <p:spPr>
           <a:xfrm>
-            <a:off x="2468880" y="2944368"/>
+            <a:off x="2514600" y="3017520"/>
             <a:ext cx="2834640" cy="320040"/>
           </a:xfrm>
           <a:prstGeom prst="rect">
@@ -7522,7 +8482,7 @@
           <a:noFill/>
         </p:spPr>
         <p:txBody>
-          <a:bodyPr wrap="square">
+          <a:bodyPr wrap="square" anchor="t" lIns="25400" rIns="25400" tIns="12700" bIns="12700">
             <a:spAutoFit/>
           </a:bodyPr>
           <a:lstStyle/>
@@ -7531,8 +8491,9 @@
             <a:r>
               <a:rPr sz="1200" b="1" i="0">
                 <a:solidFill>
-                  <a:srgbClr val="0D2B55"/>
-                </a:solidFill>
+                  <a:srgbClr val="102A4C"/>
+                </a:solidFill>
+                <a:latin typeface="Calibri"/>
               </a:rPr>
               <a:t>Bölüm:</a:t>
             </a:r>
@@ -7547,8 +8508,8 @@
         </p:nvSpPr>
         <p:spPr>
           <a:xfrm>
-            <a:off x="5394960" y="2944368"/>
-            <a:ext cx="4297680" cy="320040"/>
+            <a:off x="5440680" y="3017520"/>
+            <a:ext cx="4206240" cy="320040"/>
           </a:xfrm>
           <a:prstGeom prst="rect">
             <a:avLst/>
@@ -7556,7 +8517,7 @@
           <a:noFill/>
         </p:spPr>
         <p:txBody>
-          <a:bodyPr wrap="square">
+          <a:bodyPr wrap="square" anchor="t" lIns="25400" rIns="25400" tIns="12700" bIns="12700">
             <a:spAutoFit/>
           </a:bodyPr>
           <a:lstStyle/>
@@ -7565,8 +8526,9 @@
             <a:r>
               <a:rPr sz="1200" b="0" i="0">
                 <a:solidFill>
-                  <a:srgbClr val="2A2A2A"/>
-                </a:solidFill>
+                  <a:srgbClr val="242A30"/>
+                </a:solidFill>
+                <a:latin typeface="Calibri"/>
               </a:rPr>
               <a:t>Bilgisayar Mühendisliği</a:t>
             </a:r>
@@ -7581,17 +8543,19 @@
         </p:nvSpPr>
         <p:spPr>
           <a:xfrm>
-            <a:off x="5349240" y="3282696"/>
-            <a:ext cx="4343400" cy="0"/>
-          </a:xfrm>
-          <a:prstGeom prst="rect">
-            <a:avLst/>
-          </a:prstGeom>
-          <a:ln w="12700">
-            <a:solidFill>
-              <a:srgbClr val="CCCCCC"/>
-            </a:solidFill>
+            <a:off x="5394960" y="3346703"/>
+            <a:ext cx="4297680" cy="10972"/>
+          </a:xfrm>
+          <a:prstGeom prst="rect">
+            <a:avLst/>
+          </a:prstGeom>
+          <a:solidFill>
+            <a:srgbClr val="D2D9E0"/>
+          </a:solidFill>
+          <a:ln>
+            <a:noFill/>
           </a:ln>
+          <a:effectLst/>
         </p:spPr>
         <p:style>
           <a:lnRef idx="1">
@@ -7623,7 +8587,7 @@
         </p:nvSpPr>
         <p:spPr>
           <a:xfrm>
-            <a:off x="2468880" y="3511296"/>
+            <a:off x="2514600" y="3566160"/>
             <a:ext cx="2834640" cy="320040"/>
           </a:xfrm>
           <a:prstGeom prst="rect">
@@ -7632,7 +8596,7 @@
           <a:noFill/>
         </p:spPr>
         <p:txBody>
-          <a:bodyPr wrap="square">
+          <a:bodyPr wrap="square" anchor="t" lIns="25400" rIns="25400" tIns="12700" bIns="12700">
             <a:spAutoFit/>
           </a:bodyPr>
           <a:lstStyle/>
@@ -7641,8 +8605,9 @@
             <a:r>
               <a:rPr sz="1200" b="1" i="0">
                 <a:solidFill>
-                  <a:srgbClr val="0D2B55"/>
-                </a:solidFill>
+                  <a:srgbClr val="102A4C"/>
+                </a:solidFill>
+                <a:latin typeface="Calibri"/>
               </a:rPr>
               <a:t>Danışman:</a:t>
             </a:r>
@@ -7657,8 +8622,8 @@
         </p:nvSpPr>
         <p:spPr>
           <a:xfrm>
-            <a:off x="5394960" y="3511296"/>
-            <a:ext cx="4297680" cy="320040"/>
+            <a:off x="5440680" y="3566160"/>
+            <a:ext cx="4206240" cy="320040"/>
           </a:xfrm>
           <a:prstGeom prst="rect">
             <a:avLst/>
@@ -7666,7 +8631,7 @@
           <a:noFill/>
         </p:spPr>
         <p:txBody>
-          <a:bodyPr wrap="square">
+          <a:bodyPr wrap="square" anchor="t" lIns="25400" rIns="25400" tIns="12700" bIns="12700">
             <a:spAutoFit/>
           </a:bodyPr>
           <a:lstStyle/>
@@ -7675,8 +8640,9 @@
             <a:r>
               <a:rPr sz="1200" b="0" i="0">
                 <a:solidFill>
-                  <a:srgbClr val="2A2A2A"/>
-                </a:solidFill>
+                  <a:srgbClr val="242A30"/>
+                </a:solidFill>
+                <a:latin typeface="Calibri"/>
               </a:rPr>
               <a:t/>
             </a:r>
@@ -7691,17 +8657,19 @@
         </p:nvSpPr>
         <p:spPr>
           <a:xfrm>
-            <a:off x="5349240" y="3849624"/>
-            <a:ext cx="4343400" cy="0"/>
-          </a:xfrm>
-          <a:prstGeom prst="rect">
-            <a:avLst/>
-          </a:prstGeom>
-          <a:ln w="12700">
-            <a:solidFill>
-              <a:srgbClr val="CCCCCC"/>
-            </a:solidFill>
+            <a:off x="5394960" y="3895344"/>
+            <a:ext cx="4297680" cy="10972"/>
+          </a:xfrm>
+          <a:prstGeom prst="rect">
+            <a:avLst/>
+          </a:prstGeom>
+          <a:solidFill>
+            <a:srgbClr val="D2D9E0"/>
+          </a:solidFill>
+          <a:ln>
+            <a:noFill/>
           </a:ln>
+          <a:effectLst/>
         </p:spPr>
         <p:style>
           <a:lnRef idx="1">
@@ -7733,7 +8701,7 @@
         </p:nvSpPr>
         <p:spPr>
           <a:xfrm>
-            <a:off x="2468880" y="4078224"/>
+            <a:off x="2514600" y="4114800"/>
             <a:ext cx="2834640" cy="320040"/>
           </a:xfrm>
           <a:prstGeom prst="rect">
@@ -7742,7 +8710,7 @@
           <a:noFill/>
         </p:spPr>
         <p:txBody>
-          <a:bodyPr wrap="square">
+          <a:bodyPr wrap="square" anchor="t" lIns="25400" rIns="25400" tIns="12700" bIns="12700">
             <a:spAutoFit/>
           </a:bodyPr>
           <a:lstStyle/>
@@ -7751,8 +8719,9 @@
             <a:r>
               <a:rPr sz="1200" b="1" i="0">
                 <a:solidFill>
-                  <a:srgbClr val="0D2B55"/>
-                </a:solidFill>
+                  <a:srgbClr val="102A4C"/>
+                </a:solidFill>
+                <a:latin typeface="Calibri"/>
               </a:rPr>
               <a:t>Sunum Tarihi:</a:t>
             </a:r>
@@ -7767,8 +8736,8 @@
         </p:nvSpPr>
         <p:spPr>
           <a:xfrm>
-            <a:off x="5394960" y="4078224"/>
-            <a:ext cx="4297680" cy="320040"/>
+            <a:off x="5440680" y="4114800"/>
+            <a:ext cx="4206240" cy="320040"/>
           </a:xfrm>
           <a:prstGeom prst="rect">
             <a:avLst/>
@@ -7776,7 +8745,7 @@
           <a:noFill/>
         </p:spPr>
         <p:txBody>
-          <a:bodyPr wrap="square">
+          <a:bodyPr wrap="square" anchor="t" lIns="25400" rIns="25400" tIns="12700" bIns="12700">
             <a:spAutoFit/>
           </a:bodyPr>
           <a:lstStyle/>
@@ -7785,8 +8754,9 @@
             <a:r>
               <a:rPr sz="1200" b="0" i="0">
                 <a:solidFill>
-                  <a:srgbClr val="2A2A2A"/>
-                </a:solidFill>
+                  <a:srgbClr val="242A30"/>
+                </a:solidFill>
+                <a:latin typeface="Calibri"/>
               </a:rPr>
               <a:t/>
             </a:r>
@@ -7801,17 +8771,19 @@
         </p:nvSpPr>
         <p:spPr>
           <a:xfrm>
-            <a:off x="5349240" y="4416552"/>
-            <a:ext cx="4343400" cy="0"/>
-          </a:xfrm>
-          <a:prstGeom prst="rect">
-            <a:avLst/>
-          </a:prstGeom>
-          <a:ln w="12700">
-            <a:solidFill>
-              <a:srgbClr val="CCCCCC"/>
-            </a:solidFill>
+            <a:off x="5394960" y="4443984"/>
+            <a:ext cx="4297680" cy="10972"/>
+          </a:xfrm>
+          <a:prstGeom prst="rect">
+            <a:avLst/>
+          </a:prstGeom>
+          <a:solidFill>
+            <a:srgbClr val="D2D9E0"/>
+          </a:solidFill>
+          <a:ln>
+            <a:noFill/>
           </a:ln>
+          <a:effectLst/>
         </p:spPr>
         <p:style>
           <a:lnRef idx="1">
@@ -7843,7 +8815,7 @@
         </p:nvSpPr>
         <p:spPr>
           <a:xfrm>
-            <a:off x="2468880" y="4645152"/>
+            <a:off x="2514600" y="4663440"/>
             <a:ext cx="2834640" cy="320040"/>
           </a:xfrm>
           <a:prstGeom prst="rect">
@@ -7852,7 +8824,7 @@
           <a:noFill/>
         </p:spPr>
         <p:txBody>
-          <a:bodyPr wrap="square">
+          <a:bodyPr wrap="square" anchor="t" lIns="25400" rIns="25400" tIns="12700" bIns="12700">
             <a:spAutoFit/>
           </a:bodyPr>
           <a:lstStyle/>
@@ -7861,8 +8833,9 @@
             <a:r>
               <a:rPr sz="1200" b="1" i="0">
                 <a:solidFill>
-                  <a:srgbClr val="0D2B55"/>
-                </a:solidFill>
+                  <a:srgbClr val="102A4C"/>
+                </a:solidFill>
+                <a:latin typeface="Calibri"/>
               </a:rPr>
               <a:t>Sunum Adı:</a:t>
             </a:r>
@@ -7877,8 +8850,8 @@
         </p:nvSpPr>
         <p:spPr>
           <a:xfrm>
-            <a:off x="5394960" y="4645152"/>
-            <a:ext cx="4297680" cy="320040"/>
+            <a:off x="5440680" y="4663440"/>
+            <a:ext cx="4206240" cy="320040"/>
           </a:xfrm>
           <a:prstGeom prst="rect">
             <a:avLst/>
@@ -7886,7 +8859,7 @@
           <a:noFill/>
         </p:spPr>
         <p:txBody>
-          <a:bodyPr wrap="square">
+          <a:bodyPr wrap="square" anchor="t" lIns="25400" rIns="25400" tIns="12700" bIns="12700">
             <a:spAutoFit/>
           </a:bodyPr>
           <a:lstStyle/>
@@ -7895,8 +8868,9 @@
             <a:r>
               <a:rPr sz="1200" b="0" i="0">
                 <a:solidFill>
-                  <a:srgbClr val="2A2A2A"/>
-                </a:solidFill>
+                  <a:srgbClr val="242A30"/>
+                </a:solidFill>
+                <a:latin typeface="Calibri"/>
               </a:rPr>
               <a:t>Sonuç ve Demo Sunumu</a:t>
             </a:r>
@@ -7911,17 +8885,19 @@
         </p:nvSpPr>
         <p:spPr>
           <a:xfrm>
-            <a:off x="5349240" y="4983480"/>
-            <a:ext cx="4343400" cy="0"/>
-          </a:xfrm>
-          <a:prstGeom prst="rect">
-            <a:avLst/>
-          </a:prstGeom>
-          <a:ln w="12700">
-            <a:solidFill>
-              <a:srgbClr val="CCCCCC"/>
-            </a:solidFill>
+            <a:off x="5394960" y="4992624"/>
+            <a:ext cx="4297680" cy="10972"/>
+          </a:xfrm>
+          <a:prstGeom prst="rect">
+            <a:avLst/>
+          </a:prstGeom>
+          <a:solidFill>
+            <a:srgbClr val="D2D9E0"/>
+          </a:solidFill>
+          <a:ln>
+            <a:noFill/>
           </a:ln>
+          <a:effectLst/>
         </p:spPr>
         <p:style>
           <a:lnRef idx="1">
@@ -7953,8 +8929,8 @@
         </p:nvSpPr>
         <p:spPr>
           <a:xfrm>
-            <a:off x="2468880" y="5440680"/>
-            <a:ext cx="2926080" cy="347472"/>
+            <a:off x="2514600" y="5440680"/>
+            <a:ext cx="2743200" cy="347472"/>
           </a:xfrm>
           <a:prstGeom prst="rect">
             <a:avLst/>
@@ -7962,7 +8938,7 @@
           <a:noFill/>
         </p:spPr>
         <p:txBody>
-          <a:bodyPr wrap="square">
+          <a:bodyPr wrap="square" anchor="t" lIns="25400" rIns="25400" tIns="12700" bIns="12700">
             <a:spAutoFit/>
           </a:bodyPr>
           <a:lstStyle/>
@@ -7971,8 +8947,9 @@
             <a:r>
               <a:rPr sz="1300" b="1" i="0">
                 <a:solidFill>
-                  <a:srgbClr val="0D2B55"/>
-                </a:solidFill>
+                  <a:srgbClr val="102A4C"/>
+                </a:solidFill>
+                <a:latin typeface="Calibri"/>
               </a:rPr>
               <a:t>İmza:</a:t>
             </a:r>
@@ -7987,17 +8964,19 @@
         </p:nvSpPr>
         <p:spPr>
           <a:xfrm>
-            <a:off x="3246120" y="5788152"/>
-            <a:ext cx="6080760" cy="0"/>
-          </a:xfrm>
-          <a:prstGeom prst="rect">
-            <a:avLst/>
-          </a:prstGeom>
-          <a:ln w="19050">
-            <a:solidFill>
-              <a:srgbClr val="2A2A2A"/>
-            </a:solidFill>
+            <a:off x="3291840" y="5797296"/>
+            <a:ext cx="6126480" cy="12801"/>
+          </a:xfrm>
+          <a:prstGeom prst="rect">
+            <a:avLst/>
+          </a:prstGeom>
+          <a:solidFill>
+            <a:srgbClr val="242A30"/>
+          </a:solidFill>
+          <a:ln>
+            <a:noFill/>
           </a:ln>
+          <a:effectLst/>
         </p:spPr>
         <p:style>
           <a:lnRef idx="1">
@@ -8029,8 +9008,8 @@
         </p:nvSpPr>
         <p:spPr>
           <a:xfrm>
-            <a:off x="3246120" y="5843016"/>
-            <a:ext cx="6080760" cy="274320"/>
+            <a:off x="3291840" y="5852160"/>
+            <a:ext cx="6126480" cy="274320"/>
           </a:xfrm>
           <a:prstGeom prst="rect">
             <a:avLst/>
@@ -8038,7 +9017,7 @@
           <a:noFill/>
         </p:spPr>
         <p:txBody>
-          <a:bodyPr wrap="square">
+          <a:bodyPr wrap="square" anchor="t" lIns="25400" rIns="25400" tIns="12700" bIns="12700">
             <a:spAutoFit/>
           </a:bodyPr>
           <a:lstStyle/>
@@ -8047,8 +9026,9 @@
             <a:r>
               <a:rPr sz="900" b="0" i="0">
                 <a:solidFill>
-                  <a:srgbClr val="66707A"/>
-                </a:solidFill>
+                  <a:srgbClr val="6A7480"/>
+                </a:solidFill>
+                <a:latin typeface="Calibri"/>
               </a:rPr>
               <a:t>(Öğrenci bu alanı imzalayarak sunumun kendisine ait olduğunu onaylar.)</a:t>
             </a:r>

--- a/docs/academic/TeslimEdilecekler/Sunumlar/04_Sonuc_ve_Demo_Sunumu.pptx
+++ b/docs/academic/TeslimEdilecekler/Sunumlar/04_Sonuc_ve_Demo_Sunumu.pptx
@@ -3926,7 +3926,7 @@
         <p:spPr>
           <a:xfrm>
             <a:off x="365760" y="6473952"/>
-            <a:ext cx="7772400" cy="292608"/>
+            <a:ext cx="4206240" cy="292608"/>
           </a:xfrm>
           <a:prstGeom prst="rect">
             <a:avLst/>
@@ -3947,7 +3947,7 @@
                 </a:solidFill>
                 <a:latin typeface="Calibri"/>
               </a:rPr>
-              <a:t>AURIS  ·  Yapay Zekâ Üretimli Müzik Tespiti</a:t>
+              <a:t>AURIS · YZ Üretimli Müzik Tespiti</a:t>
             </a:r>
           </a:p>
         </p:txBody>
@@ -3960,8 +3960,8 @@
         </p:nvSpPr>
         <p:spPr>
           <a:xfrm>
-            <a:off x="5029200" y="6473952"/>
-            <a:ext cx="6793992" cy="292608"/>
+            <a:off x="4663440" y="6473952"/>
+            <a:ext cx="7159752" cy="292608"/>
           </a:xfrm>
           <a:prstGeom prst="rect">
             <a:avLst/>
@@ -4652,7 +4652,7 @@
         <p:spPr>
           <a:xfrm>
             <a:off x="365760" y="6473952"/>
-            <a:ext cx="7772400" cy="292608"/>
+            <a:ext cx="4206240" cy="292608"/>
           </a:xfrm>
           <a:prstGeom prst="rect">
             <a:avLst/>
@@ -4673,7 +4673,7 @@
                 </a:solidFill>
                 <a:latin typeface="Calibri"/>
               </a:rPr>
-              <a:t>AURIS  ·  Yapay Zekâ Üretimli Müzik Tespiti</a:t>
+              <a:t>AURIS · YZ Üretimli Müzik Tespiti</a:t>
             </a:r>
           </a:p>
         </p:txBody>
@@ -4686,8 +4686,8 @@
         </p:nvSpPr>
         <p:spPr>
           <a:xfrm>
-            <a:off x="5029200" y="6473952"/>
-            <a:ext cx="6793992" cy="292608"/>
+            <a:off x="4663440" y="6473952"/>
+            <a:ext cx="7159752" cy="292608"/>
           </a:xfrm>
           <a:prstGeom prst="rect">
             <a:avLst/>
@@ -6434,7 +6434,7 @@
         <p:spPr>
           <a:xfrm>
             <a:off x="365760" y="6473952"/>
-            <a:ext cx="7772400" cy="292608"/>
+            <a:ext cx="4206240" cy="292608"/>
           </a:xfrm>
           <a:prstGeom prst="rect">
             <a:avLst/>
@@ -6455,7 +6455,7 @@
                 </a:solidFill>
                 <a:latin typeface="Calibri"/>
               </a:rPr>
-              <a:t>AURIS  ·  Yapay Zekâ Üretimli Müzik Tespiti</a:t>
+              <a:t>AURIS · YZ Üretimli Müzik Tespiti</a:t>
             </a:r>
           </a:p>
         </p:txBody>
@@ -6468,8 +6468,8 @@
         </p:nvSpPr>
         <p:spPr>
           <a:xfrm>
-            <a:off x="5029200" y="6473952"/>
-            <a:ext cx="6793992" cy="292608"/>
+            <a:off x="4663440" y="6473952"/>
+            <a:ext cx="7159752" cy="292608"/>
           </a:xfrm>
           <a:prstGeom prst="rect">
             <a:avLst/>
@@ -7946,7 +7946,7 @@
         <p:spPr>
           <a:xfrm>
             <a:off x="365760" y="6473952"/>
-            <a:ext cx="7772400" cy="292608"/>
+            <a:ext cx="4206240" cy="292608"/>
           </a:xfrm>
           <a:prstGeom prst="rect">
             <a:avLst/>
@@ -7967,7 +7967,7 @@
                 </a:solidFill>
                 <a:latin typeface="Calibri"/>
               </a:rPr>
-              <a:t>AURIS  ·  Yapay Zekâ Üretimli Müzik Tespiti</a:t>
+              <a:t>AURIS · YZ Üretimli Müzik Tespiti</a:t>
             </a:r>
           </a:p>
         </p:txBody>
@@ -7980,8 +7980,8 @@
         </p:nvSpPr>
         <p:spPr>
           <a:xfrm>
-            <a:off x="5029200" y="6473952"/>
-            <a:ext cx="6793992" cy="292608"/>
+            <a:off x="4663440" y="6473952"/>
+            <a:ext cx="7159752" cy="292608"/>
           </a:xfrm>
           <a:prstGeom prst="rect">
             <a:avLst/>
